--- a/statistics.pptx
+++ b/statistics.pptx
@@ -5,27 +5,28 @@
     <p:sldMasterId id="2147483659" r:id="rId1"/>
   </p:sldMasterIdLst>
   <p:notesMasterIdLst>
-    <p:notesMasterId r:id="rId20"/>
+    <p:notesMasterId r:id="rId21"/>
   </p:notesMasterIdLst>
   <p:sldIdLst>
     <p:sldId id="262" r:id="rId2"/>
     <p:sldId id="263" r:id="rId3"/>
     <p:sldId id="264" r:id="rId4"/>
     <p:sldId id="273" r:id="rId5"/>
-    <p:sldId id="265" r:id="rId6"/>
-    <p:sldId id="266" r:id="rId7"/>
-    <p:sldId id="267" r:id="rId8"/>
-    <p:sldId id="268" r:id="rId9"/>
-    <p:sldId id="269" r:id="rId10"/>
-    <p:sldId id="270" r:id="rId11"/>
-    <p:sldId id="271" r:id="rId12"/>
-    <p:sldId id="272" r:id="rId13"/>
-    <p:sldId id="256" r:id="rId14"/>
-    <p:sldId id="257" r:id="rId15"/>
-    <p:sldId id="258" r:id="rId16"/>
-    <p:sldId id="259" r:id="rId17"/>
-    <p:sldId id="260" r:id="rId18"/>
-    <p:sldId id="261" r:id="rId19"/>
+    <p:sldId id="274" r:id="rId6"/>
+    <p:sldId id="265" r:id="rId7"/>
+    <p:sldId id="266" r:id="rId8"/>
+    <p:sldId id="267" r:id="rId9"/>
+    <p:sldId id="268" r:id="rId10"/>
+    <p:sldId id="269" r:id="rId11"/>
+    <p:sldId id="270" r:id="rId12"/>
+    <p:sldId id="257" r:id="rId13"/>
+    <p:sldId id="258" r:id="rId14"/>
+    <p:sldId id="259" r:id="rId15"/>
+    <p:sldId id="260" r:id="rId16"/>
+    <p:sldId id="261" r:id="rId17"/>
+    <p:sldId id="275" r:id="rId18"/>
+    <p:sldId id="271" r:id="rId19"/>
+    <p:sldId id="272" r:id="rId20"/>
   </p:sldIdLst>
   <p:sldSz cx="12192000" cy="6858000"/>
   <p:notesSz cx="6858000" cy="9144000"/>
@@ -258,6 +259,11 @@
       </a:defRPr>
     </a:lvl9pPr>
   </p:defaultTextStyle>
+  <p:extLst>
+    <p:ext uri="{EFAFB233-063F-42B5-8137-9DF3F51BA10A}">
+      <p15:sldGuideLst xmlns:p15="http://schemas.microsoft.com/office/powerpoint/2012/main"/>
+    </p:ext>
+  </p:extLst>
 </p:presentation>
 </file>
 
@@ -1473,7 +1479,45 @@
       </p:grpSpPr>
       <p:sp>
         <p:nvSpPr>
-          <p:cNvPr id="85" name="Google Shape;85;g60bda0dc20_0_0:notes"/>
+          <p:cNvPr id="85" name="Google Shape;85;p3:notes"/>
+          <p:cNvSpPr txBox="1">
+            <a:spLocks noGrp="1"/>
+          </p:cNvSpPr>
+          <p:nvPr>
+            <p:ph type="body" idx="1"/>
+          </p:nvPr>
+        </p:nvSpPr>
+        <p:spPr>
+          <a:xfrm>
+            <a:off x="685800" y="4400550"/>
+            <a:ext cx="5486400" cy="3600450"/>
+          </a:xfrm>
+          <a:prstGeom prst="rect">
+            <a:avLst/>
+          </a:prstGeom>
+        </p:spPr>
+        <p:txBody>
+          <a:bodyPr spcFirstLastPara="1" wrap="square" lIns="91425" tIns="91425" rIns="91425" bIns="91425" anchor="t" anchorCtr="0">
+            <a:noAutofit/>
+          </a:bodyPr>
+          <a:lstStyle/>
+          <a:p>
+            <a:pPr marL="0" lvl="0" indent="0" algn="l" rtl="0">
+              <a:spcBef>
+                <a:spcPts val="0"/>
+              </a:spcBef>
+              <a:spcAft>
+                <a:spcPts val="0"/>
+              </a:spcAft>
+              <a:buNone/>
+            </a:pPr>
+            <a:endParaRPr/>
+          </a:p>
+        </p:txBody>
+      </p:sp>
+      <p:sp>
+        <p:nvSpPr>
+          <p:cNvPr id="86" name="Google Shape;86;p3:notes"/>
           <p:cNvSpPr>
             <a:spLocks noGrp="1" noRot="1" noChangeAspect="1"/>
           </p:cNvSpPr>
@@ -1512,91 +1556,12 @@
           </a:custGeom>
         </p:spPr>
       </p:sp>
-      <p:sp>
-        <p:nvSpPr>
-          <p:cNvPr id="86" name="Google Shape;86;g60bda0dc20_0_0:notes"/>
-          <p:cNvSpPr txBox="1">
-            <a:spLocks noGrp="1"/>
-          </p:cNvSpPr>
-          <p:nvPr>
-            <p:ph type="body" idx="1"/>
-          </p:nvPr>
-        </p:nvSpPr>
-        <p:spPr>
-          <a:xfrm>
-            <a:off x="685800" y="4400550"/>
-            <a:ext cx="5486400" cy="3600600"/>
-          </a:xfrm>
-          <a:prstGeom prst="rect">
-            <a:avLst/>
-          </a:prstGeom>
-        </p:spPr>
-        <p:txBody>
-          <a:bodyPr spcFirstLastPara="1" wrap="square" lIns="91425" tIns="91425" rIns="91425" bIns="91425" anchor="t" anchorCtr="0">
-            <a:noAutofit/>
-          </a:bodyPr>
-          <a:lstStyle/>
-          <a:p>
-            <a:pPr marL="0" lvl="0" indent="0" algn="l" rtl="0">
-              <a:spcBef>
-                <a:spcPts val="0"/>
-              </a:spcBef>
-              <a:spcAft>
-                <a:spcPts val="0"/>
-              </a:spcAft>
-              <a:buNone/>
-            </a:pPr>
-            <a:endParaRPr/>
-          </a:p>
-        </p:txBody>
-      </p:sp>
-      <p:sp>
-        <p:nvSpPr>
-          <p:cNvPr id="87" name="Google Shape;87;g60bda0dc20_0_0:notes"/>
-          <p:cNvSpPr txBox="1">
-            <a:spLocks noGrp="1"/>
-          </p:cNvSpPr>
-          <p:nvPr>
-            <p:ph type="sldNum" idx="12"/>
-          </p:nvPr>
-        </p:nvSpPr>
-        <p:spPr>
-          <a:xfrm>
-            <a:off x="3884613" y="8685213"/>
-            <a:ext cx="2971800" cy="458700"/>
-          </a:xfrm>
-          <a:prstGeom prst="rect">
-            <a:avLst/>
-          </a:prstGeom>
-        </p:spPr>
-        <p:txBody>
-          <a:bodyPr spcFirstLastPara="1" wrap="square" lIns="91425" tIns="45700" rIns="91425" bIns="45700" anchor="b" anchorCtr="0">
-            <a:noAutofit/>
-          </a:bodyPr>
-          <a:lstStyle/>
-          <a:p>
-            <a:pPr marL="0" lvl="0" indent="0" algn="r" rtl="0">
-              <a:spcBef>
-                <a:spcPts val="0"/>
-              </a:spcBef>
-              <a:spcAft>
-                <a:spcPts val="0"/>
-              </a:spcAft>
-              <a:buClr>
-                <a:srgbClr val="000000"/>
-              </a:buClr>
-              <a:buFont typeface="Arial"/>
-              <a:buNone/>
-            </a:pPr>
-            <a:fld id="{00000000-1234-1234-1234-123412341234}" type="slidenum">
-              <a:rPr lang="en-US"/>
-              <a:t>13</a:t>
-            </a:fld>
-            <a:endParaRPr/>
-          </a:p>
-        </p:txBody>
-      </p:sp>
     </p:spTree>
+    <p:extLst>
+      <p:ext uri="{BB962C8B-B14F-4D97-AF65-F5344CB8AC3E}">
+        <p14:creationId xmlns:p14="http://schemas.microsoft.com/office/powerpoint/2010/main" val="3712630475"/>
+      </p:ext>
+    </p:extLst>
   </p:cSld>
   <p:clrMapOvr>
     <a:masterClrMapping/>
@@ -1740,7 +1705,7 @@
             </a:pPr>
             <a:fld id="{00000000-1234-1234-1234-123412341234}" type="slidenum">
               <a:rPr lang="en-US"/>
-              <a:t>14</a:t>
+              <a:t>12</a:t>
             </a:fld>
             <a:endParaRPr/>
           </a:p>
@@ -2098,7 +2063,7 @@
             </a:pPr>
             <a:fld id="{00000000-1234-1234-1234-123412341234}" type="slidenum">
               <a:rPr lang="en-US"/>
-              <a:t>17</a:t>
+              <a:t>15</a:t>
             </a:fld>
             <a:endParaRPr/>
           </a:p>
@@ -2248,7 +2213,7 @@
             </a:pPr>
             <a:fld id="{00000000-1234-1234-1234-123412341234}" type="slidenum">
               <a:rPr lang="en-US"/>
-              <a:t>18</a:t>
+              <a:t>16</a:t>
             </a:fld>
             <a:endParaRPr/>
           </a:p>
@@ -16358,7 +16323,7 @@
         <p:spPr>
           <a:xfrm>
             <a:off x="157655" y="998483"/>
-            <a:ext cx="5549462" cy="5693866"/>
+            <a:ext cx="5549462" cy="5262979"/>
           </a:xfrm>
           <a:prstGeom prst="rect">
             <a:avLst/>
@@ -16379,16 +16344,27 @@
           <a:p>
             <a:r>
               <a:rPr lang="en-US" dirty="0"/>
-              <a:t>    https://</a:t>
-            </a:r>
-            <a:r>
-              <a:rPr lang="en-US" dirty="0" err="1"/>
+              <a:t>    </a:t>
+            </a:r>
+            <a:r>
+              <a:rPr lang="en-US" dirty="0">
+                <a:hlinkClick r:id="rId2"/>
+              </a:rPr>
+              <a:t>https://</a:t>
+            </a:r>
+            <a:r>
+              <a:rPr lang="en-US" dirty="0" err="1">
+                <a:hlinkClick r:id="rId2"/>
+              </a:rPr>
               <a:t>www.quora.com</a:t>
             </a:r>
             <a:r>
-              <a:rPr lang="en-US" dirty="0"/>
+              <a:rPr lang="en-US" dirty="0">
+                <a:hlinkClick r:id="rId2"/>
+              </a:rPr>
               <a:t>/What-are-some-good-books-for-learning-probability-and-statistics</a:t>
             </a:r>
+            <a:endParaRPr lang="en-US" dirty="0"/>
           </a:p>
           <a:p>
             <a:endParaRPr lang="en-US" dirty="0"/>
@@ -16501,18 +16477,6 @@
             <a:r>
               <a:rPr lang="en-US" dirty="0"/>
               <a:t>outcomes (1,2,3,4,5,6), each one has same probability – 1/6.</a:t>
-            </a:r>
-          </a:p>
-          <a:p>
-            <a:r>
-              <a:rPr lang="en-US" dirty="0"/>
-              <a:t>If we throw 2 cubes, there are 6*6=36 possible combinations.</a:t>
-            </a:r>
-          </a:p>
-          <a:p>
-            <a:r>
-              <a:rPr lang="en-US" dirty="0"/>
-              <a:t>Probability of each combination is the same – 1/36.</a:t>
             </a:r>
           </a:p>
         </p:txBody>
@@ -16532,7 +16496,7 @@
         <p:spPr>
           <a:xfrm>
             <a:off x="6096000" y="588579"/>
-            <a:ext cx="6096000" cy="5170646"/>
+            <a:ext cx="6096000" cy="5816977"/>
           </a:xfrm>
           <a:prstGeom prst="rect">
             <a:avLst/>
@@ -16547,6 +16511,21 @@
           <a:p>
             <a:r>
               <a:rPr lang="en-US" dirty="0"/>
+              <a:t>If we throw 2 cubes, there are 6*6=36 possible combinations.</a:t>
+            </a:r>
+          </a:p>
+          <a:p>
+            <a:r>
+              <a:rPr lang="en-US" dirty="0"/>
+              <a:t>Probability of each combination is the same – 1/36.</a:t>
+            </a:r>
+          </a:p>
+          <a:p>
+            <a:endParaRPr lang="en-US" dirty="0"/>
+          </a:p>
+          <a:p>
+            <a:r>
+              <a:rPr lang="en-US" dirty="0"/>
               <a:t>If we define an outcome as a sum of numbers on top side of </a:t>
             </a:r>
           </a:p>
@@ -16743,10 +16722,16 @@
                 </a:solidFill>
                 <a:latin typeface="Monaco" pitchFamily="2" charset="77"/>
               </a:rPr>
-              <a:t>Total  36                           1</a:t>
-            </a:r>
-          </a:p>
-          <a:p>
+              <a:t>Total                              36              1</a:t>
+            </a:r>
+            <a:br>
+              <a:rPr lang="en-US" sz="1200" dirty="0">
+                <a:solidFill>
+                  <a:srgbClr val="0070C0"/>
+                </a:solidFill>
+                <a:latin typeface="Monaco" pitchFamily="2" charset="77"/>
+              </a:rPr>
+            </a:br>
             <a:endParaRPr lang="en-US" dirty="0"/>
           </a:p>
           <a:p>
@@ -16810,488 +16795,6 @@
       </p:grpSpPr>
       <p:sp>
         <p:nvSpPr>
-          <p:cNvPr id="4" name="TextBox 3">
-            <a:extLst>
-              <a:ext uri="{FF2B5EF4-FFF2-40B4-BE49-F238E27FC236}">
-                <a16:creationId xmlns:a16="http://schemas.microsoft.com/office/drawing/2014/main" id="{1EB5F268-965F-C142-A102-83C02389B555}"/>
-              </a:ext>
-            </a:extLst>
-          </p:cNvPr>
-          <p:cNvSpPr txBox="1"/>
-          <p:nvPr/>
-        </p:nvSpPr>
-        <p:spPr>
-          <a:xfrm>
-            <a:off x="189186" y="178676"/>
-            <a:ext cx="5906814" cy="6370975"/>
-          </a:xfrm>
-          <a:prstGeom prst="rect">
-            <a:avLst/>
-          </a:prstGeom>
-          <a:noFill/>
-        </p:spPr>
-        <p:txBody>
-          <a:bodyPr wrap="square" rtlCol="0">
-            <a:spAutoFit/>
-          </a:bodyPr>
-          <a:lstStyle/>
-          <a:p>
-            <a:r>
-              <a:rPr lang="en-US" sz="1200" dirty="0"/>
-              <a:t>More advanced topics:</a:t>
-            </a:r>
-          </a:p>
-          <a:p>
-            <a:endParaRPr lang="en-US" sz="1200" dirty="0"/>
-          </a:p>
-          <a:p>
-            <a:r>
-              <a:rPr lang="en-US" sz="1200" dirty="0"/>
-              <a:t>Linear Regression </a:t>
-            </a:r>
-          </a:p>
-          <a:p>
-            <a:r>
-              <a:rPr lang="en-US" sz="1200" dirty="0"/>
-              <a:t>  – draw a line through experimental points.</a:t>
-            </a:r>
-          </a:p>
-          <a:p>
-            <a:r>
-              <a:rPr lang="en-US" sz="1200" dirty="0"/>
-              <a:t>  – ( https://</a:t>
-            </a:r>
-            <a:r>
-              <a:rPr lang="en-US" sz="1200" dirty="0" err="1"/>
-              <a:t>en.wikipedia.org</a:t>
-            </a:r>
-            <a:r>
-              <a:rPr lang="en-US" sz="1200" dirty="0"/>
-              <a:t>/wiki/</a:t>
-            </a:r>
-            <a:r>
-              <a:rPr lang="en-US" sz="1200" dirty="0" err="1"/>
-              <a:t>Linear_regression</a:t>
-            </a:r>
-            <a:r>
-              <a:rPr lang="en-US" sz="1200" dirty="0"/>
-              <a:t> ) </a:t>
-            </a:r>
-          </a:p>
-          <a:p>
-            <a:endParaRPr lang="en-US" sz="1200" dirty="0"/>
-          </a:p>
-          <a:p>
-            <a:r>
-              <a:rPr lang="en-US" sz="1200" dirty="0"/>
-              <a:t>Simple Linear Regression </a:t>
-            </a:r>
-          </a:p>
-          <a:p>
-            <a:r>
-              <a:rPr lang="en-US" sz="1200" dirty="0"/>
-              <a:t>  – ( https://</a:t>
-            </a:r>
-            <a:r>
-              <a:rPr lang="en-US" sz="1200" dirty="0" err="1"/>
-              <a:t>en.wikipedia.org</a:t>
-            </a:r>
-            <a:r>
-              <a:rPr lang="en-US" sz="1200" dirty="0"/>
-              <a:t>/wiki/</a:t>
-            </a:r>
-            <a:r>
-              <a:rPr lang="en-US" sz="1200" dirty="0" err="1"/>
-              <a:t>Simple_linear_regression</a:t>
-            </a:r>
-            <a:r>
-              <a:rPr lang="en-US" sz="1200" dirty="0"/>
-              <a:t> ) </a:t>
-            </a:r>
-          </a:p>
-          <a:p>
-            <a:r>
-              <a:rPr lang="en-US" sz="1200" dirty="0"/>
-              <a:t>  – the  least squares estimator of a linear regression model.</a:t>
-            </a:r>
-          </a:p>
-          <a:p>
-            <a:endParaRPr lang="en-US" sz="1200" dirty="0"/>
-          </a:p>
-          <a:p>
-            <a:r>
-              <a:rPr lang="en-US" sz="1200" dirty="0"/>
-              <a:t>Here is the simplest standard OLS method (OLS = Ordinary Least Squares).</a:t>
-            </a:r>
-          </a:p>
-          <a:p>
-            <a:endParaRPr lang="en-US" sz="1200" dirty="0"/>
-          </a:p>
-          <a:p>
-            <a:r>
-              <a:rPr lang="en-US" sz="1200" dirty="0"/>
-              <a:t>    </a:t>
-            </a:r>
-            <a:r>
-              <a:rPr lang="en-US" sz="1200" dirty="0" err="1"/>
-              <a:t>ym</a:t>
-            </a:r>
-            <a:r>
-              <a:rPr lang="en-US" sz="1200" dirty="0"/>
-              <a:t> = </a:t>
-            </a:r>
-            <a:r>
-              <a:rPr lang="en-US" sz="1200" dirty="0" err="1"/>
-              <a:t>y_mean</a:t>
-            </a:r>
-            <a:r>
-              <a:rPr lang="en-US" sz="1200" dirty="0"/>
-              <a:t> = sum(y)/N</a:t>
-            </a:r>
-          </a:p>
-          <a:p>
-            <a:r>
-              <a:rPr lang="en-US" sz="1200" dirty="0"/>
-              <a:t>    </a:t>
-            </a:r>
-            <a:r>
-              <a:rPr lang="en-US" sz="1200" dirty="0" err="1"/>
-              <a:t>xm</a:t>
-            </a:r>
-            <a:r>
-              <a:rPr lang="en-US" sz="1200" dirty="0"/>
-              <a:t> = </a:t>
-            </a:r>
-            <a:r>
-              <a:rPr lang="en-US" sz="1200" dirty="0" err="1"/>
-              <a:t>x_mean</a:t>
-            </a:r>
-            <a:r>
-              <a:rPr lang="en-US" sz="1200" dirty="0"/>
-              <a:t> = sum(x)/N</a:t>
-            </a:r>
-          </a:p>
-          <a:p>
-            <a:r>
-              <a:rPr lang="en-US" sz="1200" dirty="0"/>
-              <a:t>    </a:t>
-            </a:r>
-          </a:p>
-          <a:p>
-            <a:r>
-              <a:rPr lang="en-US" sz="1200" dirty="0"/>
-              <a:t>    var(x) = variance(x) = sum((x-</a:t>
-            </a:r>
-            <a:r>
-              <a:rPr lang="en-US" sz="1200" dirty="0" err="1"/>
-              <a:t>xm</a:t>
-            </a:r>
-            <a:r>
-              <a:rPr lang="en-US" sz="1200" dirty="0"/>
-              <a:t>)^2)</a:t>
-            </a:r>
-          </a:p>
-          <a:p>
-            <a:r>
-              <a:rPr lang="en-US" sz="1200" dirty="0"/>
-              <a:t>    </a:t>
-            </a:r>
-            <a:r>
-              <a:rPr lang="en-US" sz="1200" dirty="0" err="1"/>
-              <a:t>covar</a:t>
-            </a:r>
-            <a:r>
-              <a:rPr lang="en-US" sz="1200" dirty="0"/>
-              <a:t>(</a:t>
-            </a:r>
-            <a:r>
-              <a:rPr lang="en-US" sz="1200" dirty="0" err="1"/>
-              <a:t>x,y</a:t>
-            </a:r>
-            <a:r>
-              <a:rPr lang="en-US" sz="1200" dirty="0"/>
-              <a:t>) = covariance(</a:t>
-            </a:r>
-            <a:r>
-              <a:rPr lang="en-US" sz="1200" dirty="0" err="1"/>
-              <a:t>x,y</a:t>
-            </a:r>
-            <a:r>
-              <a:rPr lang="en-US" sz="1200" dirty="0"/>
-              <a:t>) = sum((y-</a:t>
-            </a:r>
-            <a:r>
-              <a:rPr lang="en-US" sz="1200" dirty="0" err="1"/>
-              <a:t>ym</a:t>
-            </a:r>
-            <a:r>
-              <a:rPr lang="en-US" sz="1200" dirty="0"/>
-              <a:t>)*(x-</a:t>
-            </a:r>
-            <a:r>
-              <a:rPr lang="en-US" sz="1200" dirty="0" err="1"/>
-              <a:t>xm</a:t>
-            </a:r>
-            <a:r>
-              <a:rPr lang="en-US" sz="1200" dirty="0"/>
-              <a:t>))</a:t>
-            </a:r>
-          </a:p>
-          <a:p>
-            <a:r>
-              <a:rPr lang="en-US" sz="1200" dirty="0"/>
-              <a:t>    </a:t>
-            </a:r>
-          </a:p>
-          <a:p>
-            <a:r>
-              <a:rPr lang="en-US" sz="1200" dirty="0"/>
-              <a:t>    slope b = </a:t>
-            </a:r>
-            <a:r>
-              <a:rPr lang="en-US" sz="1200" dirty="0" err="1"/>
-              <a:t>covar</a:t>
-            </a:r>
-            <a:r>
-              <a:rPr lang="en-US" sz="1200" dirty="0"/>
-              <a:t>(</a:t>
-            </a:r>
-            <a:r>
-              <a:rPr lang="en-US" sz="1200" dirty="0" err="1"/>
-              <a:t>x,y</a:t>
-            </a:r>
-            <a:r>
-              <a:rPr lang="en-US" sz="1200" dirty="0"/>
-              <a:t>) / var(x)</a:t>
-            </a:r>
-          </a:p>
-          <a:p>
-            <a:r>
-              <a:rPr lang="en-US" sz="1200" dirty="0"/>
-              <a:t>    intercept a = </a:t>
-            </a:r>
-            <a:r>
-              <a:rPr lang="en-US" sz="1200" dirty="0" err="1"/>
-              <a:t>ym</a:t>
-            </a:r>
-            <a:r>
-              <a:rPr lang="en-US" sz="1200" dirty="0"/>
-              <a:t> - b*</a:t>
-            </a:r>
-            <a:r>
-              <a:rPr lang="en-US" sz="1200" dirty="0" err="1"/>
-              <a:t>xm</a:t>
-            </a:r>
-            <a:endParaRPr lang="en-US" sz="1200" dirty="0"/>
-          </a:p>
-          <a:p>
-            <a:r>
-              <a:rPr lang="en-US" sz="1200" dirty="0"/>
-              <a:t>    </a:t>
-            </a:r>
-          </a:p>
-          <a:p>
-            <a:r>
-              <a:rPr lang="en-US" sz="1200" dirty="0"/>
-              <a:t>    We can simplify as following:</a:t>
-            </a:r>
-          </a:p>
-          <a:p>
-            <a:endParaRPr lang="en-US" sz="1200" dirty="0"/>
-          </a:p>
-          <a:p>
-            <a:r>
-              <a:rPr lang="en-US" sz="1200" dirty="0"/>
-              <a:t>    var(x) = sum((x-</a:t>
-            </a:r>
-            <a:r>
-              <a:rPr lang="en-US" sz="1200" dirty="0" err="1"/>
-              <a:t>xm</a:t>
-            </a:r>
-            <a:r>
-              <a:rPr lang="en-US" sz="1200" dirty="0"/>
-              <a:t>)^2) = sum(x^2) - sum(2*x*</a:t>
-            </a:r>
-            <a:r>
-              <a:rPr lang="en-US" sz="1200" dirty="0" err="1"/>
-              <a:t>xm</a:t>
-            </a:r>
-            <a:r>
-              <a:rPr lang="en-US" sz="1200" dirty="0"/>
-              <a:t>) + sum(xm^2) = sum(x^2) - N*xm^2</a:t>
-            </a:r>
-          </a:p>
-          <a:p>
-            <a:r>
-              <a:rPr lang="en-US" sz="1200" dirty="0"/>
-              <a:t>    </a:t>
-            </a:r>
-            <a:r>
-              <a:rPr lang="en-US" sz="1200" dirty="0" err="1"/>
-              <a:t>covar</a:t>
-            </a:r>
-            <a:r>
-              <a:rPr lang="en-US" sz="1200" dirty="0"/>
-              <a:t>(</a:t>
-            </a:r>
-            <a:r>
-              <a:rPr lang="en-US" sz="1200" dirty="0" err="1"/>
-              <a:t>x,y</a:t>
-            </a:r>
-            <a:r>
-              <a:rPr lang="en-US" sz="1200" dirty="0"/>
-              <a:t>) = ... using similar logic = sum(y*x) - N*</a:t>
-            </a:r>
-            <a:r>
-              <a:rPr lang="en-US" sz="1200" dirty="0" err="1"/>
-              <a:t>xm</a:t>
-            </a:r>
-            <a:r>
-              <a:rPr lang="en-US" sz="1200" dirty="0"/>
-              <a:t>*</a:t>
-            </a:r>
-            <a:r>
-              <a:rPr lang="en-US" sz="1200" dirty="0" err="1"/>
-              <a:t>ym</a:t>
-            </a:r>
-            <a:endParaRPr lang="en-US" sz="1200" dirty="0"/>
-          </a:p>
-          <a:p>
-            <a:r>
-              <a:rPr lang="en-US" sz="1200" dirty="0"/>
-              <a:t>    </a:t>
-            </a:r>
-          </a:p>
-          <a:p>
-            <a:r>
-              <a:rPr lang="en-US" sz="1200" dirty="0"/>
-              <a:t>    So:</a:t>
-            </a:r>
-          </a:p>
-          <a:p>
-            <a:endParaRPr lang="en-US" sz="1200" dirty="0"/>
-          </a:p>
-          <a:p>
-            <a:r>
-              <a:rPr lang="en-US" sz="1200" dirty="0"/>
-              <a:t>    slope b = (sum(y*x) - N*</a:t>
-            </a:r>
-            <a:r>
-              <a:rPr lang="en-US" sz="1200" dirty="0" err="1"/>
-              <a:t>xm</a:t>
-            </a:r>
-            <a:r>
-              <a:rPr lang="en-US" sz="1200" dirty="0"/>
-              <a:t>*</a:t>
-            </a:r>
-            <a:r>
-              <a:rPr lang="en-US" sz="1200" dirty="0" err="1"/>
-              <a:t>ym</a:t>
-            </a:r>
-            <a:r>
-              <a:rPr lang="en-US" sz="1200" dirty="0"/>
-              <a:t>) / (sum(x^2) - N*xm^2)</a:t>
-            </a:r>
-          </a:p>
-          <a:p>
-            <a:r>
-              <a:rPr lang="en-US" sz="1200" dirty="0"/>
-              <a:t>    intercept a = </a:t>
-            </a:r>
-            <a:r>
-              <a:rPr lang="en-US" sz="1200" dirty="0" err="1"/>
-              <a:t>ym</a:t>
-            </a:r>
-            <a:r>
-              <a:rPr lang="en-US" sz="1200" dirty="0"/>
-              <a:t> - b*</a:t>
-            </a:r>
-            <a:r>
-              <a:rPr lang="en-US" sz="1200" dirty="0" err="1"/>
-              <a:t>xm</a:t>
-            </a:r>
-            <a:r>
-              <a:rPr lang="en-US" sz="1200" dirty="0"/>
-              <a:t> = (</a:t>
-            </a:r>
-            <a:r>
-              <a:rPr lang="en-US" sz="1200" dirty="0" err="1"/>
-              <a:t>ym</a:t>
-            </a:r>
-            <a:r>
-              <a:rPr lang="en-US" sz="1200" dirty="0"/>
-              <a:t> * sum(x^2) - </a:t>
-            </a:r>
-            <a:r>
-              <a:rPr lang="en-US" sz="1200" dirty="0" err="1"/>
-              <a:t>ym</a:t>
-            </a:r>
-            <a:r>
-              <a:rPr lang="en-US" sz="1200" dirty="0"/>
-              <a:t>*N*xm^2 -</a:t>
-            </a:r>
-            <a:r>
-              <a:rPr lang="en-US" sz="1200" dirty="0" err="1"/>
-              <a:t>xm</a:t>
-            </a:r>
-            <a:r>
-              <a:rPr lang="en-US" sz="1200" dirty="0"/>
-              <a:t>*sum(y*x)+</a:t>
-            </a:r>
-            <a:r>
-              <a:rPr lang="en-US" sz="1200" dirty="0" err="1"/>
-              <a:t>xm</a:t>
-            </a:r>
-            <a:r>
-              <a:rPr lang="en-US" sz="1200" dirty="0"/>
-              <a:t>*N*</a:t>
-            </a:r>
-            <a:r>
-              <a:rPr lang="en-US" sz="1200" dirty="0" err="1"/>
-              <a:t>xm</a:t>
-            </a:r>
-            <a:r>
-              <a:rPr lang="en-US" sz="1200" dirty="0"/>
-              <a:t>*</a:t>
-            </a:r>
-            <a:r>
-              <a:rPr lang="en-US" sz="1200" dirty="0" err="1"/>
-              <a:t>ym</a:t>
-            </a:r>
-            <a:r>
-              <a:rPr lang="en-US" sz="1200" dirty="0"/>
-              <a:t>)/(sum(x^2) - N*xm^2)</a:t>
-            </a:r>
-          </a:p>
-          <a:p>
-            <a:r>
-              <a:rPr lang="en-US" sz="1200" dirty="0"/>
-              <a:t>      = (</a:t>
-            </a:r>
-            <a:r>
-              <a:rPr lang="en-US" sz="1200" dirty="0" err="1"/>
-              <a:t>ym</a:t>
-            </a:r>
-            <a:r>
-              <a:rPr lang="en-US" sz="1200" dirty="0"/>
-              <a:t> * sum(x^2) -</a:t>
-            </a:r>
-            <a:r>
-              <a:rPr lang="en-US" sz="1200" dirty="0" err="1"/>
-              <a:t>xm</a:t>
-            </a:r>
-            <a:r>
-              <a:rPr lang="en-US" sz="1200" dirty="0"/>
-              <a:t>*sum(y*x))/(sum(x^2) - N*xm^2)</a:t>
-            </a:r>
-          </a:p>
-          <a:p>
-            <a:endParaRPr lang="en-US" sz="1200" dirty="0"/>
-          </a:p>
-        </p:txBody>
-      </p:sp>
-      <p:sp>
-        <p:nvSpPr>
           <p:cNvPr id="5" name="TextBox 4">
             <a:extLst>
               <a:ext uri="{FF2B5EF4-FFF2-40B4-BE49-F238E27FC236}">
@@ -17304,8 +16807,8 @@
         </p:nvSpPr>
         <p:spPr>
           <a:xfrm>
-            <a:off x="6096000" y="178676"/>
-            <a:ext cx="6011917" cy="2462213"/>
+            <a:off x="345238" y="316349"/>
+            <a:ext cx="7463590" cy="3754874"/>
           </a:xfrm>
           <a:prstGeom prst="rect">
             <a:avLst/>
@@ -17320,31 +16823,7 @@
           <a:p>
             <a:r>
               <a:rPr lang="en-US" dirty="0"/>
-              <a:t>When drawing a curve through experimental points, </a:t>
-            </a:r>
-          </a:p>
-          <a:p>
-            <a:r>
-              <a:rPr lang="en-US" dirty="0"/>
-              <a:t>it is very important to estimate how good this curve </a:t>
-            </a:r>
-          </a:p>
-          <a:p>
-            <a:r>
-              <a:rPr lang="en-US" dirty="0"/>
-              <a:t>fits the data. </a:t>
-            </a:r>
-          </a:p>
-          <a:p>
-            <a:r>
-              <a:rPr lang="en-US" dirty="0"/>
-              <a:t>And if fitting the data with this curve makes sense. </a:t>
-            </a:r>
-          </a:p>
-          <a:p>
-            <a:r>
-              <a:rPr lang="en-US" dirty="0"/>
-              <a:t>For this you can use the Coefficient of Determination:</a:t>
+              <a:t>Introduction into Statistics</a:t>
             </a:r>
           </a:p>
           <a:p>
@@ -17353,42 +16832,245 @@
           <a:p>
             <a:r>
               <a:rPr lang="en-US" dirty="0"/>
-              <a:t>  Coefficient of Determination R2 </a:t>
-            </a:r>
-          </a:p>
-          <a:p>
-            <a:r>
-              <a:rPr lang="en-US" dirty="0"/>
-              <a:t>    – ( https://</a:t>
-            </a:r>
-            <a:r>
-              <a:rPr lang="en-US" dirty="0" err="1"/>
-              <a:t>en.wikipedia.org</a:t>
-            </a:r>
-            <a:r>
-              <a:rPr lang="en-US" dirty="0"/>
-              <a:t>/wiki/</a:t>
-            </a:r>
-            <a:r>
-              <a:rPr lang="en-US" dirty="0" err="1"/>
-              <a:t>Coefficient_of_determination</a:t>
-            </a:r>
-            <a:r>
-              <a:rPr lang="en-US" dirty="0"/>
-              <a:t> ) </a:t>
-            </a:r>
-          </a:p>
-          <a:p>
-            <a:r>
-              <a:rPr lang="en-US" dirty="0"/>
-              <a:t>    – pronounced “R squared”, is a number between 0 and 1. </a:t>
-            </a:r>
-          </a:p>
-          <a:p>
-            <a:r>
-              <a:rPr lang="en-US" dirty="0"/>
-              <a:t>    The closer it is to 1 – the better data fits the model.</a:t>
-            </a:r>
+              <a:t>“Statistics is the study of the collection, analysis, </a:t>
+            </a:r>
+          </a:p>
+          <a:p>
+            <a:r>
+              <a:rPr lang="en-US" dirty="0"/>
+              <a:t>interpretation, presentation, and organization of data.” </a:t>
+            </a:r>
+          </a:p>
+          <a:p>
+            <a:endParaRPr lang="en-US" dirty="0"/>
+          </a:p>
+          <a:p>
+            <a:r>
+              <a:rPr lang="en-US" dirty="0"/>
+              <a:t>Being a Statistician is the major part of being a Data Scientist. </a:t>
+            </a:r>
+          </a:p>
+          <a:p>
+            <a:r>
+              <a:rPr lang="en-US" dirty="0"/>
+              <a:t>And it is tricky, because there is easy to misuse statistics:</a:t>
+            </a:r>
+          </a:p>
+          <a:p>
+            <a:r>
+              <a:rPr lang="en-US" b="1" dirty="0">
+                <a:solidFill>
+                  <a:srgbClr val="0070C0"/>
+                </a:solidFill>
+              </a:rPr>
+              <a:t>“There are three kinds of lies: lies, damned lies, and statistics.”</a:t>
+            </a:r>
+            <a:r>
+              <a:rPr lang="en-US" dirty="0"/>
+              <a:t> </a:t>
+            </a:r>
+          </a:p>
+          <a:p>
+            <a:endParaRPr lang="en-US" dirty="0"/>
+          </a:p>
+          <a:p>
+            <a:r>
+              <a:rPr lang="en-US" dirty="0"/>
+              <a:t>Statistics involves</a:t>
+            </a:r>
+          </a:p>
+          <a:p>
+            <a:endParaRPr lang="en-US" dirty="0"/>
+          </a:p>
+          <a:p>
+            <a:pPr marL="285750" indent="-285750">
+              <a:buFont typeface="Arial" panose="020B0604020202020204" pitchFamily="34" charset="0"/>
+              <a:buChar char="•"/>
+            </a:pPr>
+            <a:r>
+              <a:rPr lang="en-US" dirty="0"/>
+              <a:t>Collecting (sampling) the data from different kind of observations</a:t>
+            </a:r>
+          </a:p>
+          <a:p>
+            <a:pPr marL="285750" indent="-285750">
+              <a:buFont typeface="Arial" panose="020B0604020202020204" pitchFamily="34" charset="0"/>
+              <a:buChar char="•"/>
+            </a:pPr>
+            <a:r>
+              <a:rPr lang="en-US" dirty="0"/>
+              <a:t>Visualizing the data, estimating the parameters (average/mean values, errors, etc.)</a:t>
+            </a:r>
+          </a:p>
+          <a:p>
+            <a:pPr marL="285750" indent="-285750">
+              <a:buFont typeface="Arial" panose="020B0604020202020204" pitchFamily="34" charset="0"/>
+              <a:buChar char="•"/>
+            </a:pPr>
+            <a:r>
+              <a:rPr lang="en-US" dirty="0"/>
+              <a:t>Testing validity of a hypothesis (null hypothesis) – or alternative hypothesis</a:t>
+            </a:r>
+          </a:p>
+          <a:p>
+            <a:pPr marL="285750" indent="-285750">
+              <a:buFont typeface="Arial" panose="020B0604020202020204" pitchFamily="34" charset="0"/>
+              <a:buChar char="•"/>
+            </a:pPr>
+            <a:r>
+              <a:rPr lang="en-US" dirty="0"/>
+              <a:t>Estimating intervals, estimating significance of observed differences, etc.</a:t>
+            </a:r>
+          </a:p>
+          <a:p>
+            <a:endParaRPr lang="en-US" dirty="0"/>
+          </a:p>
+          <a:p>
+            <a:endParaRPr lang="en-US" dirty="0"/>
+          </a:p>
+        </p:txBody>
+      </p:sp>
+      <p:pic>
+        <p:nvPicPr>
+          <p:cNvPr id="2" name="Picture 1">
+            <a:extLst>
+              <a:ext uri="{FF2B5EF4-FFF2-40B4-BE49-F238E27FC236}">
+                <a16:creationId xmlns:a16="http://schemas.microsoft.com/office/drawing/2014/main" id="{B8D731C5-EDD2-C145-932A-A88B03CA2817}"/>
+              </a:ext>
+            </a:extLst>
+          </p:cNvPr>
+          <p:cNvPicPr>
+            <a:picLocks noChangeAspect="1"/>
+          </p:cNvPicPr>
+          <p:nvPr/>
+        </p:nvPicPr>
+        <p:blipFill>
+          <a:blip r:embed="rId2" cstate="email">
+            <a:extLst>
+              <a:ext uri="{28A0092B-C50C-407E-A947-70E740481C1C}">
+                <a14:useLocalDpi xmlns:a14="http://schemas.microsoft.com/office/drawing/2010/main"/>
+              </a:ext>
+            </a:extLst>
+          </a:blip>
+          <a:stretch>
+            <a:fillRect/>
+          </a:stretch>
+        </p:blipFill>
+        <p:spPr>
+          <a:xfrm>
+            <a:off x="8097586" y="881194"/>
+            <a:ext cx="3452730" cy="3601412"/>
+          </a:xfrm>
+          <a:prstGeom prst="rect">
+            <a:avLst/>
+          </a:prstGeom>
+        </p:spPr>
+      </p:pic>
+      <p:sp>
+        <p:nvSpPr>
+          <p:cNvPr id="3" name="TextBox 2">
+            <a:extLst>
+              <a:ext uri="{FF2B5EF4-FFF2-40B4-BE49-F238E27FC236}">
+                <a16:creationId xmlns:a16="http://schemas.microsoft.com/office/drawing/2014/main" id="{9A24CC4E-3332-5542-A614-EDEF0AE14AAA}"/>
+              </a:ext>
+            </a:extLst>
+          </p:cNvPr>
+          <p:cNvSpPr txBox="1"/>
+          <p:nvPr/>
+        </p:nvSpPr>
+        <p:spPr>
+          <a:xfrm>
+            <a:off x="7712242" y="433137"/>
+            <a:ext cx="3019926" cy="307777"/>
+          </a:xfrm>
+          <a:prstGeom prst="rect">
+            <a:avLst/>
+          </a:prstGeom>
+          <a:noFill/>
+        </p:spPr>
+        <p:txBody>
+          <a:bodyPr wrap="square" rtlCol="0">
+            <a:spAutoFit/>
+          </a:bodyPr>
+          <a:lstStyle/>
+          <a:p>
+            <a:r>
+              <a:rPr lang="en-US" b="1" dirty="0">
+                <a:solidFill>
+                  <a:srgbClr val="0070C0"/>
+                </a:solidFill>
+              </a:rPr>
+              <a:t>Here are some basic formulas:</a:t>
+            </a:r>
+          </a:p>
+        </p:txBody>
+      </p:sp>
+      <p:sp>
+        <p:nvSpPr>
+          <p:cNvPr id="6" name="TextBox 5">
+            <a:extLst>
+              <a:ext uri="{FF2B5EF4-FFF2-40B4-BE49-F238E27FC236}">
+                <a16:creationId xmlns:a16="http://schemas.microsoft.com/office/drawing/2014/main" id="{68CAE6D3-B545-F244-8CA7-FAE7513462A6}"/>
+              </a:ext>
+            </a:extLst>
+          </p:cNvPr>
+          <p:cNvSpPr txBox="1"/>
+          <p:nvPr/>
+        </p:nvSpPr>
+        <p:spPr>
+          <a:xfrm>
+            <a:off x="7074568" y="5029200"/>
+            <a:ext cx="4920916" cy="1600438"/>
+          </a:xfrm>
+          <a:prstGeom prst="rect">
+            <a:avLst/>
+          </a:prstGeom>
+          <a:noFill/>
+        </p:spPr>
+        <p:txBody>
+          <a:bodyPr wrap="square" rtlCol="0">
+            <a:spAutoFit/>
+          </a:bodyPr>
+          <a:lstStyle/>
+          <a:p>
+            <a:r>
+              <a:rPr lang="en-US" dirty="0"/>
+              <a:t>Intuitive explanation for dividing by (n-1) </a:t>
+            </a:r>
+          </a:p>
+          <a:p>
+            <a:r>
+              <a:rPr lang="en-US" dirty="0"/>
+              <a:t>when calculating standard deviation:</a:t>
+            </a:r>
+          </a:p>
+          <a:p>
+            <a:endParaRPr lang="en-US" dirty="0"/>
+          </a:p>
+          <a:p>
+            <a:r>
+              <a:rPr lang="en-US" dirty="0"/>
+              <a:t>– </a:t>
+            </a:r>
+            <a:r>
+              <a:rPr lang="en-US" dirty="0">
+                <a:hlinkClick r:id="rId3"/>
+              </a:rPr>
+              <a:t>http://</a:t>
+            </a:r>
+            <a:r>
+              <a:rPr lang="en-US" dirty="0" err="1">
+                <a:hlinkClick r:id="rId3"/>
+              </a:rPr>
+              <a:t>stats.stackexchange.com</a:t>
+            </a:r>
+            <a:r>
+              <a:rPr lang="en-US" dirty="0">
+                <a:hlinkClick r:id="rId3"/>
+              </a:rPr>
+              <a:t>/questions/3931/intuitive-explanation-for-dividing-by-n-1-when-calculating-standard-deviation</a:t>
+            </a:r>
+            <a:endParaRPr lang="en-US" dirty="0"/>
           </a:p>
           <a:p>
             <a:endParaRPr lang="en-US" dirty="0"/>
@@ -17398,7 +17080,7 @@
     </p:spTree>
     <p:extLst>
       <p:ext uri="{BB962C8B-B14F-4D97-AF65-F5344CB8AC3E}">
-        <p14:creationId xmlns:p14="http://schemas.microsoft.com/office/powerpoint/2010/main" val="1417852731"/>
+        <p14:creationId xmlns:p14="http://schemas.microsoft.com/office/powerpoint/2010/main" val="4004690225"/>
       </p:ext>
     </p:extLst>
   </p:cSld>
@@ -17439,8 +17121,8 @@
         </p:nvSpPr>
         <p:spPr>
           <a:xfrm>
-            <a:off x="189186" y="178676"/>
-            <a:ext cx="5906814" cy="5478423"/>
+            <a:off x="0" y="178676"/>
+            <a:ext cx="6858000" cy="6555641"/>
           </a:xfrm>
           <a:prstGeom prst="rect">
             <a:avLst/>
@@ -17454,224 +17136,510 @@
           <a:lstStyle/>
           <a:p>
             <a:r>
-              <a:rPr lang="en-US" dirty="0"/>
-              <a:t>More Statistics:</a:t>
-            </a:r>
-          </a:p>
-          <a:p>
-            <a:r>
-              <a:rPr lang="en-US" dirty="0"/>
-              <a:t>Confidence Interval </a:t>
-            </a:r>
-          </a:p>
-          <a:p>
-            <a:r>
-              <a:rPr lang="en-US" dirty="0"/>
-              <a:t>  – ( https://</a:t>
-            </a:r>
-            <a:r>
-              <a:rPr lang="en-US" dirty="0" err="1"/>
+              <a:rPr lang="en-US" sz="1200" dirty="0"/>
+              <a:t>More advanced topics:</a:t>
+            </a:r>
+          </a:p>
+          <a:p>
+            <a:endParaRPr lang="en-US" sz="1200" dirty="0"/>
+          </a:p>
+          <a:p>
+            <a:r>
+              <a:rPr lang="en-US" sz="1200" dirty="0"/>
+              <a:t>Linear Regression </a:t>
+            </a:r>
+          </a:p>
+          <a:p>
+            <a:r>
+              <a:rPr lang="en-US" sz="1200" dirty="0"/>
+              <a:t>  – draw a line through experimental points.</a:t>
+            </a:r>
+          </a:p>
+          <a:p>
+            <a:r>
+              <a:rPr lang="en-US" sz="1200" dirty="0"/>
+              <a:t>  – ( </a:t>
+            </a:r>
+            <a:r>
+              <a:rPr lang="en-US" sz="1200" dirty="0">
+                <a:hlinkClick r:id="rId2"/>
+              </a:rPr>
+              <a:t>https://</a:t>
+            </a:r>
+            <a:r>
+              <a:rPr lang="en-US" sz="1200" dirty="0" err="1">
+                <a:hlinkClick r:id="rId2"/>
+              </a:rPr>
               <a:t>en.wikipedia.org</a:t>
             </a:r>
             <a:r>
-              <a:rPr lang="en-US" dirty="0"/>
+              <a:rPr lang="en-US" sz="1200" dirty="0">
+                <a:hlinkClick r:id="rId2"/>
+              </a:rPr>
               <a:t>/wiki/</a:t>
             </a:r>
             <a:r>
-              <a:rPr lang="en-US" dirty="0" err="1"/>
-              <a:t>Confidence_interval</a:t>
-            </a:r>
-            <a:r>
-              <a:rPr lang="en-US" dirty="0"/>
-              <a:t> ) –</a:t>
-            </a:r>
-          </a:p>
-          <a:p>
-            <a:r>
-              <a:rPr lang="en-US" dirty="0"/>
-              <a:t>Cluster Analysis </a:t>
-            </a:r>
-          </a:p>
-          <a:p>
-            <a:r>
-              <a:rPr lang="en-US" dirty="0"/>
-              <a:t>  – finding groups (clusters) in data.</a:t>
-            </a:r>
-          </a:p>
-          <a:p>
-            <a:r>
-              <a:rPr lang="en-US" dirty="0"/>
-              <a:t>  – ( https://</a:t>
-            </a:r>
-            <a:r>
-              <a:rPr lang="en-US" dirty="0" err="1"/>
+              <a:rPr lang="en-US" sz="1200" dirty="0" err="1">
+                <a:hlinkClick r:id="rId2"/>
+              </a:rPr>
+              <a:t>Linear_regression</a:t>
+            </a:r>
+            <a:r>
+              <a:rPr lang="en-US" sz="1200" dirty="0"/>
+              <a:t> ) </a:t>
+            </a:r>
+          </a:p>
+          <a:p>
+            <a:endParaRPr lang="en-US" sz="1200" dirty="0"/>
+          </a:p>
+          <a:p>
+            <a:r>
+              <a:rPr lang="en-US" sz="1200" dirty="0"/>
+              <a:t>Simple Linear Regression </a:t>
+            </a:r>
+          </a:p>
+          <a:p>
+            <a:r>
+              <a:rPr lang="en-US" sz="1200" dirty="0"/>
+              <a:t>  – ( </a:t>
+            </a:r>
+            <a:r>
+              <a:rPr lang="en-US" sz="1200" dirty="0">
+                <a:hlinkClick r:id="rId3"/>
+              </a:rPr>
+              <a:t>https://</a:t>
+            </a:r>
+            <a:r>
+              <a:rPr lang="en-US" sz="1200" dirty="0" err="1">
+                <a:hlinkClick r:id="rId3"/>
+              </a:rPr>
               <a:t>en.wikipedia.org</a:t>
             </a:r>
             <a:r>
-              <a:rPr lang="en-US" dirty="0"/>
+              <a:rPr lang="en-US" sz="1200" dirty="0">
+                <a:hlinkClick r:id="rId3"/>
+              </a:rPr>
               <a:t>/wiki/</a:t>
             </a:r>
             <a:r>
-              <a:rPr lang="en-US" dirty="0" err="1"/>
-              <a:t>Cluster_analysis</a:t>
-            </a:r>
-            <a:r>
-              <a:rPr lang="en-US" dirty="0"/>
+              <a:rPr lang="en-US" sz="1200" dirty="0" err="1">
+                <a:hlinkClick r:id="rId3"/>
+              </a:rPr>
+              <a:t>Simple_linear_regression</a:t>
+            </a:r>
+            <a:r>
+              <a:rPr lang="en-US" sz="1200" dirty="0"/>
               <a:t> ) </a:t>
             </a:r>
           </a:p>
           <a:p>
             <a:r>
-              <a:rPr lang="en-US" dirty="0"/>
-              <a:t>Student’s t-distribution </a:t>
-            </a:r>
-          </a:p>
-          <a:p>
-            <a:r>
-              <a:rPr lang="en-US" dirty="0"/>
-              <a:t>  – estimating the mean of a normally distributed population </a:t>
-            </a:r>
-          </a:p>
-          <a:p>
-            <a:r>
-              <a:rPr lang="en-US" dirty="0"/>
-              <a:t>    in situations where the sample size is small and </a:t>
-            </a:r>
-          </a:p>
-          <a:p>
-            <a:r>
-              <a:rPr lang="en-US" dirty="0"/>
-              <a:t>    population standard deviation is unknown.</a:t>
-            </a:r>
-          </a:p>
-          <a:p>
-            <a:r>
-              <a:rPr lang="en-US" dirty="0"/>
-              <a:t>  – ( https://</a:t>
-            </a:r>
-            <a:r>
-              <a:rPr lang="en-US" dirty="0" err="1"/>
-              <a:t>en.wikipedia.org</a:t>
-            </a:r>
-            <a:r>
-              <a:rPr lang="en-US" dirty="0"/>
-              <a:t>/wiki/Student%27s_t-distribution ) </a:t>
-            </a:r>
-          </a:p>
-          <a:p>
-            <a:r>
-              <a:rPr lang="en-US" dirty="0"/>
-              <a:t>Chi-squared distribution </a:t>
-            </a:r>
-          </a:p>
-          <a:p>
-            <a:r>
-              <a:rPr lang="en-US" dirty="0"/>
-              <a:t>  – distribution of a sum of the squares of k independent </a:t>
-            </a:r>
-          </a:p>
-          <a:p>
-            <a:r>
-              <a:rPr lang="en-US" dirty="0"/>
-              <a:t>    standard normal random variables.</a:t>
-            </a:r>
-          </a:p>
-          <a:p>
-            <a:r>
-              <a:rPr lang="en-US" dirty="0"/>
-              <a:t>  – ( https://</a:t>
-            </a:r>
-            <a:r>
-              <a:rPr lang="en-US" dirty="0" err="1"/>
-              <a:t>en.wikipedia.org</a:t>
-            </a:r>
-            <a:r>
-              <a:rPr lang="en-US" dirty="0"/>
-              <a:t>/wiki/Chi-</a:t>
-            </a:r>
-            <a:r>
-              <a:rPr lang="en-US" dirty="0" err="1"/>
-              <a:t>squared_distribution</a:t>
-            </a:r>
-            <a:r>
-              <a:rPr lang="en-US" dirty="0"/>
-              <a:t> ) </a:t>
-            </a:r>
-          </a:p>
-          <a:p>
-            <a:r>
-              <a:rPr lang="en-US" dirty="0"/>
-              <a:t>F-distribution </a:t>
-            </a:r>
-          </a:p>
-          <a:p>
-            <a:r>
-              <a:rPr lang="en-US" dirty="0"/>
-              <a:t>  – right-skewed distribution used most commonly in Analysis of Variance.</a:t>
-            </a:r>
-          </a:p>
-          <a:p>
-            <a:r>
-              <a:rPr lang="en-US" dirty="0"/>
-              <a:t>  – ( https://</a:t>
-            </a:r>
-            <a:r>
-              <a:rPr lang="en-US" dirty="0" err="1"/>
-              <a:t>en.wikipedia.org</a:t>
-            </a:r>
-            <a:r>
-              <a:rPr lang="en-US" dirty="0"/>
-              <a:t>/wiki/F-distribution ) </a:t>
-            </a:r>
-          </a:p>
-          <a:p>
-            <a:r>
-              <a:rPr lang="en-US" dirty="0"/>
-              <a:t>Gamma distribution </a:t>
-            </a:r>
-          </a:p>
-          <a:p>
-            <a:r>
-              <a:rPr lang="en-US" dirty="0"/>
-              <a:t>  – ( https://</a:t>
-            </a:r>
-            <a:r>
-              <a:rPr lang="en-US" dirty="0" err="1"/>
-              <a:t>en.wikipedia.org</a:t>
-            </a:r>
-            <a:r>
-              <a:rPr lang="en-US" dirty="0"/>
-              <a:t>/wiki/</a:t>
-            </a:r>
-            <a:r>
-              <a:rPr lang="en-US" dirty="0" err="1"/>
-              <a:t>Gamma_distribution</a:t>
-            </a:r>
-            <a:r>
-              <a:rPr lang="en-US" dirty="0"/>
-              <a:t> ) </a:t>
-            </a:r>
-          </a:p>
-          <a:p>
-            <a:r>
-              <a:rPr lang="en-US" dirty="0"/>
-              <a:t>  – a two-parameter family of continuous probability distributions. </a:t>
-            </a:r>
-          </a:p>
-          <a:p>
-            <a:r>
-              <a:rPr lang="en-US" dirty="0"/>
-              <a:t>    The common exponential distribution and chi-squared </a:t>
-            </a:r>
-          </a:p>
-          <a:p>
-            <a:r>
-              <a:rPr lang="en-US" dirty="0"/>
-              <a:t>    distribution are special cases of the gamma distribution.</a:t>
-            </a:r>
-          </a:p>
-          <a:p>
-            <a:endParaRPr lang="en-US" dirty="0"/>
+              <a:rPr lang="en-US" sz="1200" dirty="0"/>
+              <a:t>  – the  least squares estimator of a linear regression model.</a:t>
+            </a:r>
+          </a:p>
+          <a:p>
+            <a:endParaRPr lang="en-US" sz="1200" dirty="0"/>
+          </a:p>
+          <a:p>
+            <a:r>
+              <a:rPr lang="en-US" sz="1200" dirty="0"/>
+              <a:t>Here is the simplest standard </a:t>
+            </a:r>
+            <a:r>
+              <a:rPr lang="en-US" sz="1200" b="1" dirty="0">
+                <a:solidFill>
+                  <a:srgbClr val="0070C0"/>
+                </a:solidFill>
+              </a:rPr>
+              <a:t>OLS</a:t>
+            </a:r>
+            <a:r>
+              <a:rPr lang="en-US" sz="1200" dirty="0"/>
+              <a:t> method (</a:t>
+            </a:r>
+            <a:r>
+              <a:rPr lang="en-US" sz="1200" b="1" dirty="0">
+                <a:solidFill>
+                  <a:srgbClr val="0070C0"/>
+                </a:solidFill>
+              </a:rPr>
+              <a:t>OLS = Ordinary Least Squares</a:t>
+            </a:r>
+            <a:r>
+              <a:rPr lang="en-US" sz="1200" dirty="0"/>
+              <a:t>).</a:t>
+            </a:r>
+          </a:p>
+          <a:p>
+            <a:endParaRPr lang="en-US" sz="1200" dirty="0"/>
+          </a:p>
+          <a:p>
+            <a:r>
+              <a:rPr lang="en-US" sz="1200" dirty="0"/>
+              <a:t>    </a:t>
+            </a:r>
+            <a:r>
+              <a:rPr lang="en-US" sz="1200" dirty="0" err="1"/>
+              <a:t>ym</a:t>
+            </a:r>
+            <a:r>
+              <a:rPr lang="en-US" sz="1200" dirty="0"/>
+              <a:t> = </a:t>
+            </a:r>
+            <a:r>
+              <a:rPr lang="en-US" sz="1200" dirty="0" err="1"/>
+              <a:t>y_mean</a:t>
+            </a:r>
+            <a:r>
+              <a:rPr lang="en-US" sz="1200" dirty="0"/>
+              <a:t> = sum(y)/N</a:t>
+            </a:r>
+          </a:p>
+          <a:p>
+            <a:r>
+              <a:rPr lang="en-US" sz="1200" dirty="0"/>
+              <a:t>    </a:t>
+            </a:r>
+            <a:r>
+              <a:rPr lang="en-US" sz="1200" dirty="0" err="1"/>
+              <a:t>xm</a:t>
+            </a:r>
+            <a:r>
+              <a:rPr lang="en-US" sz="1200" dirty="0"/>
+              <a:t> = </a:t>
+            </a:r>
+            <a:r>
+              <a:rPr lang="en-US" sz="1200" dirty="0" err="1"/>
+              <a:t>x_mean</a:t>
+            </a:r>
+            <a:r>
+              <a:rPr lang="en-US" sz="1200" dirty="0"/>
+              <a:t> = sum(x)/N</a:t>
+            </a:r>
+          </a:p>
+          <a:p>
+            <a:r>
+              <a:rPr lang="en-US" sz="1200" dirty="0"/>
+              <a:t>    </a:t>
+            </a:r>
+          </a:p>
+          <a:p>
+            <a:r>
+              <a:rPr lang="en-US" sz="1200" dirty="0"/>
+              <a:t>    var(x) = variance(x) = sum((x-</a:t>
+            </a:r>
+            <a:r>
+              <a:rPr lang="en-US" sz="1200" dirty="0" err="1"/>
+              <a:t>xm</a:t>
+            </a:r>
+            <a:r>
+              <a:rPr lang="en-US" sz="1200" dirty="0"/>
+              <a:t>)^2)</a:t>
+            </a:r>
+          </a:p>
+          <a:p>
+            <a:r>
+              <a:rPr lang="en-US" sz="1200" dirty="0"/>
+              <a:t>    </a:t>
+            </a:r>
+            <a:r>
+              <a:rPr lang="en-US" sz="1200" dirty="0" err="1"/>
+              <a:t>covar</a:t>
+            </a:r>
+            <a:r>
+              <a:rPr lang="en-US" sz="1200" dirty="0"/>
+              <a:t>(</a:t>
+            </a:r>
+            <a:r>
+              <a:rPr lang="en-US" sz="1200" dirty="0" err="1"/>
+              <a:t>x,y</a:t>
+            </a:r>
+            <a:r>
+              <a:rPr lang="en-US" sz="1200" dirty="0"/>
+              <a:t>) = covariance(</a:t>
+            </a:r>
+            <a:r>
+              <a:rPr lang="en-US" sz="1200" dirty="0" err="1"/>
+              <a:t>x,y</a:t>
+            </a:r>
+            <a:r>
+              <a:rPr lang="en-US" sz="1200" dirty="0"/>
+              <a:t>) = sum((y-</a:t>
+            </a:r>
+            <a:r>
+              <a:rPr lang="en-US" sz="1200" dirty="0" err="1"/>
+              <a:t>ym</a:t>
+            </a:r>
+            <a:r>
+              <a:rPr lang="en-US" sz="1200" dirty="0"/>
+              <a:t>)*(x-</a:t>
+            </a:r>
+            <a:r>
+              <a:rPr lang="en-US" sz="1200" dirty="0" err="1"/>
+              <a:t>xm</a:t>
+            </a:r>
+            <a:r>
+              <a:rPr lang="en-US" sz="1200" dirty="0"/>
+              <a:t>))</a:t>
+            </a:r>
+          </a:p>
+          <a:p>
+            <a:r>
+              <a:rPr lang="en-US" sz="1200" dirty="0"/>
+              <a:t>    </a:t>
+            </a:r>
+          </a:p>
+          <a:p>
+            <a:r>
+              <a:rPr lang="en-US" sz="1200" dirty="0"/>
+              <a:t>    slope b = </a:t>
+            </a:r>
+            <a:r>
+              <a:rPr lang="en-US" sz="1200" dirty="0" err="1"/>
+              <a:t>covar</a:t>
+            </a:r>
+            <a:r>
+              <a:rPr lang="en-US" sz="1200" dirty="0"/>
+              <a:t>(</a:t>
+            </a:r>
+            <a:r>
+              <a:rPr lang="en-US" sz="1200" dirty="0" err="1"/>
+              <a:t>x,y</a:t>
+            </a:r>
+            <a:r>
+              <a:rPr lang="en-US" sz="1200" dirty="0"/>
+              <a:t>) / var(x)</a:t>
+            </a:r>
+          </a:p>
+          <a:p>
+            <a:r>
+              <a:rPr lang="en-US" sz="1200" dirty="0"/>
+              <a:t>    intercept a = </a:t>
+            </a:r>
+            <a:r>
+              <a:rPr lang="en-US" sz="1200" dirty="0" err="1"/>
+              <a:t>ym</a:t>
+            </a:r>
+            <a:r>
+              <a:rPr lang="en-US" sz="1200" dirty="0"/>
+              <a:t> - b*</a:t>
+            </a:r>
+            <a:r>
+              <a:rPr lang="en-US" sz="1200" dirty="0" err="1"/>
+              <a:t>xm</a:t>
+            </a:r>
+            <a:endParaRPr lang="en-US" sz="1200" dirty="0"/>
+          </a:p>
+          <a:p>
+            <a:r>
+              <a:rPr lang="en-US" sz="1200" dirty="0"/>
+              <a:t>    </a:t>
+            </a:r>
+          </a:p>
+          <a:p>
+            <a:r>
+              <a:rPr lang="en-US" sz="1200" dirty="0"/>
+              <a:t>    We can simplify as following:</a:t>
+            </a:r>
+          </a:p>
+          <a:p>
+            <a:endParaRPr lang="en-US" sz="1200" dirty="0"/>
+          </a:p>
+          <a:p>
+            <a:r>
+              <a:rPr lang="en-US" sz="1200" dirty="0"/>
+              <a:t>    var(x) = sum((x-</a:t>
+            </a:r>
+            <a:r>
+              <a:rPr lang="en-US" sz="1200" dirty="0" err="1"/>
+              <a:t>xm</a:t>
+            </a:r>
+            <a:r>
+              <a:rPr lang="en-US" sz="1200" dirty="0"/>
+              <a:t>)^2) = sum(x^2) - sum(2*x*</a:t>
+            </a:r>
+            <a:r>
+              <a:rPr lang="en-US" sz="1200" dirty="0" err="1"/>
+              <a:t>xm</a:t>
+            </a:r>
+            <a:r>
+              <a:rPr lang="en-US" sz="1200" dirty="0"/>
+              <a:t>) + sum(xm^2) = sum(x^2) - N*xm^2</a:t>
+            </a:r>
+          </a:p>
+          <a:p>
+            <a:r>
+              <a:rPr lang="en-US" sz="1200" dirty="0"/>
+              <a:t>    </a:t>
+            </a:r>
+            <a:r>
+              <a:rPr lang="en-US" sz="1200" dirty="0" err="1"/>
+              <a:t>covar</a:t>
+            </a:r>
+            <a:r>
+              <a:rPr lang="en-US" sz="1200" dirty="0"/>
+              <a:t>(</a:t>
+            </a:r>
+            <a:r>
+              <a:rPr lang="en-US" sz="1200" dirty="0" err="1"/>
+              <a:t>x,y</a:t>
+            </a:r>
+            <a:r>
+              <a:rPr lang="en-US" sz="1200" dirty="0"/>
+              <a:t>) = ... using similar logic = sum(y*x) - N*</a:t>
+            </a:r>
+            <a:r>
+              <a:rPr lang="en-US" sz="1200" dirty="0" err="1"/>
+              <a:t>xm</a:t>
+            </a:r>
+            <a:r>
+              <a:rPr lang="en-US" sz="1200" dirty="0"/>
+              <a:t>*</a:t>
+            </a:r>
+            <a:r>
+              <a:rPr lang="en-US" sz="1200" dirty="0" err="1"/>
+              <a:t>ym</a:t>
+            </a:r>
+            <a:endParaRPr lang="en-US" sz="1200" dirty="0"/>
+          </a:p>
+          <a:p>
+            <a:r>
+              <a:rPr lang="en-US" sz="1200" dirty="0"/>
+              <a:t>    </a:t>
+            </a:r>
+          </a:p>
+          <a:p>
+            <a:r>
+              <a:rPr lang="en-US" sz="1200" dirty="0"/>
+              <a:t>    So:</a:t>
+            </a:r>
+          </a:p>
+          <a:p>
+            <a:endParaRPr lang="en-US" sz="1200" dirty="0"/>
+          </a:p>
+          <a:p>
+            <a:r>
+              <a:rPr lang="en-US" sz="1200" dirty="0"/>
+              <a:t>    slope b = (sum(y*x) - N*</a:t>
+            </a:r>
+            <a:r>
+              <a:rPr lang="en-US" sz="1200" dirty="0" err="1"/>
+              <a:t>xm</a:t>
+            </a:r>
+            <a:r>
+              <a:rPr lang="en-US" sz="1200" dirty="0"/>
+              <a:t>*</a:t>
+            </a:r>
+            <a:r>
+              <a:rPr lang="en-US" sz="1200" dirty="0" err="1"/>
+              <a:t>ym</a:t>
+            </a:r>
+            <a:r>
+              <a:rPr lang="en-US" sz="1200" dirty="0"/>
+              <a:t>) / (sum(x^2) - N*xm^2)</a:t>
+            </a:r>
+          </a:p>
+          <a:p>
+            <a:endParaRPr lang="en-US" sz="1200" dirty="0"/>
+          </a:p>
+          <a:p>
+            <a:r>
+              <a:rPr lang="en-US" sz="1200" dirty="0"/>
+              <a:t>    intercept a = </a:t>
+            </a:r>
+            <a:r>
+              <a:rPr lang="en-US" sz="1200" dirty="0" err="1"/>
+              <a:t>ym</a:t>
+            </a:r>
+            <a:r>
+              <a:rPr lang="en-US" sz="1200" dirty="0"/>
+              <a:t> - b*</a:t>
+            </a:r>
+            <a:r>
+              <a:rPr lang="en-US" sz="1200" dirty="0" err="1"/>
+              <a:t>xm</a:t>
+            </a:r>
+            <a:r>
+              <a:rPr lang="en-US" sz="1200" dirty="0"/>
+              <a:t> = (</a:t>
+            </a:r>
+            <a:r>
+              <a:rPr lang="en-US" sz="1200" dirty="0" err="1"/>
+              <a:t>ym</a:t>
+            </a:r>
+            <a:r>
+              <a:rPr lang="en-US" sz="1200" dirty="0"/>
+              <a:t> * sum(x^2) - </a:t>
+            </a:r>
+            <a:r>
+              <a:rPr lang="en-US" sz="1200" dirty="0" err="1"/>
+              <a:t>ym</a:t>
+            </a:r>
+            <a:r>
+              <a:rPr lang="en-US" sz="1200" dirty="0"/>
+              <a:t>*N*xm^2 -</a:t>
+            </a:r>
+            <a:r>
+              <a:rPr lang="en-US" sz="1200" dirty="0" err="1"/>
+              <a:t>xm</a:t>
+            </a:r>
+            <a:r>
+              <a:rPr lang="en-US" sz="1200" dirty="0"/>
+              <a:t>*sum(y*x)+</a:t>
+            </a:r>
+            <a:r>
+              <a:rPr lang="en-US" sz="1200" dirty="0" err="1"/>
+              <a:t>xm</a:t>
+            </a:r>
+            <a:r>
+              <a:rPr lang="en-US" sz="1200" dirty="0"/>
+              <a:t>*N*</a:t>
+            </a:r>
+            <a:r>
+              <a:rPr lang="en-US" sz="1200" dirty="0" err="1"/>
+              <a:t>xm</a:t>
+            </a:r>
+            <a:r>
+              <a:rPr lang="en-US" sz="1200" dirty="0"/>
+              <a:t>*</a:t>
+            </a:r>
+            <a:r>
+              <a:rPr lang="en-US" sz="1200" dirty="0" err="1"/>
+              <a:t>ym</a:t>
+            </a:r>
+            <a:r>
+              <a:rPr lang="en-US" sz="1200" dirty="0"/>
+              <a:t>)  /  (sum(x^2) - N*xm^2)</a:t>
+            </a:r>
+          </a:p>
+          <a:p>
+            <a:endParaRPr lang="en-US" sz="1200" dirty="0"/>
+          </a:p>
+          <a:p>
+            <a:r>
+              <a:rPr lang="en-US" sz="1200" dirty="0"/>
+              <a:t>      = (</a:t>
+            </a:r>
+            <a:r>
+              <a:rPr lang="en-US" sz="1200" dirty="0" err="1"/>
+              <a:t>ym</a:t>
+            </a:r>
+            <a:r>
+              <a:rPr lang="en-US" sz="1200" dirty="0"/>
+              <a:t> * sum(x^2) -</a:t>
+            </a:r>
+            <a:r>
+              <a:rPr lang="en-US" sz="1200" dirty="0" err="1"/>
+              <a:t>xm</a:t>
+            </a:r>
+            <a:r>
+              <a:rPr lang="en-US" sz="1200" dirty="0"/>
+              <a:t>*sum(y*x))  /  (sum(x^2) - N*xm^2)</a:t>
+            </a:r>
+          </a:p>
+          <a:p>
+            <a:endParaRPr lang="en-US" sz="1200" dirty="0"/>
           </a:p>
         </p:txBody>
       </p:sp>
@@ -17689,8 +17657,8 @@
         </p:nvSpPr>
         <p:spPr>
           <a:xfrm>
-            <a:off x="6096000" y="178676"/>
-            <a:ext cx="6011917" cy="6001643"/>
+            <a:off x="6858000" y="34297"/>
+            <a:ext cx="5334000" cy="1815882"/>
           </a:xfrm>
           <a:prstGeom prst="rect">
             <a:avLst/>
@@ -17704,501 +17672,165 @@
           <a:lstStyle/>
           <a:p>
             <a:r>
-              <a:rPr lang="en-US" sz="1200" dirty="0"/>
-              <a:t>Stochastic Processes, Time Series Analysis</a:t>
-            </a:r>
-          </a:p>
-          <a:p>
-            <a:r>
-              <a:rPr lang="en-US" sz="1200" dirty="0"/>
-              <a:t>– https://</a:t>
-            </a:r>
-            <a:r>
-              <a:rPr lang="en-US" sz="1200" dirty="0" err="1"/>
-              <a:t>en.wikipedia.org</a:t>
-            </a:r>
-            <a:r>
-              <a:rPr lang="en-US" sz="1200" dirty="0"/>
-              <a:t>/wiki/</a:t>
-            </a:r>
-            <a:r>
-              <a:rPr lang="en-US" sz="1200" dirty="0" err="1"/>
-              <a:t>Stochastic_process</a:t>
-            </a:r>
-            <a:r>
-              <a:rPr lang="en-US" sz="1200" dirty="0"/>
-              <a:t> –</a:t>
-            </a:r>
-          </a:p>
-          <a:p>
-            <a:r>
-              <a:rPr lang="en-US" sz="1200" dirty="0"/>
-              <a:t>– https://</a:t>
-            </a:r>
-            <a:r>
-              <a:rPr lang="en-US" sz="1200" dirty="0" err="1"/>
-              <a:t>en.wikipedia.org</a:t>
-            </a:r>
-            <a:r>
-              <a:rPr lang="en-US" sz="1200" dirty="0"/>
-              <a:t>/wiki/</a:t>
-            </a:r>
-            <a:r>
-              <a:rPr lang="en-US" sz="1200" dirty="0" err="1"/>
-              <a:t>Time_series</a:t>
-            </a:r>
-            <a:r>
-              <a:rPr lang="en-US" sz="1200" dirty="0"/>
-              <a:t> –</a:t>
-            </a:r>
-          </a:p>
-          <a:p>
-            <a:r>
-              <a:rPr lang="en-US" sz="1200" dirty="0"/>
-              <a:t>– https://</a:t>
-            </a:r>
-            <a:r>
-              <a:rPr lang="en-US" sz="1200" dirty="0" err="1"/>
-              <a:t>en.wikipedia.org</a:t>
-            </a:r>
-            <a:r>
-              <a:rPr lang="en-US" sz="1200" dirty="0"/>
-              <a:t>/wiki/</a:t>
-            </a:r>
-            <a:r>
-              <a:rPr lang="en-US" sz="1200" dirty="0" err="1"/>
-              <a:t>Random_walk</a:t>
-            </a:r>
-            <a:r>
-              <a:rPr lang="en-US" sz="1200" dirty="0"/>
-              <a:t> –</a:t>
-            </a:r>
-          </a:p>
-          <a:p>
-            <a:r>
-              <a:rPr lang="en-US" sz="1200" dirty="0"/>
-              <a:t>– https://</a:t>
-            </a:r>
-            <a:r>
-              <a:rPr lang="en-US" sz="1200" dirty="0" err="1"/>
-              <a:t>en.wikipedia.org</a:t>
-            </a:r>
-            <a:r>
-              <a:rPr lang="en-US" sz="1200" dirty="0"/>
-              <a:t>/wiki/</a:t>
-            </a:r>
-            <a:r>
-              <a:rPr lang="en-US" sz="1200" dirty="0" err="1"/>
-              <a:t>Brownian_motion</a:t>
-            </a:r>
-            <a:r>
-              <a:rPr lang="en-US" sz="1200" dirty="0"/>
-              <a:t> –</a:t>
-            </a:r>
-          </a:p>
-          <a:p>
-            <a:r>
-              <a:rPr lang="en-US" sz="1200" dirty="0"/>
-              <a:t>– https://</a:t>
-            </a:r>
-            <a:r>
-              <a:rPr lang="en-US" sz="1200" dirty="0" err="1"/>
-              <a:t>en.wikipedia.org</a:t>
-            </a:r>
-            <a:r>
-              <a:rPr lang="en-US" sz="1200" dirty="0"/>
-              <a:t>/wiki/Diffusion , https://</a:t>
-            </a:r>
-            <a:r>
-              <a:rPr lang="en-US" sz="1200" dirty="0" err="1"/>
-              <a:t>en.wikipedia.org</a:t>
-            </a:r>
-            <a:r>
-              <a:rPr lang="en-US" sz="1200" dirty="0"/>
-              <a:t>/wiki/</a:t>
-            </a:r>
-            <a:r>
-              <a:rPr lang="en-US" sz="1200" dirty="0" err="1"/>
-              <a:t>Diffusion_process</a:t>
-            </a:r>
-            <a:r>
-              <a:rPr lang="en-US" sz="1200" dirty="0"/>
-              <a:t> –</a:t>
-            </a:r>
-          </a:p>
-          <a:p>
-            <a:r>
-              <a:rPr lang="en-US" sz="1200" dirty="0"/>
-              <a:t>– https://</a:t>
-            </a:r>
-            <a:r>
-              <a:rPr lang="en-US" sz="1200" dirty="0" err="1"/>
-              <a:t>en.wikipedia.org</a:t>
-            </a:r>
-            <a:r>
-              <a:rPr lang="en-US" sz="1200" dirty="0"/>
-              <a:t>/wiki/</a:t>
-            </a:r>
-            <a:r>
-              <a:rPr lang="en-US" sz="1200" dirty="0" err="1"/>
-              <a:t>Stationary_process</a:t>
-            </a:r>
-            <a:r>
-              <a:rPr lang="en-US" sz="1200" dirty="0"/>
-              <a:t> –</a:t>
-            </a:r>
-          </a:p>
-          <a:p>
-            <a:r>
-              <a:rPr lang="en-US" sz="1200" dirty="0"/>
-              <a:t>– https://</a:t>
-            </a:r>
-            <a:r>
-              <a:rPr lang="en-US" sz="1200" dirty="0" err="1"/>
-              <a:t>en.wikipedia.org</a:t>
-            </a:r>
-            <a:r>
-              <a:rPr lang="en-US" sz="1200" dirty="0"/>
-              <a:t>/wiki/</a:t>
-            </a:r>
-            <a:r>
-              <a:rPr lang="en-US" sz="1200" dirty="0" err="1"/>
-              <a:t>Stable_process</a:t>
-            </a:r>
-            <a:r>
-              <a:rPr lang="en-US" sz="1200" dirty="0"/>
-              <a:t> –</a:t>
-            </a:r>
-          </a:p>
-          <a:p>
-            <a:endParaRPr lang="en-US" sz="1200" dirty="0"/>
-          </a:p>
-          <a:p>
-            <a:r>
-              <a:rPr lang="en-US" sz="1200" dirty="0"/>
-              <a:t>Poisson Process</a:t>
-            </a:r>
-          </a:p>
-          <a:p>
-            <a:r>
-              <a:rPr lang="en-US" sz="1200" dirty="0"/>
-              <a:t>– https://</a:t>
-            </a:r>
-            <a:r>
-              <a:rPr lang="en-US" sz="1200" dirty="0" err="1"/>
-              <a:t>en.wikipedia.org</a:t>
-            </a:r>
-            <a:r>
-              <a:rPr lang="en-US" sz="1200" dirty="0"/>
-              <a:t>/wiki/</a:t>
-            </a:r>
-            <a:r>
-              <a:rPr lang="en-US" sz="1200" dirty="0" err="1"/>
-              <a:t>Poisson_point_process</a:t>
-            </a:r>
-            <a:r>
-              <a:rPr lang="en-US" sz="1200" dirty="0"/>
-              <a:t> –</a:t>
-            </a:r>
-          </a:p>
-          <a:p>
-            <a:r>
-              <a:rPr lang="en-US" sz="1200" dirty="0"/>
-              <a:t>– https://</a:t>
-            </a:r>
-            <a:r>
-              <a:rPr lang="en-US" sz="1200" dirty="0" err="1"/>
-              <a:t>en.wikipedia.org</a:t>
-            </a:r>
-            <a:r>
-              <a:rPr lang="en-US" sz="1200" dirty="0"/>
-              <a:t>/wiki/</a:t>
-            </a:r>
-            <a:r>
-              <a:rPr lang="en-US" sz="1200" dirty="0" err="1"/>
-              <a:t>Dirac_delta_function</a:t>
-            </a:r>
-            <a:r>
-              <a:rPr lang="en-US" sz="1200" dirty="0"/>
-              <a:t> –</a:t>
-            </a:r>
-          </a:p>
-          <a:p>
-            <a:r>
-              <a:rPr lang="en-US" sz="1200" dirty="0"/>
-              <a:t>– https://</a:t>
-            </a:r>
-            <a:r>
-              <a:rPr lang="en-US" sz="1200" dirty="0" err="1"/>
-              <a:t>en.wikipedia.org</a:t>
-            </a:r>
-            <a:r>
-              <a:rPr lang="en-US" sz="1200" dirty="0"/>
-              <a:t>/wiki/</a:t>
-            </a:r>
-            <a:r>
-              <a:rPr lang="en-US" sz="1200" dirty="0" err="1"/>
-              <a:t>Compound_Poisson_process</a:t>
-            </a:r>
-            <a:r>
-              <a:rPr lang="en-US" sz="1200" dirty="0"/>
-              <a:t> –</a:t>
-            </a:r>
-          </a:p>
-          <a:p>
-            <a:endParaRPr lang="en-US" sz="1200" dirty="0"/>
-          </a:p>
-          <a:p>
-            <a:r>
-              <a:rPr lang="en-US" sz="1200" dirty="0"/>
-              <a:t>White Noise, Gaussian Noise, Brownian Noise</a:t>
-            </a:r>
-          </a:p>
-          <a:p>
-            <a:r>
-              <a:rPr lang="en-US" sz="1200" dirty="0"/>
-              <a:t>– https://</a:t>
-            </a:r>
-            <a:r>
-              <a:rPr lang="en-US" sz="1200" dirty="0" err="1"/>
-              <a:t>en.wikipedia.org</a:t>
-            </a:r>
-            <a:r>
-              <a:rPr lang="en-US" sz="1200" dirty="0"/>
-              <a:t>/wiki/</a:t>
-            </a:r>
-            <a:r>
-              <a:rPr lang="en-US" sz="1200" dirty="0" err="1"/>
-              <a:t>White_noise</a:t>
-            </a:r>
-            <a:r>
-              <a:rPr lang="en-US" sz="1200" dirty="0"/>
-              <a:t> –</a:t>
-            </a:r>
-          </a:p>
-          <a:p>
-            <a:r>
-              <a:rPr lang="en-US" sz="1200" dirty="0"/>
-              <a:t>– https://</a:t>
-            </a:r>
-            <a:r>
-              <a:rPr lang="en-US" sz="1200" dirty="0" err="1"/>
-              <a:t>en.wikipedia.org</a:t>
-            </a:r>
-            <a:r>
-              <a:rPr lang="en-US" sz="1200" dirty="0"/>
-              <a:t>/wiki/</a:t>
-            </a:r>
-            <a:r>
-              <a:rPr lang="en-US" sz="1200" dirty="0" err="1"/>
-              <a:t>Gaussian_noise</a:t>
-            </a:r>
-            <a:r>
-              <a:rPr lang="en-US" sz="1200" dirty="0"/>
-              <a:t> –</a:t>
-            </a:r>
-          </a:p>
-          <a:p>
-            <a:r>
-              <a:rPr lang="en-US" sz="1200" dirty="0"/>
-              <a:t>– https://</a:t>
-            </a:r>
-            <a:r>
-              <a:rPr lang="en-US" sz="1200" dirty="0" err="1"/>
-              <a:t>en.wikipedia.org</a:t>
-            </a:r>
-            <a:r>
-              <a:rPr lang="en-US" sz="1200" dirty="0"/>
-              <a:t>/wiki/</a:t>
-            </a:r>
-            <a:r>
-              <a:rPr lang="en-US" sz="1200" dirty="0" err="1"/>
-              <a:t>Brownian_noise</a:t>
-            </a:r>
-            <a:r>
-              <a:rPr lang="en-US" sz="1200" dirty="0"/>
-              <a:t> –</a:t>
-            </a:r>
-          </a:p>
-          <a:p>
-            <a:endParaRPr lang="en-US" sz="1200" dirty="0"/>
-          </a:p>
-          <a:p>
-            <a:r>
-              <a:rPr lang="en-US" sz="1200" dirty="0"/>
-              <a:t>Markov Process</a:t>
-            </a:r>
-          </a:p>
-          <a:p>
-            <a:r>
-              <a:rPr lang="en-US" sz="1200" dirty="0"/>
-              <a:t>– https://</a:t>
-            </a:r>
-            <a:r>
-              <a:rPr lang="en-US" sz="1200" dirty="0" err="1"/>
-              <a:t>en.wikipedia.org</a:t>
-            </a:r>
-            <a:r>
-              <a:rPr lang="en-US" sz="1200" dirty="0"/>
-              <a:t>/wiki/</a:t>
-            </a:r>
-            <a:r>
-              <a:rPr lang="en-US" sz="1200" dirty="0" err="1"/>
-              <a:t>Markov_chain</a:t>
-            </a:r>
-            <a:r>
-              <a:rPr lang="en-US" sz="1200" dirty="0"/>
-              <a:t> –</a:t>
-            </a:r>
-          </a:p>
-          <a:p>
-            <a:r>
-              <a:rPr lang="en-US" sz="1200" dirty="0"/>
-              <a:t>– https://</a:t>
-            </a:r>
-            <a:r>
-              <a:rPr lang="en-US" sz="1200" dirty="0" err="1"/>
-              <a:t>en.wikipedia.org</a:t>
-            </a:r>
-            <a:r>
-              <a:rPr lang="en-US" sz="1200" dirty="0"/>
-              <a:t>/wiki/</a:t>
-            </a:r>
-            <a:r>
-              <a:rPr lang="en-US" sz="1200" dirty="0" err="1"/>
-              <a:t>Markov_process</a:t>
-            </a:r>
-            <a:r>
-              <a:rPr lang="en-US" sz="1200" dirty="0"/>
-              <a:t> –</a:t>
-            </a:r>
-          </a:p>
-          <a:p>
-            <a:endParaRPr lang="en-US" sz="1200" dirty="0"/>
-          </a:p>
-          <a:p>
-            <a:r>
-              <a:rPr lang="en-US" sz="1200" dirty="0"/>
-              <a:t>Correlation function:</a:t>
-            </a:r>
-          </a:p>
-          <a:p>
-            <a:r>
-              <a:rPr lang="en-US" sz="1200" dirty="0"/>
-              <a:t>– https://</a:t>
-            </a:r>
-            <a:r>
-              <a:rPr lang="en-US" sz="1200" dirty="0" err="1"/>
-              <a:t>en.wikipedia.org</a:t>
-            </a:r>
-            <a:r>
-              <a:rPr lang="en-US" sz="1200" dirty="0"/>
-              <a:t>/wiki/</a:t>
-            </a:r>
-            <a:r>
-              <a:rPr lang="en-US" sz="1200" dirty="0" err="1"/>
-              <a:t>Correlation_function</a:t>
-            </a:r>
-            <a:r>
-              <a:rPr lang="en-US" sz="1200" dirty="0"/>
-              <a:t> –</a:t>
-            </a:r>
-          </a:p>
-          <a:p>
-            <a:r>
-              <a:rPr lang="en-US" sz="1200" dirty="0"/>
-              <a:t>– https://</a:t>
-            </a:r>
-            <a:r>
-              <a:rPr lang="en-US" sz="1200" dirty="0" err="1"/>
-              <a:t>en.wikipedia.org</a:t>
-            </a:r>
-            <a:r>
-              <a:rPr lang="en-US" sz="1200" dirty="0"/>
-              <a:t>/wiki/Autocorrelation –</a:t>
-            </a:r>
-          </a:p>
-          <a:p>
-            <a:endParaRPr lang="en-US" sz="1200" dirty="0"/>
-          </a:p>
-          <a:p>
-            <a:r>
-              <a:rPr lang="en-US" sz="1200" dirty="0"/>
-              <a:t>Spectral Density, Fourier Analysis</a:t>
-            </a:r>
-          </a:p>
-          <a:p>
-            <a:r>
-              <a:rPr lang="en-US" sz="1200" dirty="0"/>
-              <a:t>– https://</a:t>
-            </a:r>
-            <a:r>
-              <a:rPr lang="en-US" sz="1200" dirty="0" err="1"/>
-              <a:t>en.wikipedia.org</a:t>
-            </a:r>
-            <a:r>
-              <a:rPr lang="en-US" sz="1200" dirty="0"/>
-              <a:t>/wiki/</a:t>
-            </a:r>
-            <a:r>
-              <a:rPr lang="en-US" sz="1200" dirty="0" err="1"/>
-              <a:t>Spectral_density</a:t>
-            </a:r>
-            <a:r>
-              <a:rPr lang="en-US" sz="1200" dirty="0"/>
-              <a:t> –</a:t>
-            </a:r>
-          </a:p>
-          <a:p>
-            <a:r>
-              <a:rPr lang="en-US" sz="1200" dirty="0"/>
-              <a:t>– https://</a:t>
-            </a:r>
-            <a:r>
-              <a:rPr lang="en-US" sz="1200" dirty="0" err="1"/>
-              <a:t>en.wikipedia.org</a:t>
-            </a:r>
-            <a:r>
-              <a:rPr lang="en-US" sz="1200" dirty="0"/>
-              <a:t>/wiki/</a:t>
-            </a:r>
-            <a:r>
-              <a:rPr lang="en-US" sz="1200" dirty="0" err="1"/>
-              <a:t>Fourier_analysis</a:t>
-            </a:r>
-            <a:r>
-              <a:rPr lang="en-US" sz="1200" dirty="0"/>
-              <a:t> –</a:t>
-            </a:r>
-          </a:p>
-          <a:p>
-            <a:r>
-              <a:rPr lang="en-US" sz="1200" dirty="0"/>
-              <a:t>– https://</a:t>
-            </a:r>
-            <a:r>
-              <a:rPr lang="en-US" sz="1200" dirty="0" err="1"/>
-              <a:t>en.wikipedia.org</a:t>
-            </a:r>
-            <a:r>
-              <a:rPr lang="en-US" sz="1200" dirty="0"/>
-              <a:t>/wiki/</a:t>
-            </a:r>
-            <a:r>
-              <a:rPr lang="en-US" sz="1200" dirty="0" err="1"/>
-              <a:t>Fast_Fourier_transform</a:t>
-            </a:r>
-            <a:r>
-              <a:rPr lang="en-US" sz="1200" dirty="0"/>
-              <a:t> –</a:t>
+              <a:rPr lang="en-US" dirty="0"/>
+              <a:t>When drawing a curve through experimental points, </a:t>
+            </a:r>
+          </a:p>
+          <a:p>
+            <a:r>
+              <a:rPr lang="en-US" dirty="0"/>
+              <a:t>it is very important to estimate how good this curve </a:t>
+            </a:r>
+          </a:p>
+          <a:p>
+            <a:r>
+              <a:rPr lang="en-US" dirty="0"/>
+              <a:t>fits the data, and if fitting the data with this curve makes sense. </a:t>
+            </a:r>
+          </a:p>
+          <a:p>
+            <a:r>
+              <a:rPr lang="en-US" dirty="0"/>
+              <a:t>For this you can use the </a:t>
+            </a:r>
+            <a:r>
+              <a:rPr lang="en-US" b="1" dirty="0">
+                <a:solidFill>
+                  <a:srgbClr val="0070C0"/>
+                </a:solidFill>
+              </a:rPr>
+              <a:t>Coefficient of Determination R</a:t>
+            </a:r>
+            <a:r>
+              <a:rPr lang="en-US" b="1" baseline="30000" dirty="0">
+                <a:solidFill>
+                  <a:srgbClr val="0070C0"/>
+                </a:solidFill>
+              </a:rPr>
+              <a:t>2</a:t>
+            </a:r>
+            <a:r>
+              <a:rPr lang="en-US" dirty="0"/>
+              <a:t>:</a:t>
+            </a:r>
+          </a:p>
+          <a:p>
+            <a:br>
+              <a:rPr lang="en-US" dirty="0"/>
+            </a:br>
+            <a:r>
+              <a:rPr lang="en-US" dirty="0"/>
+              <a:t>    –  </a:t>
+            </a:r>
+            <a:r>
+              <a:rPr lang="en-US" dirty="0">
+                <a:hlinkClick r:id="rId4"/>
+              </a:rPr>
+              <a:t>https://en.wikipedia.org/wiki/Coefficient_of_determination</a:t>
+            </a:r>
+            <a:r>
+              <a:rPr lang="en-US" dirty="0"/>
+              <a:t>  </a:t>
+            </a:r>
+          </a:p>
+          <a:p>
+            <a:r>
+              <a:rPr lang="en-US" dirty="0"/>
+              <a:t>“R squared” is a number between 0 and 1. </a:t>
+            </a:r>
+            <a:br>
+              <a:rPr lang="en-US" dirty="0"/>
+            </a:br>
+            <a:r>
+              <a:rPr lang="en-US" dirty="0"/>
+              <a:t>R</a:t>
+            </a:r>
+            <a:r>
+              <a:rPr lang="en-US" baseline="30000" dirty="0"/>
+              <a:t>2</a:t>
+            </a:r>
+            <a:r>
+              <a:rPr lang="en-US" dirty="0"/>
+              <a:t> close to 1 – good model. </a:t>
             </a:r>
           </a:p>
         </p:txBody>
       </p:sp>
+      <p:pic>
+        <p:nvPicPr>
+          <p:cNvPr id="2" name="Picture 1">
+            <a:extLst>
+              <a:ext uri="{FF2B5EF4-FFF2-40B4-BE49-F238E27FC236}">
+                <a16:creationId xmlns:a16="http://schemas.microsoft.com/office/drawing/2014/main" id="{ABAA291F-F324-B342-B7BD-C0A11680ACC7}"/>
+              </a:ext>
+            </a:extLst>
+          </p:cNvPr>
+          <p:cNvPicPr>
+            <a:picLocks noChangeAspect="1"/>
+          </p:cNvPicPr>
+          <p:nvPr/>
+        </p:nvPicPr>
+        <p:blipFill rotWithShape="1">
+          <a:blip r:embed="rId5" cstate="email">
+            <a:extLst>
+              <a:ext uri="{28A0092B-C50C-407E-A947-70E740481C1C}">
+                <a14:useLocalDpi xmlns:a14="http://schemas.microsoft.com/office/drawing/2010/main"/>
+              </a:ext>
+            </a:extLst>
+          </a:blip>
+          <a:srcRect/>
+          <a:stretch/>
+        </p:blipFill>
+        <p:spPr>
+          <a:xfrm>
+            <a:off x="7399416" y="4484760"/>
+            <a:ext cx="4751077" cy="2249557"/>
+          </a:xfrm>
+          <a:prstGeom prst="rect">
+            <a:avLst/>
+          </a:prstGeom>
+        </p:spPr>
+      </p:pic>
+      <p:pic>
+        <p:nvPicPr>
+          <p:cNvPr id="6" name="Picture 5">
+            <a:extLst>
+              <a:ext uri="{FF2B5EF4-FFF2-40B4-BE49-F238E27FC236}">
+                <a16:creationId xmlns:a16="http://schemas.microsoft.com/office/drawing/2014/main" id="{2C0E0B71-9796-224E-B0B8-1567F37D9C0C}"/>
+              </a:ext>
+            </a:extLst>
+          </p:cNvPr>
+          <p:cNvPicPr>
+            <a:picLocks noChangeAspect="1"/>
+          </p:cNvPicPr>
+          <p:nvPr/>
+        </p:nvPicPr>
+        <p:blipFill>
+          <a:blip r:embed="rId6" cstate="email">
+            <a:extLst>
+              <a:ext uri="{28A0092B-C50C-407E-A947-70E740481C1C}">
+                <a14:useLocalDpi xmlns:a14="http://schemas.microsoft.com/office/drawing/2010/main"/>
+              </a:ext>
+            </a:extLst>
+          </a:blip>
+          <a:stretch>
+            <a:fillRect/>
+          </a:stretch>
+        </p:blipFill>
+        <p:spPr>
+          <a:xfrm>
+            <a:off x="7012745" y="2161339"/>
+            <a:ext cx="5168900" cy="1765300"/>
+          </a:xfrm>
+          <a:prstGeom prst="rect">
+            <a:avLst/>
+          </a:prstGeom>
+        </p:spPr>
+      </p:pic>
     </p:spTree>
     <p:extLst>
       <p:ext uri="{BB962C8B-B14F-4D97-AF65-F5344CB8AC3E}">
-        <p14:creationId xmlns:p14="http://schemas.microsoft.com/office/powerpoint/2010/main" val="2866111539"/>
+        <p14:creationId xmlns:p14="http://schemas.microsoft.com/office/powerpoint/2010/main" val="1417852731"/>
       </p:ext>
     </p:extLst>
   </p:cSld>
@@ -18209,419 +17841,6 @@
 </file>
 
 <file path=ppt/slides/slide12.xml><?xml version="1.0" encoding="utf-8"?>
-<p:sld xmlns:a="http://schemas.openxmlformats.org/drawingml/2006/main" xmlns:r="http://schemas.openxmlformats.org/officeDocument/2006/relationships" xmlns:p="http://schemas.openxmlformats.org/presentationml/2006/main">
-  <p:cSld>
-    <p:spTree>
-      <p:nvGrpSpPr>
-        <p:cNvPr id="1" name=""/>
-        <p:cNvGrpSpPr/>
-        <p:nvPr/>
-      </p:nvGrpSpPr>
-      <p:grpSpPr>
-        <a:xfrm>
-          <a:off x="0" y="0"/>
-          <a:ext cx="0" cy="0"/>
-          <a:chOff x="0" y="0"/>
-          <a:chExt cx="0" cy="0"/>
-        </a:xfrm>
-      </p:grpSpPr>
-      <p:sp>
-        <p:nvSpPr>
-          <p:cNvPr id="4" name="TextBox 3">
-            <a:extLst>
-              <a:ext uri="{FF2B5EF4-FFF2-40B4-BE49-F238E27FC236}">
-                <a16:creationId xmlns:a16="http://schemas.microsoft.com/office/drawing/2014/main" id="{1EB5F268-965F-C142-A102-83C02389B555}"/>
-              </a:ext>
-            </a:extLst>
-          </p:cNvPr>
-          <p:cNvSpPr txBox="1"/>
-          <p:nvPr/>
-        </p:nvSpPr>
-        <p:spPr>
-          <a:xfrm>
-            <a:off x="189186" y="178676"/>
-            <a:ext cx="5906814" cy="3970318"/>
-          </a:xfrm>
-          <a:prstGeom prst="rect">
-            <a:avLst/>
-          </a:prstGeom>
-          <a:noFill/>
-        </p:spPr>
-        <p:txBody>
-          <a:bodyPr wrap="square" rtlCol="0">
-            <a:spAutoFit/>
-          </a:bodyPr>
-          <a:lstStyle/>
-          <a:p>
-            <a:r>
-              <a:rPr lang="en-US" dirty="0"/>
-              <a:t>Convolution, Functional Analysis</a:t>
-            </a:r>
-          </a:p>
-          <a:p>
-            <a:r>
-              <a:rPr lang="en-US" dirty="0"/>
-              <a:t>– https://</a:t>
-            </a:r>
-            <a:r>
-              <a:rPr lang="en-US" dirty="0" err="1"/>
-              <a:t>en.wikipedia.org</a:t>
-            </a:r>
-            <a:r>
-              <a:rPr lang="en-US" dirty="0"/>
-              <a:t>/wiki/Convolution –</a:t>
-            </a:r>
-          </a:p>
-          <a:p>
-            <a:r>
-              <a:rPr lang="en-US" dirty="0"/>
-              <a:t>– https://</a:t>
-            </a:r>
-            <a:r>
-              <a:rPr lang="en-US" dirty="0" err="1"/>
-              <a:t>en.wikipedia.org</a:t>
-            </a:r>
-            <a:r>
-              <a:rPr lang="en-US" dirty="0"/>
-              <a:t>/wiki/</a:t>
-            </a:r>
-            <a:r>
-              <a:rPr lang="en-US" dirty="0" err="1"/>
-              <a:t>Functional_analysis</a:t>
-            </a:r>
-            <a:r>
-              <a:rPr lang="en-US" dirty="0"/>
-              <a:t> –</a:t>
-            </a:r>
-          </a:p>
-          <a:p>
-            <a:endParaRPr lang="en-US" dirty="0"/>
-          </a:p>
-          <a:p>
-            <a:r>
-              <a:rPr lang="en-US" dirty="0"/>
-              <a:t>Extracting signal from Noise</a:t>
-            </a:r>
-          </a:p>
-          <a:p>
-            <a:r>
-              <a:rPr lang="en-US" dirty="0"/>
-              <a:t>– https://</a:t>
-            </a:r>
-            <a:r>
-              <a:rPr lang="en-US" dirty="0" err="1"/>
-              <a:t>en.wikipedia.org</a:t>
-            </a:r>
-            <a:r>
-              <a:rPr lang="en-US" dirty="0"/>
-              <a:t>/wiki/Signal-to-</a:t>
-            </a:r>
-            <a:r>
-              <a:rPr lang="en-US" dirty="0" err="1"/>
-              <a:t>noise_ratio</a:t>
-            </a:r>
-            <a:r>
-              <a:rPr lang="en-US" dirty="0"/>
-              <a:t> –</a:t>
-            </a:r>
-          </a:p>
-          <a:p>
-            <a:r>
-              <a:rPr lang="en-US" dirty="0"/>
-              <a:t>– https://</a:t>
-            </a:r>
-            <a:r>
-              <a:rPr lang="en-US" dirty="0" err="1"/>
-              <a:t>en.wikipedia.org</a:t>
-            </a:r>
-            <a:r>
-              <a:rPr lang="en-US" dirty="0"/>
-              <a:t>/wiki/</a:t>
-            </a:r>
-            <a:r>
-              <a:rPr lang="en-US" dirty="0" err="1"/>
-              <a:t>Noise_reduction</a:t>
-            </a:r>
-            <a:r>
-              <a:rPr lang="en-US" dirty="0"/>
-              <a:t> – (filtering, etc.)</a:t>
-            </a:r>
-          </a:p>
-          <a:p>
-            <a:r>
-              <a:rPr lang="en-US" dirty="0"/>
-              <a:t>If we add N samples “s” of noisy data, then the signal will add proportionally to N,</a:t>
-            </a:r>
-          </a:p>
-          <a:p>
-            <a:r>
-              <a:rPr lang="en-US" dirty="0"/>
-              <a:t>whereas noise will grow only as sqrt(N). So, if we add 100 samples, we will</a:t>
-            </a:r>
-          </a:p>
-          <a:p>
-            <a:r>
-              <a:rPr lang="en-US" dirty="0"/>
-              <a:t>improve out Signal/Noise ratio ~10 times.</a:t>
-            </a:r>
-          </a:p>
-          <a:p>
-            <a:endParaRPr lang="en-US" dirty="0"/>
-          </a:p>
-          <a:p>
-            <a:r>
-              <a:rPr lang="en-US" dirty="0"/>
-              <a:t>Monte Carlo Method</a:t>
-            </a:r>
-          </a:p>
-          <a:p>
-            <a:r>
-              <a:rPr lang="en-US" dirty="0"/>
-              <a:t>– https://</a:t>
-            </a:r>
-            <a:r>
-              <a:rPr lang="en-US" dirty="0" err="1"/>
-              <a:t>en.wikipedia.org</a:t>
-            </a:r>
-            <a:r>
-              <a:rPr lang="en-US" dirty="0"/>
-              <a:t>/wiki/</a:t>
-            </a:r>
-            <a:r>
-              <a:rPr lang="en-US" dirty="0" err="1"/>
-              <a:t>Monte_Carlo_method</a:t>
-            </a:r>
-            <a:r>
-              <a:rPr lang="en-US" dirty="0"/>
-              <a:t> – </a:t>
-            </a:r>
-          </a:p>
-          <a:p>
-            <a:r>
-              <a:rPr lang="en-US" dirty="0"/>
-              <a:t>used to evaluate something by using randomly-generated samples. </a:t>
-            </a:r>
-          </a:p>
-          <a:p>
-            <a:r>
-              <a:rPr lang="en-US" dirty="0"/>
-              <a:t>The more samples – the more accurate the result.</a:t>
-            </a:r>
-          </a:p>
-          <a:p>
-            <a:endParaRPr lang="en-US" dirty="0"/>
-          </a:p>
-        </p:txBody>
-      </p:sp>
-    </p:spTree>
-    <p:extLst>
-      <p:ext uri="{BB962C8B-B14F-4D97-AF65-F5344CB8AC3E}">
-        <p14:creationId xmlns:p14="http://schemas.microsoft.com/office/powerpoint/2010/main" val="4266693620"/>
-      </p:ext>
-    </p:extLst>
-  </p:cSld>
-  <p:clrMapOvr>
-    <a:masterClrMapping/>
-  </p:clrMapOvr>
-</p:sld>
-</file>
-
-<file path=ppt/slides/slide13.xml><?xml version="1.0" encoding="utf-8"?>
-<p:sld xmlns:a="http://schemas.openxmlformats.org/drawingml/2006/main" xmlns:r="http://schemas.openxmlformats.org/officeDocument/2006/relationships" xmlns:p="http://schemas.openxmlformats.org/presentationml/2006/main">
-  <p:cSld>
-    <p:spTree>
-      <p:nvGrpSpPr>
-        <p:cNvPr id="1" name="Shape 88"/>
-        <p:cNvGrpSpPr/>
-        <p:nvPr/>
-      </p:nvGrpSpPr>
-      <p:grpSpPr>
-        <a:xfrm>
-          <a:off x="0" y="0"/>
-          <a:ext cx="0" cy="0"/>
-          <a:chOff x="0" y="0"/>
-          <a:chExt cx="0" cy="0"/>
-        </a:xfrm>
-      </p:grpSpPr>
-      <p:sp>
-        <p:nvSpPr>
-          <p:cNvPr id="89" name="Google Shape;89;p13"/>
-          <p:cNvSpPr txBox="1"/>
-          <p:nvPr/>
-        </p:nvSpPr>
-        <p:spPr>
-          <a:xfrm>
-            <a:off x="279925" y="330850"/>
-            <a:ext cx="11775000" cy="5902200"/>
-          </a:xfrm>
-          <a:prstGeom prst="rect">
-            <a:avLst/>
-          </a:prstGeom>
-          <a:noFill/>
-          <a:ln>
-            <a:noFill/>
-          </a:ln>
-        </p:spPr>
-        <p:txBody>
-          <a:bodyPr spcFirstLastPara="1" wrap="square" lIns="91425" tIns="91425" rIns="91425" bIns="91425" anchor="t" anchorCtr="0">
-            <a:noAutofit/>
-          </a:bodyPr>
-          <a:lstStyle/>
-          <a:p>
-            <a:pPr marL="0" lvl="0" indent="0" algn="l" rtl="0">
-              <a:spcBef>
-                <a:spcPts val="0"/>
-              </a:spcBef>
-              <a:spcAft>
-                <a:spcPts val="0"/>
-              </a:spcAft>
-              <a:buNone/>
-            </a:pPr>
-            <a:r>
-              <a:rPr lang="en-US" sz="3600" b="1">
-                <a:latin typeface="Calibri"/>
-                <a:ea typeface="Calibri"/>
-                <a:cs typeface="Calibri"/>
-                <a:sym typeface="Calibri"/>
-              </a:rPr>
-              <a:t>Statistics</a:t>
-            </a:r>
-            <a:endParaRPr sz="3600" b="1">
-              <a:latin typeface="Calibri"/>
-              <a:ea typeface="Calibri"/>
-              <a:cs typeface="Calibri"/>
-              <a:sym typeface="Calibri"/>
-            </a:endParaRPr>
-          </a:p>
-          <a:p>
-            <a:pPr marL="0" lvl="0" indent="0" algn="l" rtl="0">
-              <a:spcBef>
-                <a:spcPts val="0"/>
-              </a:spcBef>
-              <a:spcAft>
-                <a:spcPts val="0"/>
-              </a:spcAft>
-              <a:buNone/>
-            </a:pPr>
-            <a:endParaRPr sz="3600">
-              <a:latin typeface="Calibri"/>
-              <a:ea typeface="Calibri"/>
-              <a:cs typeface="Calibri"/>
-              <a:sym typeface="Calibri"/>
-            </a:endParaRPr>
-          </a:p>
-          <a:p>
-            <a:pPr marL="457200" lvl="0" indent="-457200" algn="l" rtl="0">
-              <a:spcBef>
-                <a:spcPts val="0"/>
-              </a:spcBef>
-              <a:spcAft>
-                <a:spcPts val="0"/>
-              </a:spcAft>
-              <a:buSzPts val="3600"/>
-              <a:buFont typeface="Calibri"/>
-              <a:buChar char="●"/>
-            </a:pPr>
-            <a:r>
-              <a:rPr lang="en-US" sz="3600">
-                <a:latin typeface="Calibri"/>
-                <a:ea typeface="Calibri"/>
-                <a:cs typeface="Calibri"/>
-                <a:sym typeface="Calibri"/>
-              </a:rPr>
-              <a:t>Central Limit Theorem, Normal (Gaussian) distribution</a:t>
-            </a:r>
-            <a:endParaRPr sz="3600">
-              <a:latin typeface="Calibri"/>
-              <a:ea typeface="Calibri"/>
-              <a:cs typeface="Calibri"/>
-              <a:sym typeface="Calibri"/>
-            </a:endParaRPr>
-          </a:p>
-          <a:p>
-            <a:pPr marL="457200" lvl="0" indent="-457200" algn="l" rtl="0">
-              <a:spcBef>
-                <a:spcPts val="0"/>
-              </a:spcBef>
-              <a:spcAft>
-                <a:spcPts val="0"/>
-              </a:spcAft>
-              <a:buSzPts val="3600"/>
-              <a:buFont typeface="Calibri"/>
-              <a:buChar char="●"/>
-            </a:pPr>
-            <a:r>
-              <a:rPr lang="en-US" sz="3600">
-                <a:latin typeface="Calibri"/>
-                <a:ea typeface="Calibri"/>
-                <a:cs typeface="Calibri"/>
-                <a:sym typeface="Calibri"/>
-              </a:rPr>
-              <a:t>p-value , null hypothesis (also confidence interval, z-score)</a:t>
-            </a:r>
-            <a:endParaRPr sz="3600">
-              <a:latin typeface="Calibri"/>
-              <a:ea typeface="Calibri"/>
-              <a:cs typeface="Calibri"/>
-              <a:sym typeface="Calibri"/>
-            </a:endParaRPr>
-          </a:p>
-          <a:p>
-            <a:pPr marL="457200" lvl="0" indent="-457200" algn="l" rtl="0">
-              <a:spcBef>
-                <a:spcPts val="0"/>
-              </a:spcBef>
-              <a:spcAft>
-                <a:spcPts val="0"/>
-              </a:spcAft>
-              <a:buSzPts val="3600"/>
-              <a:buFont typeface="Calibri"/>
-              <a:buChar char="●"/>
-            </a:pPr>
-            <a:r>
-              <a:rPr lang="en-US" sz="3600">
-                <a:latin typeface="Calibri"/>
-                <a:ea typeface="Calibri"/>
-                <a:cs typeface="Calibri"/>
-                <a:sym typeface="Calibri"/>
-              </a:rPr>
-              <a:t>chi-square</a:t>
-            </a:r>
-            <a:endParaRPr sz="3600">
-              <a:latin typeface="Calibri"/>
-              <a:ea typeface="Calibri"/>
-              <a:cs typeface="Calibri"/>
-              <a:sym typeface="Calibri"/>
-            </a:endParaRPr>
-          </a:p>
-          <a:p>
-            <a:pPr marL="0" lvl="0" indent="0" algn="l" rtl="0">
-              <a:spcBef>
-                <a:spcPts val="0"/>
-              </a:spcBef>
-              <a:spcAft>
-                <a:spcPts val="0"/>
-              </a:spcAft>
-              <a:buNone/>
-            </a:pPr>
-            <a:endParaRPr sz="3600">
-              <a:latin typeface="Calibri"/>
-              <a:ea typeface="Calibri"/>
-              <a:cs typeface="Calibri"/>
-              <a:sym typeface="Calibri"/>
-            </a:endParaRPr>
-          </a:p>
-        </p:txBody>
-      </p:sp>
-    </p:spTree>
-  </p:cSld>
-  <p:clrMapOvr>
-    <a:masterClrMapping/>
-  </p:clrMapOvr>
-</p:sld>
-</file>
-
-<file path=ppt/slides/slide14.xml><?xml version="1.0" encoding="utf-8"?>
 <p:sld xmlns:a="http://schemas.openxmlformats.org/drawingml/2006/main" xmlns:r="http://schemas.openxmlformats.org/officeDocument/2006/relationships" xmlns:p="http://schemas.openxmlformats.org/presentationml/2006/main">
   <p:cSld>
     <p:spTree>
@@ -19150,8 +18369,13 @@
           <p:nvPr/>
         </p:nvPicPr>
         <p:blipFill>
-          <a:blip r:embed="rId4">
+          <a:blip r:embed="rId4" cstate="email">
             <a:alphaModFix/>
+            <a:extLst>
+              <a:ext uri="{28A0092B-C50C-407E-A947-70E740481C1C}">
+                <a14:useLocalDpi xmlns:a14="http://schemas.microsoft.com/office/drawing/2010/main"/>
+              </a:ext>
+            </a:extLst>
           </a:blip>
           <a:stretch>
             <a:fillRect/>
@@ -19178,8 +18402,13 @@
           <p:nvPr/>
         </p:nvPicPr>
         <p:blipFill>
-          <a:blip r:embed="rId5">
+          <a:blip r:embed="rId5" cstate="email">
             <a:alphaModFix/>
+            <a:extLst>
+              <a:ext uri="{28A0092B-C50C-407E-A947-70E740481C1C}">
+                <a14:useLocalDpi xmlns:a14="http://schemas.microsoft.com/office/drawing/2010/main"/>
+              </a:ext>
+            </a:extLst>
           </a:blip>
           <a:stretch>
             <a:fillRect/>
@@ -19206,8 +18435,13 @@
           <p:nvPr/>
         </p:nvPicPr>
         <p:blipFill>
-          <a:blip r:embed="rId6">
+          <a:blip r:embed="rId6" cstate="email">
             <a:alphaModFix/>
+            <a:extLst>
+              <a:ext uri="{28A0092B-C50C-407E-A947-70E740481C1C}">
+                <a14:useLocalDpi xmlns:a14="http://schemas.microsoft.com/office/drawing/2010/main"/>
+              </a:ext>
+            </a:extLst>
           </a:blip>
           <a:stretch>
             <a:fillRect/>
@@ -19287,7 +18521,7 @@
 </p:sld>
 </file>
 
-<file path=ppt/slides/slide15.xml><?xml version="1.0" encoding="utf-8"?>
+<file path=ppt/slides/slide13.xml><?xml version="1.0" encoding="utf-8"?>
 <p:sld xmlns:a="http://schemas.openxmlformats.org/drawingml/2006/main" xmlns:r="http://schemas.openxmlformats.org/officeDocument/2006/relationships" xmlns:p="http://schemas.openxmlformats.org/presentationml/2006/main">
   <p:cSld>
     <p:spTree>
@@ -19864,10 +19098,15 @@
           <p:nvPr/>
         </p:nvPicPr>
         <p:blipFill rotWithShape="1">
-          <a:blip r:embed="rId3">
+          <a:blip r:embed="rId3" cstate="email">
             <a:alphaModFix/>
+            <a:extLst>
+              <a:ext uri="{28A0092B-C50C-407E-A947-70E740481C1C}">
+                <a14:useLocalDpi xmlns:a14="http://schemas.microsoft.com/office/drawing/2010/main"/>
+              </a:ext>
+            </a:extLst>
           </a:blip>
-          <a:srcRect b="16296"/>
+          <a:srcRect/>
           <a:stretch/>
         </p:blipFill>
         <p:spPr>
@@ -20330,7 +19569,7 @@
 </p:sld>
 </file>
 
-<file path=ppt/slides/slide16.xml><?xml version="1.0" encoding="utf-8"?>
+<file path=ppt/slides/slide14.xml><?xml version="1.0" encoding="utf-8"?>
 <p:sld xmlns:a="http://schemas.openxmlformats.org/drawingml/2006/main" xmlns:r="http://schemas.openxmlformats.org/officeDocument/2006/relationships" xmlns:p="http://schemas.openxmlformats.org/presentationml/2006/main">
   <p:cSld>
     <p:spTree>
@@ -21125,7 +20364,7 @@
 </p:sld>
 </file>
 
-<file path=ppt/slides/slide17.xml><?xml version="1.0" encoding="utf-8"?>
+<file path=ppt/slides/slide15.xml><?xml version="1.0" encoding="utf-8"?>
 <p:sld xmlns:a="http://schemas.openxmlformats.org/drawingml/2006/main" xmlns:r="http://schemas.openxmlformats.org/officeDocument/2006/relationships" xmlns:p="http://schemas.openxmlformats.org/presentationml/2006/main">
   <p:cSld>
     <p:spTree>
@@ -22006,8 +21245,13 @@
           <p:nvPr/>
         </p:nvPicPr>
         <p:blipFill>
-          <a:blip r:embed="rId4">
+          <a:blip r:embed="rId4" cstate="email">
             <a:alphaModFix/>
+            <a:extLst>
+              <a:ext uri="{28A0092B-C50C-407E-A947-70E740481C1C}">
+                <a14:useLocalDpi xmlns:a14="http://schemas.microsoft.com/office/drawing/2010/main"/>
+              </a:ext>
+            </a:extLst>
           </a:blip>
           <a:stretch>
             <a:fillRect/>
@@ -22262,7 +21506,7 @@
 </p:sld>
 </file>
 
-<file path=ppt/slides/slide18.xml><?xml version="1.0" encoding="utf-8"?>
+<file path=ppt/slides/slide16.xml><?xml version="1.0" encoding="utf-8"?>
 <p:sld xmlns:a="http://schemas.openxmlformats.org/drawingml/2006/main" xmlns:r="http://schemas.openxmlformats.org/officeDocument/2006/relationships" xmlns:p="http://schemas.openxmlformats.org/presentationml/2006/main">
   <p:cSld>
     <p:spTree>
@@ -22314,7 +21558,7 @@
               <a:buNone/>
             </a:pPr>
             <a:r>
-              <a:rPr lang="en-US" sz="3000" b="1">
+              <a:rPr lang="en-US" sz="3000" b="1" dirty="0">
                 <a:latin typeface="Calibri"/>
                 <a:ea typeface="Calibri"/>
                 <a:cs typeface="Calibri"/>
@@ -22323,7 +21567,7 @@
               <a:t>Example of X2 calculation</a:t>
             </a:r>
             <a:r>
-              <a:rPr lang="en-US" sz="1800">
+              <a:rPr lang="en-US" sz="1800" dirty="0">
                 <a:latin typeface="Calibri"/>
                 <a:ea typeface="Calibri"/>
                 <a:cs typeface="Calibri"/>
@@ -22332,7 +21576,7 @@
               <a:t>   ( from </a:t>
             </a:r>
             <a:r>
-              <a:rPr lang="en-US" sz="1800" u="sng">
+              <a:rPr lang="en-US" sz="1800" u="sng" dirty="0">
                 <a:solidFill>
                   <a:schemeClr val="hlink"/>
                 </a:solidFill>
@@ -22341,7 +21585,7 @@
               <a:t>https://stattrek.com/chi-square-test/goodness-of-fit.aspx</a:t>
             </a:r>
             <a:r>
-              <a:rPr lang="en-US" sz="1800">
+              <a:rPr lang="en-US" sz="1800" dirty="0">
                 <a:latin typeface="Calibri"/>
                 <a:ea typeface="Calibri"/>
                 <a:cs typeface="Calibri"/>
@@ -22349,7 +21593,7 @@
               </a:rPr>
               <a:t> )</a:t>
             </a:r>
-            <a:endParaRPr sz="1800">
+            <a:endParaRPr sz="1800" dirty="0">
               <a:latin typeface="Calibri"/>
               <a:ea typeface="Calibri"/>
               <a:cs typeface="Calibri"/>
@@ -22372,7 +21616,7 @@
               <a:buNone/>
             </a:pPr>
             <a:br>
-              <a:rPr lang="en-US" sz="1800">
+              <a:rPr lang="en-US" sz="1800" dirty="0">
                 <a:latin typeface="Calibri"/>
                 <a:ea typeface="Calibri"/>
                 <a:cs typeface="Calibri"/>
@@ -22380,7 +21624,7 @@
               </a:rPr>
             </a:br>
             <a:r>
-              <a:rPr lang="en-US" sz="1800" b="1" u="sng">
+              <a:rPr lang="en-US" sz="1800" b="1" u="sng" dirty="0">
                 <a:latin typeface="Calibri"/>
                 <a:ea typeface="Calibri"/>
                 <a:cs typeface="Calibri"/>
@@ -22388,7 +21632,7 @@
               </a:rPr>
               <a:t>Problem:</a:t>
             </a:r>
-            <a:endParaRPr sz="1800" b="1" u="sng">
+            <a:endParaRPr sz="1800" b="1" u="sng" dirty="0">
               <a:latin typeface="Calibri"/>
               <a:ea typeface="Calibri"/>
               <a:cs typeface="Calibri"/>
@@ -22406,7 +21650,7 @@
               <a:buNone/>
             </a:pPr>
             <a:r>
-              <a:rPr lang="en-US" sz="1800">
+              <a:rPr lang="en-US" sz="1800" dirty="0">
                 <a:latin typeface="Calibri"/>
                 <a:ea typeface="Calibri"/>
                 <a:cs typeface="Calibri"/>
@@ -22414,7 +21658,7 @@
               </a:rPr>
               <a:t>We have 3 types of cards (T1,T2,T3) with theoretical frequency of (30%, 60%, 10%).</a:t>
             </a:r>
-            <a:endParaRPr sz="1800">
+            <a:endParaRPr sz="1800" dirty="0">
               <a:latin typeface="Calibri"/>
               <a:ea typeface="Calibri"/>
               <a:cs typeface="Calibri"/>
@@ -22432,7 +21676,7 @@
               <a:buNone/>
             </a:pPr>
             <a:r>
-              <a:rPr lang="en-US" sz="1800">
+              <a:rPr lang="en-US" sz="1800" dirty="0">
                 <a:latin typeface="Calibri"/>
                 <a:ea typeface="Calibri"/>
                 <a:cs typeface="Calibri"/>
@@ -22440,7 +21684,7 @@
               </a:rPr>
               <a:t>We have a random sample of 100 cards with counts (50, 45, 5).</a:t>
             </a:r>
-            <a:endParaRPr sz="1800">
+            <a:endParaRPr sz="1800" dirty="0">
               <a:latin typeface="Calibri"/>
               <a:ea typeface="Calibri"/>
               <a:cs typeface="Calibri"/>
@@ -22463,7 +21707,7 @@
               <a:buNone/>
             </a:pPr>
             <a:r>
-              <a:rPr lang="en-US" sz="1800">
+              <a:rPr lang="en-US" sz="1800" dirty="0">
                 <a:latin typeface="Calibri"/>
                 <a:ea typeface="Calibri"/>
                 <a:cs typeface="Calibri"/>
@@ -22471,7 +21715,7 @@
               </a:rPr>
               <a:t>Is this sample consistent with theory? Use a 0.05 level of significance.</a:t>
             </a:r>
-            <a:endParaRPr sz="1800">
+            <a:endParaRPr sz="1800" dirty="0">
               <a:latin typeface="Calibri"/>
               <a:ea typeface="Calibri"/>
               <a:cs typeface="Calibri"/>
@@ -22493,7 +21737,7 @@
               <a:buFont typeface="Arial"/>
               <a:buNone/>
             </a:pPr>
-            <a:endParaRPr sz="1800">
+            <a:endParaRPr sz="1800" dirty="0">
               <a:latin typeface="Calibri"/>
               <a:ea typeface="Calibri"/>
               <a:cs typeface="Calibri"/>
@@ -22516,7 +21760,7 @@
               <a:buNone/>
             </a:pPr>
             <a:r>
-              <a:rPr lang="en-US" sz="1800" b="1" u="sng">
+              <a:rPr lang="en-US" sz="1800" b="1" u="sng" dirty="0">
                 <a:latin typeface="Calibri"/>
                 <a:ea typeface="Calibri"/>
                 <a:cs typeface="Calibri"/>
@@ -22524,7 +21768,7 @@
               </a:rPr>
               <a:t>Solution:</a:t>
             </a:r>
-            <a:endParaRPr sz="1800" b="1" u="sng">
+            <a:endParaRPr sz="1800" b="1" u="sng" dirty="0">
               <a:latin typeface="Calibri"/>
               <a:ea typeface="Calibri"/>
               <a:cs typeface="Calibri"/>
@@ -22542,7 +21786,7 @@
               <a:buNone/>
             </a:pPr>
             <a:r>
-              <a:rPr lang="en-US" sz="1800">
+              <a:rPr lang="en-US" sz="1800" dirty="0">
                 <a:latin typeface="Calibri"/>
                 <a:ea typeface="Calibri"/>
                 <a:cs typeface="Calibri"/>
@@ -22551,7 +21795,7 @@
               <a:t>Null hypothesis: The proportions are </a:t>
             </a:r>
             <a:r>
-              <a:rPr lang="en-US" sz="1800">
+              <a:rPr lang="en-US" sz="1800" dirty="0">
                 <a:solidFill>
                   <a:schemeClr val="dk1"/>
                 </a:solidFill>
@@ -22562,7 +21806,7 @@
               </a:rPr>
               <a:t>(30%, 60%, 10%)</a:t>
             </a:r>
-            <a:endParaRPr sz="1800">
+            <a:endParaRPr sz="1800" dirty="0">
               <a:solidFill>
                 <a:schemeClr val="dk1"/>
               </a:solidFill>
@@ -22588,7 +21832,7 @@
               <a:buNone/>
             </a:pPr>
             <a:r>
-              <a:rPr lang="en-US" sz="1800">
+              <a:rPr lang="en-US" sz="1800" dirty="0">
                 <a:latin typeface="Calibri"/>
                 <a:ea typeface="Calibri"/>
                 <a:cs typeface="Calibri"/>
@@ -22596,7 +21840,7 @@
               </a:rPr>
               <a:t>Alternative hypothesis: At least one of the proportions in the null hypothesis is false.</a:t>
             </a:r>
-            <a:endParaRPr sz="1800">
+            <a:endParaRPr sz="1800" dirty="0">
               <a:latin typeface="Calibri"/>
               <a:ea typeface="Calibri"/>
               <a:cs typeface="Calibri"/>
@@ -22614,7 +21858,7 @@
               <a:buNone/>
             </a:pPr>
             <a:r>
-              <a:rPr lang="en-US" sz="1800">
+              <a:rPr lang="en-US" sz="1800" dirty="0">
                 <a:latin typeface="Calibri"/>
                 <a:ea typeface="Calibri"/>
                 <a:cs typeface="Calibri"/>
@@ -22622,7 +21866,7 @@
               </a:rPr>
               <a:t>Degrees of Freedom DF = k-1 = 3-1 = 2</a:t>
             </a:r>
-            <a:endParaRPr sz="1800">
+            <a:endParaRPr sz="1800" dirty="0">
               <a:latin typeface="Calibri"/>
               <a:ea typeface="Calibri"/>
               <a:cs typeface="Calibri"/>
@@ -22640,7 +21884,7 @@
               <a:buNone/>
             </a:pPr>
             <a:r>
-              <a:rPr lang="en-US" sz="1800">
+              <a:rPr lang="en-US" sz="1800" dirty="0">
                 <a:latin typeface="Calibri"/>
                 <a:ea typeface="Calibri"/>
                 <a:cs typeface="Calibri"/>
@@ -22648,7 +21892,7 @@
               </a:rPr>
               <a:t>Expected values:</a:t>
             </a:r>
-            <a:endParaRPr sz="1800">
+            <a:endParaRPr sz="1800" dirty="0">
               <a:latin typeface="Calibri"/>
               <a:ea typeface="Calibri"/>
               <a:cs typeface="Calibri"/>
@@ -22666,7 +21910,7 @@
               <a:buNone/>
             </a:pPr>
             <a:r>
-              <a:rPr lang="en-US" sz="1800">
+              <a:rPr lang="en-US" sz="1800" dirty="0">
                 <a:latin typeface="Calibri"/>
                 <a:ea typeface="Calibri"/>
                 <a:cs typeface="Calibri"/>
@@ -22675,7 +21919,7 @@
               <a:t>E</a:t>
             </a:r>
             <a:r>
-              <a:rPr lang="en-US" sz="1800" baseline="-25000">
+              <a:rPr lang="en-US" sz="1800" baseline="-25000" dirty="0">
                 <a:latin typeface="Calibri"/>
                 <a:ea typeface="Calibri"/>
                 <a:cs typeface="Calibri"/>
@@ -22684,7 +21928,7 @@
               <a:t>1</a:t>
             </a:r>
             <a:r>
-              <a:rPr lang="en-US" sz="1800">
+              <a:rPr lang="en-US" sz="1800" dirty="0">
                 <a:latin typeface="Calibri"/>
                 <a:ea typeface="Calibri"/>
                 <a:cs typeface="Calibri"/>
@@ -22693,7 +21937,7 @@
               <a:t> = 100*0.3 = 30, E</a:t>
             </a:r>
             <a:r>
-              <a:rPr lang="en-US" sz="1800" baseline="-25000">
+              <a:rPr lang="en-US" sz="1800" baseline="-25000" dirty="0">
                 <a:latin typeface="Calibri"/>
                 <a:ea typeface="Calibri"/>
                 <a:cs typeface="Calibri"/>
@@ -22702,7 +21946,7 @@
               <a:t>2</a:t>
             </a:r>
             <a:r>
-              <a:rPr lang="en-US" sz="1800">
+              <a:rPr lang="en-US" sz="1800" dirty="0">
                 <a:latin typeface="Calibri"/>
                 <a:ea typeface="Calibri"/>
                 <a:cs typeface="Calibri"/>
@@ -22711,7 +21955,7 @@
               <a:t> = 100*0.6 = 60, E</a:t>
             </a:r>
             <a:r>
-              <a:rPr lang="en-US" sz="1800" baseline="-25000">
+              <a:rPr lang="en-US" sz="1800" baseline="-25000" dirty="0">
                 <a:latin typeface="Calibri"/>
                 <a:ea typeface="Calibri"/>
                 <a:cs typeface="Calibri"/>
@@ -22720,7 +21964,7 @@
               <a:t>3</a:t>
             </a:r>
             <a:r>
-              <a:rPr lang="en-US" sz="1800">
+              <a:rPr lang="en-US" sz="1800" dirty="0">
                 <a:latin typeface="Calibri"/>
                 <a:ea typeface="Calibri"/>
                 <a:cs typeface="Calibri"/>
@@ -22729,7 +21973,7 @@
               <a:t> = </a:t>
             </a:r>
             <a:r>
-              <a:rPr lang="en-US" sz="1800">
+              <a:rPr lang="en-US" sz="1800" dirty="0">
                 <a:solidFill>
                   <a:schemeClr val="dk1"/>
                 </a:solidFill>
@@ -22740,7 +21984,7 @@
               </a:rPr>
               <a:t>100 * 0.10 = 10</a:t>
             </a:r>
-            <a:endParaRPr sz="1800">
+            <a:endParaRPr sz="1800" dirty="0">
               <a:latin typeface="Calibri"/>
               <a:ea typeface="Calibri"/>
               <a:cs typeface="Calibri"/>
@@ -22763,7 +22007,7 @@
               <a:buNone/>
             </a:pPr>
             <a:r>
-              <a:rPr lang="en-US" sz="1800">
+              <a:rPr lang="en-US" sz="1800" dirty="0">
                 <a:latin typeface="Calibri"/>
                 <a:ea typeface="Calibri"/>
                 <a:cs typeface="Calibri"/>
@@ -22772,7 +22016,7 @@
               <a:t>Χ</a:t>
             </a:r>
             <a:r>
-              <a:rPr lang="en-US" sz="1800" baseline="30000">
+              <a:rPr lang="en-US" sz="1800" baseline="30000" dirty="0">
                 <a:latin typeface="Calibri"/>
                 <a:ea typeface="Calibri"/>
                 <a:cs typeface="Calibri"/>
@@ -22781,16 +22025,34 @@
               <a:t>2</a:t>
             </a:r>
             <a:r>
-              <a:rPr lang="en-US" sz="1800">
+              <a:rPr lang="en-US" sz="1800" dirty="0">
                 <a:latin typeface="Calibri"/>
                 <a:ea typeface="Calibri"/>
                 <a:cs typeface="Calibri"/>
                 <a:sym typeface="Calibri"/>
               </a:rPr>
-              <a:t> = Σ [ (O</a:t>
-            </a:r>
-            <a:r>
-              <a:rPr lang="en-US" sz="1800" baseline="-25000">
+              <a:t> = </a:t>
+            </a:r>
+            <a:r>
+              <a:rPr lang="en-US" sz="1800" dirty="0" err="1">
+                <a:latin typeface="Calibri"/>
+                <a:ea typeface="Calibri"/>
+                <a:cs typeface="Calibri"/>
+                <a:sym typeface="Calibri"/>
+              </a:rPr>
+              <a:t>Σ</a:t>
+            </a:r>
+            <a:r>
+              <a:rPr lang="en-US" sz="1800" dirty="0">
+                <a:latin typeface="Calibri"/>
+                <a:ea typeface="Calibri"/>
+                <a:cs typeface="Calibri"/>
+                <a:sym typeface="Calibri"/>
+              </a:rPr>
+              <a:t> [ (O</a:t>
+            </a:r>
+            <a:r>
+              <a:rPr lang="en-US" sz="1800" baseline="-25000" dirty="0">
                 <a:latin typeface="Calibri"/>
                 <a:ea typeface="Calibri"/>
                 <a:cs typeface="Calibri"/>
@@ -22799,16 +22061,25 @@
               <a:t>i</a:t>
             </a:r>
             <a:r>
-              <a:rPr lang="en-US" sz="1800">
+              <a:rPr lang="en-US" sz="1800" dirty="0">
                 <a:latin typeface="Calibri"/>
                 <a:ea typeface="Calibri"/>
                 <a:cs typeface="Calibri"/>
                 <a:sym typeface="Calibri"/>
               </a:rPr>
-              <a:t> - E</a:t>
-            </a:r>
-            <a:r>
-              <a:rPr lang="en-US" sz="1800" baseline="-25000">
+              <a:t> - </a:t>
+            </a:r>
+            <a:r>
+              <a:rPr lang="en-US" sz="1800" dirty="0" err="1">
+                <a:latin typeface="Calibri"/>
+                <a:ea typeface="Calibri"/>
+                <a:cs typeface="Calibri"/>
+                <a:sym typeface="Calibri"/>
+              </a:rPr>
+              <a:t>E</a:t>
+            </a:r>
+            <a:r>
+              <a:rPr lang="en-US" sz="1800" baseline="-25000" dirty="0" err="1">
                 <a:latin typeface="Calibri"/>
                 <a:ea typeface="Calibri"/>
                 <a:cs typeface="Calibri"/>
@@ -22817,7 +22088,7 @@
               <a:t>i</a:t>
             </a:r>
             <a:r>
-              <a:rPr lang="en-US" sz="1800">
+              <a:rPr lang="en-US" sz="1800" dirty="0">
                 <a:latin typeface="Calibri"/>
                 <a:ea typeface="Calibri"/>
                 <a:cs typeface="Calibri"/>
@@ -22826,7 +22097,7 @@
               <a:t>)</a:t>
             </a:r>
             <a:r>
-              <a:rPr lang="en-US" sz="1800" baseline="30000">
+              <a:rPr lang="en-US" sz="1800" baseline="30000" dirty="0">
                 <a:latin typeface="Calibri"/>
                 <a:ea typeface="Calibri"/>
                 <a:cs typeface="Calibri"/>
@@ -22835,16 +22106,25 @@
               <a:t>2</a:t>
             </a:r>
             <a:r>
-              <a:rPr lang="en-US" sz="1800">
+              <a:rPr lang="en-US" sz="1800" dirty="0">
                 <a:latin typeface="Calibri"/>
                 <a:ea typeface="Calibri"/>
                 <a:cs typeface="Calibri"/>
                 <a:sym typeface="Calibri"/>
               </a:rPr>
-              <a:t> / E</a:t>
-            </a:r>
-            <a:r>
-              <a:rPr lang="en-US" sz="1800" baseline="-25000">
+              <a:t> / </a:t>
+            </a:r>
+            <a:r>
+              <a:rPr lang="en-US" sz="1800" dirty="0" err="1">
+                <a:latin typeface="Calibri"/>
+                <a:ea typeface="Calibri"/>
+                <a:cs typeface="Calibri"/>
+                <a:sym typeface="Calibri"/>
+              </a:rPr>
+              <a:t>E</a:t>
+            </a:r>
+            <a:r>
+              <a:rPr lang="en-US" sz="1800" baseline="-25000" dirty="0" err="1">
                 <a:latin typeface="Calibri"/>
                 <a:ea typeface="Calibri"/>
                 <a:cs typeface="Calibri"/>
@@ -22853,7 +22133,7 @@
               <a:t>i</a:t>
             </a:r>
             <a:r>
-              <a:rPr lang="en-US" sz="1800">
+              <a:rPr lang="en-US" sz="1800" dirty="0">
                 <a:latin typeface="Calibri"/>
                 <a:ea typeface="Calibri"/>
                 <a:cs typeface="Calibri"/>
@@ -22862,7 +22142,7 @@
               <a:t> ] =  [ (50 - 30)</a:t>
             </a:r>
             <a:r>
-              <a:rPr lang="en-US" sz="1800" baseline="30000">
+              <a:rPr lang="en-US" sz="1800" baseline="30000" dirty="0">
                 <a:latin typeface="Calibri"/>
                 <a:ea typeface="Calibri"/>
                 <a:cs typeface="Calibri"/>
@@ -22871,7 +22151,7 @@
               <a:t>2</a:t>
             </a:r>
             <a:r>
-              <a:rPr lang="en-US" sz="1800">
+              <a:rPr lang="en-US" sz="1800" dirty="0">
                 <a:latin typeface="Calibri"/>
                 <a:ea typeface="Calibri"/>
                 <a:cs typeface="Calibri"/>
@@ -22880,7 +22160,7 @@
               <a:t> / 30 ] + [ (45 - 60)</a:t>
             </a:r>
             <a:r>
-              <a:rPr lang="en-US" sz="1800" baseline="30000">
+              <a:rPr lang="en-US" sz="1800" baseline="30000" dirty="0">
                 <a:latin typeface="Calibri"/>
                 <a:ea typeface="Calibri"/>
                 <a:cs typeface="Calibri"/>
@@ -22889,7 +22169,7 @@
               <a:t>2</a:t>
             </a:r>
             <a:r>
-              <a:rPr lang="en-US" sz="1800">
+              <a:rPr lang="en-US" sz="1800" dirty="0">
                 <a:latin typeface="Calibri"/>
                 <a:ea typeface="Calibri"/>
                 <a:cs typeface="Calibri"/>
@@ -22898,7 +22178,7 @@
               <a:t> / 60 ] + [ (5 - 10)</a:t>
             </a:r>
             <a:r>
-              <a:rPr lang="en-US" sz="1800" baseline="30000">
+              <a:rPr lang="en-US" sz="1800" baseline="30000" dirty="0">
                 <a:latin typeface="Calibri"/>
                 <a:ea typeface="Calibri"/>
                 <a:cs typeface="Calibri"/>
@@ -22907,7 +22187,7 @@
               <a:t>2</a:t>
             </a:r>
             <a:r>
-              <a:rPr lang="en-US" sz="1800">
+              <a:rPr lang="en-US" sz="1800" dirty="0">
                 <a:latin typeface="Calibri"/>
                 <a:ea typeface="Calibri"/>
                 <a:cs typeface="Calibri"/>
@@ -22915,7 +22195,7 @@
               </a:rPr>
               <a:t> / 10 ] = 19.58</a:t>
             </a:r>
-            <a:endParaRPr sz="1800">
+            <a:endParaRPr sz="1800" dirty="0">
               <a:latin typeface="Calibri"/>
               <a:ea typeface="Calibri"/>
               <a:cs typeface="Calibri"/>
@@ -22937,7 +22217,7 @@
               <a:buFont typeface="Arial"/>
               <a:buNone/>
             </a:pPr>
-            <a:endParaRPr sz="1800">
+            <a:endParaRPr sz="1800" dirty="0">
               <a:latin typeface="Calibri"/>
               <a:ea typeface="Calibri"/>
               <a:cs typeface="Calibri"/>
@@ -22960,7 +22240,7 @@
               <a:buNone/>
             </a:pPr>
             <a:r>
-              <a:rPr lang="en-US" sz="1800">
+              <a:rPr lang="en-US" sz="1800" dirty="0">
                 <a:latin typeface="Calibri"/>
                 <a:ea typeface="Calibri"/>
                 <a:cs typeface="Calibri"/>
@@ -22968,7 +22248,7 @@
               </a:rPr>
               <a:t>The P-value is the probability that a chi-square statistic having 2 degrees of freedom is more extreme than 19.58.</a:t>
             </a:r>
-            <a:endParaRPr sz="1800">
+            <a:endParaRPr sz="1800" dirty="0">
               <a:latin typeface="Calibri"/>
               <a:ea typeface="Calibri"/>
               <a:cs typeface="Calibri"/>
@@ -22986,7 +22266,7 @@
               <a:buNone/>
             </a:pPr>
             <a:r>
-              <a:rPr lang="en-US" sz="1800">
+              <a:rPr lang="en-US" sz="1800" dirty="0">
                 <a:latin typeface="Calibri"/>
                 <a:ea typeface="Calibri"/>
                 <a:cs typeface="Calibri"/>
@@ -22994,7 +22274,7 @@
               </a:rPr>
               <a:t>Using Chi-Square Distribution we find P(Χ2 &gt; 19.58) = 0.0001.</a:t>
             </a:r>
-            <a:endParaRPr sz="1800">
+            <a:endParaRPr sz="1800" dirty="0">
               <a:latin typeface="Calibri"/>
               <a:ea typeface="Calibri"/>
               <a:cs typeface="Calibri"/>
@@ -23016,7 +22296,7 @@
               <a:buFont typeface="Arial"/>
               <a:buNone/>
             </a:pPr>
-            <a:endParaRPr sz="1800">
+            <a:endParaRPr sz="1800" dirty="0">
               <a:latin typeface="Calibri"/>
               <a:ea typeface="Calibri"/>
               <a:cs typeface="Calibri"/>
@@ -23034,7 +22314,7 @@
               <a:buNone/>
             </a:pPr>
             <a:r>
-              <a:rPr lang="en-US" sz="1800">
+              <a:rPr lang="en-US" sz="1800" dirty="0">
                 <a:latin typeface="Calibri"/>
                 <a:ea typeface="Calibri"/>
                 <a:cs typeface="Calibri"/>
@@ -23042,7 +22322,7 @@
               </a:rPr>
               <a:t>Since the P-value (0.0001) is less than the significance level (0.05), we cannot accept the null hypothesis.</a:t>
             </a:r>
-            <a:endParaRPr sz="1800">
+            <a:endParaRPr sz="1800" dirty="0">
               <a:latin typeface="Calibri"/>
               <a:ea typeface="Calibri"/>
               <a:cs typeface="Calibri"/>
@@ -23064,7 +22344,7 @@
               <a:buFont typeface="Arial"/>
               <a:buNone/>
             </a:pPr>
-            <a:endParaRPr sz="1800">
+            <a:endParaRPr sz="1800" dirty="0">
               <a:latin typeface="Calibri"/>
               <a:ea typeface="Calibri"/>
               <a:cs typeface="Calibri"/>
@@ -23082,7 +22362,7 @@
               <a:buNone/>
             </a:pPr>
             <a:r>
-              <a:rPr lang="en-US" sz="1800">
+              <a:rPr lang="en-US" sz="1800" dirty="0">
                 <a:latin typeface="Calibri"/>
                 <a:ea typeface="Calibri"/>
                 <a:cs typeface="Calibri"/>
@@ -23090,7 +22370,7 @@
               </a:rPr>
               <a:t>Note: If you use this approach on an exam, you may also want to mention why this approach is appropriate. </a:t>
             </a:r>
-            <a:endParaRPr sz="1800">
+            <a:endParaRPr sz="1800" dirty="0">
               <a:latin typeface="Calibri"/>
               <a:ea typeface="Calibri"/>
               <a:cs typeface="Calibri"/>
@@ -23113,7 +22393,7 @@
               <a:buNone/>
             </a:pPr>
             <a:r>
-              <a:rPr lang="en-US" sz="1800">
+              <a:rPr lang="en-US" sz="1800" dirty="0">
                 <a:latin typeface="Calibri"/>
                 <a:ea typeface="Calibri"/>
                 <a:cs typeface="Calibri"/>
@@ -23121,7 +22401,7 @@
               </a:rPr>
               <a:t>Specifically, the approach is appropriate because the sampling method was simple random sampling, the variable under study was categorical, and each level of the categorical variable had an expected frequency count of at least 5.</a:t>
             </a:r>
-            <a:endParaRPr sz="1800">
+            <a:endParaRPr sz="1800" dirty="0">
               <a:latin typeface="Calibri"/>
               <a:ea typeface="Calibri"/>
               <a:cs typeface="Calibri"/>
@@ -23138,7 +22418,7 @@
               </a:spcAft>
               <a:buNone/>
             </a:pPr>
-            <a:endParaRPr sz="1800">
+            <a:endParaRPr sz="1800" dirty="0">
               <a:latin typeface="Calibri"/>
               <a:ea typeface="Calibri"/>
               <a:cs typeface="Calibri"/>
@@ -23148,6 +22428,2370 @@
         </p:txBody>
       </p:sp>
     </p:spTree>
+  </p:cSld>
+  <p:clrMapOvr>
+    <a:masterClrMapping/>
+  </p:clrMapOvr>
+</p:sld>
+</file>
+
+<file path=ppt/slides/slide17.xml><?xml version="1.0" encoding="utf-8"?>
+<p:sld xmlns:a="http://schemas.openxmlformats.org/drawingml/2006/main" xmlns:r="http://schemas.openxmlformats.org/officeDocument/2006/relationships" xmlns:p="http://schemas.openxmlformats.org/presentationml/2006/main">
+  <p:cSld>
+    <p:spTree>
+      <p:nvGrpSpPr>
+        <p:cNvPr id="1" name=""/>
+        <p:cNvGrpSpPr/>
+        <p:nvPr/>
+      </p:nvGrpSpPr>
+      <p:grpSpPr>
+        <a:xfrm>
+          <a:off x="0" y="0"/>
+          <a:ext cx="0" cy="0"/>
+          <a:chOff x="0" y="0"/>
+          <a:chExt cx="0" cy="0"/>
+        </a:xfrm>
+      </p:grpSpPr>
+      <p:sp>
+        <p:nvSpPr>
+          <p:cNvPr id="4" name="TextBox 3">
+            <a:extLst>
+              <a:ext uri="{FF2B5EF4-FFF2-40B4-BE49-F238E27FC236}">
+                <a16:creationId xmlns:a16="http://schemas.microsoft.com/office/drawing/2014/main" id="{579989AD-B381-BE48-B1F5-DEF24A56DF43}"/>
+              </a:ext>
+            </a:extLst>
+          </p:cNvPr>
+          <p:cNvSpPr txBox="1"/>
+          <p:nvPr/>
+        </p:nvSpPr>
+        <p:spPr>
+          <a:xfrm>
+            <a:off x="312820" y="180474"/>
+            <a:ext cx="4535905" cy="2554545"/>
+          </a:xfrm>
+          <a:prstGeom prst="rect">
+            <a:avLst/>
+          </a:prstGeom>
+          <a:noFill/>
+        </p:spPr>
+        <p:txBody>
+          <a:bodyPr wrap="square" rtlCol="0">
+            <a:spAutoFit/>
+          </a:bodyPr>
+          <a:lstStyle/>
+          <a:p>
+            <a:r>
+              <a:rPr lang="en-US" sz="2800" b="1" dirty="0"/>
+              <a:t>Student's </a:t>
+            </a:r>
+            <a:r>
+              <a:rPr lang="en-US" sz="2800" b="1" i="1" dirty="0"/>
+              <a:t>t</a:t>
+            </a:r>
+            <a:r>
+              <a:rPr lang="en-US" sz="2800" b="1" dirty="0"/>
+              <a:t>-distribution </a:t>
+            </a:r>
+          </a:p>
+          <a:p>
+            <a:endParaRPr lang="en-US" sz="1200" b="1" dirty="0"/>
+          </a:p>
+          <a:p>
+            <a:r>
+              <a:rPr lang="en-US" sz="1200" dirty="0">
+                <a:hlinkClick r:id="rId2"/>
+              </a:rPr>
+              <a:t>https://en.wikipedia.org/wiki/Student%27s_t-distribution</a:t>
+            </a:r>
+            <a:r>
+              <a:rPr lang="en-US" sz="1200" dirty="0"/>
+              <a:t>    </a:t>
+            </a:r>
+          </a:p>
+          <a:p>
+            <a:endParaRPr lang="en-US" sz="1200" dirty="0"/>
+          </a:p>
+          <a:p>
+            <a:r>
+              <a:rPr lang="en-US" sz="1200" dirty="0"/>
+              <a:t>Student's t-distribution (or simply the t-distribution) </a:t>
+            </a:r>
+          </a:p>
+          <a:p>
+            <a:r>
+              <a:rPr lang="en-US" sz="1200" dirty="0"/>
+              <a:t>is any member of a family of continuous probability distributions that arises when </a:t>
+            </a:r>
+            <a:r>
+              <a:rPr lang="en-US" sz="1200" b="1" dirty="0">
+                <a:solidFill>
+                  <a:srgbClr val="0070C0"/>
+                </a:solidFill>
+              </a:rPr>
+              <a:t>estimating the mean of a normally distributed population </a:t>
+            </a:r>
+          </a:p>
+          <a:p>
+            <a:r>
+              <a:rPr lang="en-US" sz="1200" dirty="0"/>
+              <a:t>in situations where the sample size is small </a:t>
+            </a:r>
+          </a:p>
+          <a:p>
+            <a:r>
+              <a:rPr lang="en-US" sz="1200" dirty="0"/>
+              <a:t>and the population standard deviation is unknown. </a:t>
+            </a:r>
+          </a:p>
+          <a:p>
+            <a:r>
+              <a:rPr lang="en-US" sz="1200" dirty="0"/>
+              <a:t>It was developed by William Sealy </a:t>
+            </a:r>
+            <a:r>
+              <a:rPr lang="en-US" sz="1200" dirty="0" err="1"/>
+              <a:t>Gosset</a:t>
+            </a:r>
+            <a:r>
+              <a:rPr lang="en-US" sz="1200" dirty="0"/>
+              <a:t> (1908)</a:t>
+            </a:r>
+          </a:p>
+          <a:p>
+            <a:r>
+              <a:rPr lang="en-US" sz="1200" dirty="0"/>
+              <a:t>under the pseudonym </a:t>
+            </a:r>
+            <a:r>
+              <a:rPr lang="en-US" sz="1200" b="1" dirty="0">
+                <a:solidFill>
+                  <a:srgbClr val="0070C0"/>
+                </a:solidFill>
+              </a:rPr>
+              <a:t>Student</a:t>
+            </a:r>
+            <a:r>
+              <a:rPr lang="en-US" sz="1200" dirty="0"/>
+              <a:t>.</a:t>
+            </a:r>
+          </a:p>
+        </p:txBody>
+      </p:sp>
+      <p:pic>
+        <p:nvPicPr>
+          <p:cNvPr id="5" name="Picture 4">
+            <a:extLst>
+              <a:ext uri="{FF2B5EF4-FFF2-40B4-BE49-F238E27FC236}">
+                <a16:creationId xmlns:a16="http://schemas.microsoft.com/office/drawing/2014/main" id="{68240771-AF9B-7A4E-AC57-79B1658958A8}"/>
+              </a:ext>
+            </a:extLst>
+          </p:cNvPr>
+          <p:cNvPicPr>
+            <a:picLocks noChangeAspect="1"/>
+          </p:cNvPicPr>
+          <p:nvPr/>
+        </p:nvPicPr>
+        <p:blipFill>
+          <a:blip r:embed="rId3" cstate="email">
+            <a:extLst>
+              <a:ext uri="{28A0092B-C50C-407E-A947-70E740481C1C}">
+                <a14:useLocalDpi xmlns:a14="http://schemas.microsoft.com/office/drawing/2010/main"/>
+              </a:ext>
+            </a:extLst>
+          </a:blip>
+          <a:stretch>
+            <a:fillRect/>
+          </a:stretch>
+        </p:blipFill>
+        <p:spPr>
+          <a:xfrm>
+            <a:off x="7653755" y="180474"/>
+            <a:ext cx="4127500" cy="3302000"/>
+          </a:xfrm>
+          <a:prstGeom prst="rect">
+            <a:avLst/>
+          </a:prstGeom>
+        </p:spPr>
+      </p:pic>
+      <p:pic>
+        <p:nvPicPr>
+          <p:cNvPr id="7" name="Picture 6">
+            <a:extLst>
+              <a:ext uri="{FF2B5EF4-FFF2-40B4-BE49-F238E27FC236}">
+                <a16:creationId xmlns:a16="http://schemas.microsoft.com/office/drawing/2014/main" id="{B921A455-CB47-6341-8361-A435C147E04A}"/>
+              </a:ext>
+            </a:extLst>
+          </p:cNvPr>
+          <p:cNvPicPr>
+            <a:picLocks noChangeAspect="1"/>
+          </p:cNvPicPr>
+          <p:nvPr/>
+        </p:nvPicPr>
+        <p:blipFill>
+          <a:blip r:embed="rId4" cstate="email">
+            <a:extLst>
+              <a:ext uri="{28A0092B-C50C-407E-A947-70E740481C1C}">
+                <a14:useLocalDpi xmlns:a14="http://schemas.microsoft.com/office/drawing/2010/main"/>
+              </a:ext>
+            </a:extLst>
+          </a:blip>
+          <a:stretch>
+            <a:fillRect/>
+          </a:stretch>
+        </p:blipFill>
+        <p:spPr>
+          <a:xfrm>
+            <a:off x="7805821" y="3879516"/>
+            <a:ext cx="4064000" cy="1244600"/>
+          </a:xfrm>
+          <a:prstGeom prst="rect">
+            <a:avLst/>
+          </a:prstGeom>
+        </p:spPr>
+      </p:pic>
+      <p:pic>
+        <p:nvPicPr>
+          <p:cNvPr id="8" name="Picture 7">
+            <a:extLst>
+              <a:ext uri="{FF2B5EF4-FFF2-40B4-BE49-F238E27FC236}">
+                <a16:creationId xmlns:a16="http://schemas.microsoft.com/office/drawing/2014/main" id="{E93B6F64-8303-CB4E-BE24-FB13FBF443D0}"/>
+              </a:ext>
+            </a:extLst>
+          </p:cNvPr>
+          <p:cNvPicPr>
+            <a:picLocks noChangeAspect="1"/>
+          </p:cNvPicPr>
+          <p:nvPr/>
+        </p:nvPicPr>
+        <p:blipFill rotWithShape="1">
+          <a:blip r:embed="rId5" cstate="email">
+            <a:extLst>
+              <a:ext uri="{28A0092B-C50C-407E-A947-70E740481C1C}">
+                <a14:useLocalDpi xmlns:a14="http://schemas.microsoft.com/office/drawing/2010/main"/>
+              </a:ext>
+            </a:extLst>
+          </a:blip>
+          <a:srcRect/>
+          <a:stretch/>
+        </p:blipFill>
+        <p:spPr>
+          <a:xfrm>
+            <a:off x="5474368" y="180474"/>
+            <a:ext cx="1744578" cy="2587083"/>
+          </a:xfrm>
+          <a:prstGeom prst="rect">
+            <a:avLst/>
+          </a:prstGeom>
+        </p:spPr>
+      </p:pic>
+      <p:sp>
+        <p:nvSpPr>
+          <p:cNvPr id="9" name="TextBox 8">
+            <a:extLst>
+              <a:ext uri="{FF2B5EF4-FFF2-40B4-BE49-F238E27FC236}">
+                <a16:creationId xmlns:a16="http://schemas.microsoft.com/office/drawing/2014/main" id="{2BAA1AF7-2EFA-4940-AA88-B4782CE05245}"/>
+              </a:ext>
+            </a:extLst>
+          </p:cNvPr>
+          <p:cNvSpPr txBox="1"/>
+          <p:nvPr/>
+        </p:nvSpPr>
+        <p:spPr>
+          <a:xfrm>
+            <a:off x="5342021" y="2767557"/>
+            <a:ext cx="2033337" cy="523220"/>
+          </a:xfrm>
+          <a:prstGeom prst="rect">
+            <a:avLst/>
+          </a:prstGeom>
+          <a:noFill/>
+        </p:spPr>
+        <p:txBody>
+          <a:bodyPr wrap="square" rtlCol="0">
+            <a:spAutoFit/>
+          </a:bodyPr>
+          <a:lstStyle/>
+          <a:p>
+            <a:r>
+              <a:rPr lang="en-US" dirty="0"/>
+              <a:t>William Sealy </a:t>
+            </a:r>
+            <a:r>
+              <a:rPr lang="en-US" dirty="0" err="1"/>
+              <a:t>Gosset</a:t>
+            </a:r>
+            <a:r>
+              <a:rPr lang="en-US" dirty="0"/>
+              <a:t> (pseudonym "Student")</a:t>
+            </a:r>
+          </a:p>
+        </p:txBody>
+      </p:sp>
+      <p:pic>
+        <p:nvPicPr>
+          <p:cNvPr id="10" name="Picture 9">
+            <a:extLst>
+              <a:ext uri="{FF2B5EF4-FFF2-40B4-BE49-F238E27FC236}">
+                <a16:creationId xmlns:a16="http://schemas.microsoft.com/office/drawing/2014/main" id="{8A960005-DB86-C24B-9D90-977F32065D11}"/>
+              </a:ext>
+            </a:extLst>
+          </p:cNvPr>
+          <p:cNvPicPr>
+            <a:picLocks noChangeAspect="1"/>
+          </p:cNvPicPr>
+          <p:nvPr/>
+        </p:nvPicPr>
+        <p:blipFill>
+          <a:blip r:embed="rId6" cstate="email">
+            <a:extLst>
+              <a:ext uri="{28A0092B-C50C-407E-A947-70E740481C1C}">
+                <a14:useLocalDpi xmlns:a14="http://schemas.microsoft.com/office/drawing/2010/main"/>
+              </a:ext>
+            </a:extLst>
+          </a:blip>
+          <a:stretch>
+            <a:fillRect/>
+          </a:stretch>
+        </p:blipFill>
+        <p:spPr>
+          <a:xfrm>
+            <a:off x="396875" y="3596516"/>
+            <a:ext cx="1331161" cy="612140"/>
+          </a:xfrm>
+          <a:prstGeom prst="rect">
+            <a:avLst/>
+          </a:prstGeom>
+        </p:spPr>
+      </p:pic>
+      <p:pic>
+        <p:nvPicPr>
+          <p:cNvPr id="11" name="Picture 10">
+            <a:extLst>
+              <a:ext uri="{FF2B5EF4-FFF2-40B4-BE49-F238E27FC236}">
+                <a16:creationId xmlns:a16="http://schemas.microsoft.com/office/drawing/2014/main" id="{D72A8B16-E053-C44F-856E-288817E75747}"/>
+              </a:ext>
+            </a:extLst>
+          </p:cNvPr>
+          <p:cNvPicPr>
+            <a:picLocks noChangeAspect="1"/>
+          </p:cNvPicPr>
+          <p:nvPr/>
+        </p:nvPicPr>
+        <p:blipFill>
+          <a:blip r:embed="rId7" cstate="email">
+            <a:extLst>
+              <a:ext uri="{28A0092B-C50C-407E-A947-70E740481C1C}">
+                <a14:useLocalDpi xmlns:a14="http://schemas.microsoft.com/office/drawing/2010/main"/>
+              </a:ext>
+            </a:extLst>
+          </a:blip>
+          <a:stretch>
+            <a:fillRect/>
+          </a:stretch>
+        </p:blipFill>
+        <p:spPr>
+          <a:xfrm>
+            <a:off x="396875" y="4248957"/>
+            <a:ext cx="2377908" cy="613968"/>
+          </a:xfrm>
+          <a:prstGeom prst="rect">
+            <a:avLst/>
+          </a:prstGeom>
+        </p:spPr>
+      </p:pic>
+      <p:pic>
+        <p:nvPicPr>
+          <p:cNvPr id="12" name="Picture 11">
+            <a:extLst>
+              <a:ext uri="{FF2B5EF4-FFF2-40B4-BE49-F238E27FC236}">
+                <a16:creationId xmlns:a16="http://schemas.microsoft.com/office/drawing/2014/main" id="{4E967733-FA99-CD47-8F9D-1E8B70BFC5E5}"/>
+              </a:ext>
+            </a:extLst>
+          </p:cNvPr>
+          <p:cNvPicPr>
+            <a:picLocks noChangeAspect="1"/>
+          </p:cNvPicPr>
+          <p:nvPr/>
+        </p:nvPicPr>
+        <p:blipFill>
+          <a:blip r:embed="rId8" cstate="email">
+            <a:extLst>
+              <a:ext uri="{28A0092B-C50C-407E-A947-70E740481C1C}">
+                <a14:useLocalDpi xmlns:a14="http://schemas.microsoft.com/office/drawing/2010/main"/>
+              </a:ext>
+            </a:extLst>
+          </a:blip>
+          <a:stretch>
+            <a:fillRect/>
+          </a:stretch>
+        </p:blipFill>
+        <p:spPr>
+          <a:xfrm>
+            <a:off x="312820" y="5102941"/>
+            <a:ext cx="702080" cy="616692"/>
+          </a:xfrm>
+          <a:prstGeom prst="rect">
+            <a:avLst/>
+          </a:prstGeom>
+        </p:spPr>
+      </p:pic>
+      <p:pic>
+        <p:nvPicPr>
+          <p:cNvPr id="13" name="Picture 12">
+            <a:extLst>
+              <a:ext uri="{FF2B5EF4-FFF2-40B4-BE49-F238E27FC236}">
+                <a16:creationId xmlns:a16="http://schemas.microsoft.com/office/drawing/2014/main" id="{6440922B-2E80-EF43-A53B-34AEA43D3846}"/>
+              </a:ext>
+            </a:extLst>
+          </p:cNvPr>
+          <p:cNvPicPr>
+            <a:picLocks noChangeAspect="1"/>
+          </p:cNvPicPr>
+          <p:nvPr/>
+        </p:nvPicPr>
+        <p:blipFill>
+          <a:blip r:embed="rId9" cstate="email">
+            <a:extLst>
+              <a:ext uri="{28A0092B-C50C-407E-A947-70E740481C1C}">
+                <a14:useLocalDpi xmlns:a14="http://schemas.microsoft.com/office/drawing/2010/main"/>
+              </a:ext>
+            </a:extLst>
+          </a:blip>
+          <a:stretch>
+            <a:fillRect/>
+          </a:stretch>
+        </p:blipFill>
+        <p:spPr>
+          <a:xfrm>
+            <a:off x="312820" y="5959649"/>
+            <a:ext cx="582886" cy="565991"/>
+          </a:xfrm>
+          <a:prstGeom prst="rect">
+            <a:avLst/>
+          </a:prstGeom>
+        </p:spPr>
+      </p:pic>
+      <p:sp>
+        <p:nvSpPr>
+          <p:cNvPr id="14" name="TextBox 13">
+            <a:extLst>
+              <a:ext uri="{FF2B5EF4-FFF2-40B4-BE49-F238E27FC236}">
+                <a16:creationId xmlns:a16="http://schemas.microsoft.com/office/drawing/2014/main" id="{C0D5B479-BD94-1741-AA72-3918F30A6760}"/>
+              </a:ext>
+            </a:extLst>
+          </p:cNvPr>
+          <p:cNvSpPr txBox="1"/>
+          <p:nvPr/>
+        </p:nvSpPr>
+        <p:spPr>
+          <a:xfrm>
+            <a:off x="312820" y="2857852"/>
+            <a:ext cx="3756694" cy="738664"/>
+          </a:xfrm>
+          <a:prstGeom prst="rect">
+            <a:avLst/>
+          </a:prstGeom>
+          <a:noFill/>
+        </p:spPr>
+        <p:txBody>
+          <a:bodyPr wrap="square" rtlCol="0">
+            <a:spAutoFit/>
+          </a:bodyPr>
+          <a:lstStyle/>
+          <a:p>
+            <a:r>
+              <a:rPr lang="en-US" dirty="0"/>
+              <a:t>Let Xi be independently and identically drawn from the normal distribution with expected mean value</a:t>
+            </a:r>
+            <a:r>
+              <a:rPr lang="el-GR" dirty="0"/>
+              <a:t> μ</a:t>
+            </a:r>
+            <a:r>
+              <a:rPr lang="en-US" dirty="0"/>
+              <a:t> and variance </a:t>
+            </a:r>
+            <a:r>
+              <a:rPr lang="el-GR" dirty="0"/>
+              <a:t>σ</a:t>
+            </a:r>
+            <a:r>
+              <a:rPr lang="en-US" baseline="30000" dirty="0"/>
+              <a:t>2  </a:t>
+            </a:r>
+            <a:endParaRPr lang="en-US" dirty="0"/>
+          </a:p>
+        </p:txBody>
+      </p:sp>
+      <p:sp>
+        <p:nvSpPr>
+          <p:cNvPr id="16" name="AutoShape 2" descr="{\textstyle X_{1},\ldots ,X_{n}}">
+            <a:extLst>
+              <a:ext uri="{FF2B5EF4-FFF2-40B4-BE49-F238E27FC236}">
+                <a16:creationId xmlns:a16="http://schemas.microsoft.com/office/drawing/2014/main" id="{07D7F508-2895-A94E-9E0B-E77CD726ECDF}"/>
+              </a:ext>
+            </a:extLst>
+          </p:cNvPr>
+          <p:cNvSpPr>
+            <a:spLocks noChangeAspect="1" noChangeArrowheads="1"/>
+          </p:cNvSpPr>
+          <p:nvPr/>
+        </p:nvSpPr>
+        <p:spPr bwMode="auto">
+          <a:xfrm>
+            <a:off x="244475" y="7937"/>
+            <a:ext cx="304800" cy="304801"/>
+          </a:xfrm>
+          <a:prstGeom prst="rect">
+            <a:avLst/>
+          </a:prstGeom>
+          <a:noFill/>
+          <a:extLst>
+            <a:ext uri="{909E8E84-426E-40DD-AFC4-6F175D3DCCD1}">
+              <a14:hiddenFill xmlns:a14="http://schemas.microsoft.com/office/drawing/2010/main">
+                <a:solidFill>
+                  <a:srgbClr val="FFFFFF"/>
+                </a:solidFill>
+              </a14:hiddenFill>
+            </a:ext>
+          </a:extLst>
+        </p:spPr>
+        <p:txBody>
+          <a:bodyPr vert="horz" wrap="square" lIns="91440" tIns="45720" rIns="91440" bIns="45720" numCol="1" anchor="t" anchorCtr="0" compatLnSpc="1">
+            <a:prstTxWarp prst="textNoShape">
+              <a:avLst/>
+            </a:prstTxWarp>
+          </a:bodyPr>
+          <a:lstStyle/>
+          <a:p>
+            <a:endParaRPr lang="en-US"/>
+          </a:p>
+        </p:txBody>
+      </p:sp>
+      <p:sp>
+        <p:nvSpPr>
+          <p:cNvPr id="17" name="AutoShape 3" descr="N(\mu ,\sigma ^{2})">
+            <a:extLst>
+              <a:ext uri="{FF2B5EF4-FFF2-40B4-BE49-F238E27FC236}">
+                <a16:creationId xmlns:a16="http://schemas.microsoft.com/office/drawing/2014/main" id="{EE5C68D6-4509-A54A-A822-1CFBC52801DA}"/>
+              </a:ext>
+            </a:extLst>
+          </p:cNvPr>
+          <p:cNvSpPr>
+            <a:spLocks noChangeAspect="1" noChangeArrowheads="1"/>
+          </p:cNvSpPr>
+          <p:nvPr/>
+        </p:nvSpPr>
+        <p:spPr bwMode="auto">
+          <a:xfrm>
+            <a:off x="244475" y="7937"/>
+            <a:ext cx="304800" cy="304801"/>
+          </a:xfrm>
+          <a:prstGeom prst="rect">
+            <a:avLst/>
+          </a:prstGeom>
+          <a:noFill/>
+          <a:extLst>
+            <a:ext uri="{909E8E84-426E-40DD-AFC4-6F175D3DCCD1}">
+              <a14:hiddenFill xmlns:a14="http://schemas.microsoft.com/office/drawing/2010/main">
+                <a:solidFill>
+                  <a:srgbClr val="FFFFFF"/>
+                </a:solidFill>
+              </a14:hiddenFill>
+            </a:ext>
+          </a:extLst>
+        </p:spPr>
+        <p:txBody>
+          <a:bodyPr vert="horz" wrap="square" lIns="91440" tIns="45720" rIns="91440" bIns="45720" numCol="1" anchor="t" anchorCtr="0" compatLnSpc="1">
+            <a:prstTxWarp prst="textNoShape">
+              <a:avLst/>
+            </a:prstTxWarp>
+          </a:bodyPr>
+          <a:lstStyle/>
+          <a:p>
+            <a:endParaRPr lang="en-US"/>
+          </a:p>
+        </p:txBody>
+      </p:sp>
+      <p:sp>
+        <p:nvSpPr>
+          <p:cNvPr id="18" name="AutoShape 4" descr="n">
+            <a:extLst>
+              <a:ext uri="{FF2B5EF4-FFF2-40B4-BE49-F238E27FC236}">
+                <a16:creationId xmlns:a16="http://schemas.microsoft.com/office/drawing/2014/main" id="{D0A4039C-E933-6445-A80D-09E2AEB93AC6}"/>
+              </a:ext>
+            </a:extLst>
+          </p:cNvPr>
+          <p:cNvSpPr>
+            <a:spLocks noChangeAspect="1" noChangeArrowheads="1"/>
+          </p:cNvSpPr>
+          <p:nvPr/>
+        </p:nvSpPr>
+        <p:spPr bwMode="auto">
+          <a:xfrm>
+            <a:off x="244475" y="7937"/>
+            <a:ext cx="304800" cy="304801"/>
+          </a:xfrm>
+          <a:prstGeom prst="rect">
+            <a:avLst/>
+          </a:prstGeom>
+          <a:noFill/>
+          <a:extLst>
+            <a:ext uri="{909E8E84-426E-40DD-AFC4-6F175D3DCCD1}">
+              <a14:hiddenFill xmlns:a14="http://schemas.microsoft.com/office/drawing/2010/main">
+                <a:solidFill>
+                  <a:srgbClr val="FFFFFF"/>
+                </a:solidFill>
+              </a14:hiddenFill>
+            </a:ext>
+          </a:extLst>
+        </p:spPr>
+        <p:txBody>
+          <a:bodyPr vert="horz" wrap="square" lIns="91440" tIns="45720" rIns="91440" bIns="45720" numCol="1" anchor="t" anchorCtr="0" compatLnSpc="1">
+            <a:prstTxWarp prst="textNoShape">
+              <a:avLst/>
+            </a:prstTxWarp>
+          </a:bodyPr>
+          <a:lstStyle/>
+          <a:p>
+            <a:endParaRPr lang="en-US"/>
+          </a:p>
+        </p:txBody>
+      </p:sp>
+      <p:sp>
+        <p:nvSpPr>
+          <p:cNvPr id="19" name="AutoShape 5" descr="\mu ">
+            <a:extLst>
+              <a:ext uri="{FF2B5EF4-FFF2-40B4-BE49-F238E27FC236}">
+                <a16:creationId xmlns:a16="http://schemas.microsoft.com/office/drawing/2014/main" id="{501FB6EB-157D-BD4B-8779-3E4C3FBC047F}"/>
+              </a:ext>
+            </a:extLst>
+          </p:cNvPr>
+          <p:cNvSpPr>
+            <a:spLocks noChangeAspect="1" noChangeArrowheads="1"/>
+          </p:cNvSpPr>
+          <p:nvPr/>
+        </p:nvSpPr>
+        <p:spPr bwMode="auto">
+          <a:xfrm>
+            <a:off x="244475" y="7937"/>
+            <a:ext cx="304800" cy="304801"/>
+          </a:xfrm>
+          <a:prstGeom prst="rect">
+            <a:avLst/>
+          </a:prstGeom>
+          <a:noFill/>
+          <a:extLst>
+            <a:ext uri="{909E8E84-426E-40DD-AFC4-6F175D3DCCD1}">
+              <a14:hiddenFill xmlns:a14="http://schemas.microsoft.com/office/drawing/2010/main">
+                <a:solidFill>
+                  <a:srgbClr val="FFFFFF"/>
+                </a:solidFill>
+              </a14:hiddenFill>
+            </a:ext>
+          </a:extLst>
+        </p:spPr>
+        <p:txBody>
+          <a:bodyPr vert="horz" wrap="square" lIns="91440" tIns="45720" rIns="91440" bIns="45720" numCol="1" anchor="t" anchorCtr="0" compatLnSpc="1">
+            <a:prstTxWarp prst="textNoShape">
+              <a:avLst/>
+            </a:prstTxWarp>
+          </a:bodyPr>
+          <a:lstStyle/>
+          <a:p>
+            <a:endParaRPr lang="en-US"/>
+          </a:p>
+        </p:txBody>
+      </p:sp>
+      <p:sp>
+        <p:nvSpPr>
+          <p:cNvPr id="20" name="AutoShape 6" descr="\sigma ^{2}">
+            <a:extLst>
+              <a:ext uri="{FF2B5EF4-FFF2-40B4-BE49-F238E27FC236}">
+                <a16:creationId xmlns:a16="http://schemas.microsoft.com/office/drawing/2014/main" id="{5301A393-B93D-AC48-9A19-60E0D81E0733}"/>
+              </a:ext>
+            </a:extLst>
+          </p:cNvPr>
+          <p:cNvSpPr>
+            <a:spLocks noChangeAspect="1" noChangeArrowheads="1"/>
+          </p:cNvSpPr>
+          <p:nvPr/>
+        </p:nvSpPr>
+        <p:spPr bwMode="auto">
+          <a:xfrm>
+            <a:off x="244475" y="7937"/>
+            <a:ext cx="304800" cy="304801"/>
+          </a:xfrm>
+          <a:prstGeom prst="rect">
+            <a:avLst/>
+          </a:prstGeom>
+          <a:noFill/>
+          <a:extLst>
+            <a:ext uri="{909E8E84-426E-40DD-AFC4-6F175D3DCCD1}">
+              <a14:hiddenFill xmlns:a14="http://schemas.microsoft.com/office/drawing/2010/main">
+                <a:solidFill>
+                  <a:srgbClr val="FFFFFF"/>
+                </a:solidFill>
+              </a14:hiddenFill>
+            </a:ext>
+          </a:extLst>
+        </p:spPr>
+        <p:txBody>
+          <a:bodyPr vert="horz" wrap="square" lIns="91440" tIns="45720" rIns="91440" bIns="45720" numCol="1" anchor="t" anchorCtr="0" compatLnSpc="1">
+            <a:prstTxWarp prst="textNoShape">
+              <a:avLst/>
+            </a:prstTxWarp>
+          </a:bodyPr>
+          <a:lstStyle/>
+          <a:p>
+            <a:endParaRPr lang="en-US"/>
+          </a:p>
+        </p:txBody>
+      </p:sp>
+      <p:sp>
+        <p:nvSpPr>
+          <p:cNvPr id="22" name="AutoShape 8" descr="{\textstyle X_{1},\ldots ,X_{n}}">
+            <a:extLst>
+              <a:ext uri="{FF2B5EF4-FFF2-40B4-BE49-F238E27FC236}">
+                <a16:creationId xmlns:a16="http://schemas.microsoft.com/office/drawing/2014/main" id="{248AC373-9C4F-EB4C-A2E6-D66AD78D10B4}"/>
+              </a:ext>
+            </a:extLst>
+          </p:cNvPr>
+          <p:cNvSpPr>
+            <a:spLocks noChangeAspect="1" noChangeArrowheads="1"/>
+          </p:cNvSpPr>
+          <p:nvPr/>
+        </p:nvSpPr>
+        <p:spPr bwMode="auto">
+          <a:xfrm>
+            <a:off x="244475" y="7937"/>
+            <a:ext cx="304800" cy="304801"/>
+          </a:xfrm>
+          <a:prstGeom prst="rect">
+            <a:avLst/>
+          </a:prstGeom>
+          <a:noFill/>
+          <a:extLst>
+            <a:ext uri="{909E8E84-426E-40DD-AFC4-6F175D3DCCD1}">
+              <a14:hiddenFill xmlns:a14="http://schemas.microsoft.com/office/drawing/2010/main">
+                <a:solidFill>
+                  <a:srgbClr val="FFFFFF"/>
+                </a:solidFill>
+              </a14:hiddenFill>
+            </a:ext>
+          </a:extLst>
+        </p:spPr>
+        <p:txBody>
+          <a:bodyPr vert="horz" wrap="square" lIns="91440" tIns="45720" rIns="91440" bIns="45720" numCol="1" anchor="t" anchorCtr="0" compatLnSpc="1">
+            <a:prstTxWarp prst="textNoShape">
+              <a:avLst/>
+            </a:prstTxWarp>
+          </a:bodyPr>
+          <a:lstStyle/>
+          <a:p>
+            <a:endParaRPr lang="en-US"/>
+          </a:p>
+        </p:txBody>
+      </p:sp>
+      <p:sp>
+        <p:nvSpPr>
+          <p:cNvPr id="23" name="AutoShape 9" descr="N(\mu ,\sigma ^{2})">
+            <a:extLst>
+              <a:ext uri="{FF2B5EF4-FFF2-40B4-BE49-F238E27FC236}">
+                <a16:creationId xmlns:a16="http://schemas.microsoft.com/office/drawing/2014/main" id="{008618B9-6A7E-134E-A649-35D5383829ED}"/>
+              </a:ext>
+            </a:extLst>
+          </p:cNvPr>
+          <p:cNvSpPr>
+            <a:spLocks noChangeAspect="1" noChangeArrowheads="1"/>
+          </p:cNvSpPr>
+          <p:nvPr/>
+        </p:nvSpPr>
+        <p:spPr bwMode="auto">
+          <a:xfrm>
+            <a:off x="244475" y="7937"/>
+            <a:ext cx="304800" cy="304801"/>
+          </a:xfrm>
+          <a:prstGeom prst="rect">
+            <a:avLst/>
+          </a:prstGeom>
+          <a:noFill/>
+          <a:extLst>
+            <a:ext uri="{909E8E84-426E-40DD-AFC4-6F175D3DCCD1}">
+              <a14:hiddenFill xmlns:a14="http://schemas.microsoft.com/office/drawing/2010/main">
+                <a:solidFill>
+                  <a:srgbClr val="FFFFFF"/>
+                </a:solidFill>
+              </a14:hiddenFill>
+            </a:ext>
+          </a:extLst>
+        </p:spPr>
+        <p:txBody>
+          <a:bodyPr vert="horz" wrap="square" lIns="91440" tIns="45720" rIns="91440" bIns="45720" numCol="1" anchor="t" anchorCtr="0" compatLnSpc="1">
+            <a:prstTxWarp prst="textNoShape">
+              <a:avLst/>
+            </a:prstTxWarp>
+          </a:bodyPr>
+          <a:lstStyle/>
+          <a:p>
+            <a:endParaRPr lang="en-US"/>
+          </a:p>
+        </p:txBody>
+      </p:sp>
+      <p:sp>
+        <p:nvSpPr>
+          <p:cNvPr id="24" name="AutoShape 10" descr="n">
+            <a:extLst>
+              <a:ext uri="{FF2B5EF4-FFF2-40B4-BE49-F238E27FC236}">
+                <a16:creationId xmlns:a16="http://schemas.microsoft.com/office/drawing/2014/main" id="{CA603317-BFE0-7749-AB48-553CFC6CD063}"/>
+              </a:ext>
+            </a:extLst>
+          </p:cNvPr>
+          <p:cNvSpPr>
+            <a:spLocks noChangeAspect="1" noChangeArrowheads="1"/>
+          </p:cNvSpPr>
+          <p:nvPr/>
+        </p:nvSpPr>
+        <p:spPr bwMode="auto">
+          <a:xfrm>
+            <a:off x="244475" y="7937"/>
+            <a:ext cx="304800" cy="304801"/>
+          </a:xfrm>
+          <a:prstGeom prst="rect">
+            <a:avLst/>
+          </a:prstGeom>
+          <a:noFill/>
+          <a:extLst>
+            <a:ext uri="{909E8E84-426E-40DD-AFC4-6F175D3DCCD1}">
+              <a14:hiddenFill xmlns:a14="http://schemas.microsoft.com/office/drawing/2010/main">
+                <a:solidFill>
+                  <a:srgbClr val="FFFFFF"/>
+                </a:solidFill>
+              </a14:hiddenFill>
+            </a:ext>
+          </a:extLst>
+        </p:spPr>
+        <p:txBody>
+          <a:bodyPr vert="horz" wrap="square" lIns="91440" tIns="45720" rIns="91440" bIns="45720" numCol="1" anchor="t" anchorCtr="0" compatLnSpc="1">
+            <a:prstTxWarp prst="textNoShape">
+              <a:avLst/>
+            </a:prstTxWarp>
+          </a:bodyPr>
+          <a:lstStyle/>
+          <a:p>
+            <a:endParaRPr lang="en-US"/>
+          </a:p>
+        </p:txBody>
+      </p:sp>
+      <p:sp>
+        <p:nvSpPr>
+          <p:cNvPr id="25" name="AutoShape 11" descr="\mu ">
+            <a:extLst>
+              <a:ext uri="{FF2B5EF4-FFF2-40B4-BE49-F238E27FC236}">
+                <a16:creationId xmlns:a16="http://schemas.microsoft.com/office/drawing/2014/main" id="{C0FD514A-0A73-7843-A5FA-74ABF61E7511}"/>
+              </a:ext>
+            </a:extLst>
+          </p:cNvPr>
+          <p:cNvSpPr>
+            <a:spLocks noChangeAspect="1" noChangeArrowheads="1"/>
+          </p:cNvSpPr>
+          <p:nvPr/>
+        </p:nvSpPr>
+        <p:spPr bwMode="auto">
+          <a:xfrm>
+            <a:off x="244475" y="7937"/>
+            <a:ext cx="304800" cy="304801"/>
+          </a:xfrm>
+          <a:prstGeom prst="rect">
+            <a:avLst/>
+          </a:prstGeom>
+          <a:noFill/>
+          <a:extLst>
+            <a:ext uri="{909E8E84-426E-40DD-AFC4-6F175D3DCCD1}">
+              <a14:hiddenFill xmlns:a14="http://schemas.microsoft.com/office/drawing/2010/main">
+                <a:solidFill>
+                  <a:srgbClr val="FFFFFF"/>
+                </a:solidFill>
+              </a14:hiddenFill>
+            </a:ext>
+          </a:extLst>
+        </p:spPr>
+        <p:txBody>
+          <a:bodyPr vert="horz" wrap="square" lIns="91440" tIns="45720" rIns="91440" bIns="45720" numCol="1" anchor="t" anchorCtr="0" compatLnSpc="1">
+            <a:prstTxWarp prst="textNoShape">
+              <a:avLst/>
+            </a:prstTxWarp>
+          </a:bodyPr>
+          <a:lstStyle/>
+          <a:p>
+            <a:endParaRPr lang="en-US"/>
+          </a:p>
+        </p:txBody>
+      </p:sp>
+      <p:sp>
+        <p:nvSpPr>
+          <p:cNvPr id="26" name="AutoShape 12" descr="\sigma ^{2}">
+            <a:extLst>
+              <a:ext uri="{FF2B5EF4-FFF2-40B4-BE49-F238E27FC236}">
+                <a16:creationId xmlns:a16="http://schemas.microsoft.com/office/drawing/2014/main" id="{C6943DA6-E5CB-9741-AD9D-5E1AB734160C}"/>
+              </a:ext>
+            </a:extLst>
+          </p:cNvPr>
+          <p:cNvSpPr>
+            <a:spLocks noChangeAspect="1" noChangeArrowheads="1"/>
+          </p:cNvSpPr>
+          <p:nvPr/>
+        </p:nvSpPr>
+        <p:spPr bwMode="auto">
+          <a:xfrm>
+            <a:off x="244475" y="7937"/>
+            <a:ext cx="304800" cy="304801"/>
+          </a:xfrm>
+          <a:prstGeom prst="rect">
+            <a:avLst/>
+          </a:prstGeom>
+          <a:noFill/>
+          <a:extLst>
+            <a:ext uri="{909E8E84-426E-40DD-AFC4-6F175D3DCCD1}">
+              <a14:hiddenFill xmlns:a14="http://schemas.microsoft.com/office/drawing/2010/main">
+                <a:solidFill>
+                  <a:srgbClr val="FFFFFF"/>
+                </a:solidFill>
+              </a14:hiddenFill>
+            </a:ext>
+          </a:extLst>
+        </p:spPr>
+        <p:txBody>
+          <a:bodyPr vert="horz" wrap="square" lIns="91440" tIns="45720" rIns="91440" bIns="45720" numCol="1" anchor="t" anchorCtr="0" compatLnSpc="1">
+            <a:prstTxWarp prst="textNoShape">
+              <a:avLst/>
+            </a:prstTxWarp>
+          </a:bodyPr>
+          <a:lstStyle/>
+          <a:p>
+            <a:endParaRPr lang="en-US"/>
+          </a:p>
+        </p:txBody>
+      </p:sp>
+      <p:sp>
+        <p:nvSpPr>
+          <p:cNvPr id="28" name="AutoShape 14" descr="{\textstyle X_{1},\ldots ,X_{n}}">
+            <a:extLst>
+              <a:ext uri="{FF2B5EF4-FFF2-40B4-BE49-F238E27FC236}">
+                <a16:creationId xmlns:a16="http://schemas.microsoft.com/office/drawing/2014/main" id="{5807CA11-FEC0-7E4B-BBCA-04CFE8DA35A6}"/>
+              </a:ext>
+            </a:extLst>
+          </p:cNvPr>
+          <p:cNvSpPr>
+            <a:spLocks noChangeAspect="1" noChangeArrowheads="1"/>
+          </p:cNvSpPr>
+          <p:nvPr/>
+        </p:nvSpPr>
+        <p:spPr bwMode="auto">
+          <a:xfrm>
+            <a:off x="244475" y="7937"/>
+            <a:ext cx="304800" cy="304801"/>
+          </a:xfrm>
+          <a:prstGeom prst="rect">
+            <a:avLst/>
+          </a:prstGeom>
+          <a:noFill/>
+          <a:extLst>
+            <a:ext uri="{909E8E84-426E-40DD-AFC4-6F175D3DCCD1}">
+              <a14:hiddenFill xmlns:a14="http://schemas.microsoft.com/office/drawing/2010/main">
+                <a:solidFill>
+                  <a:srgbClr val="FFFFFF"/>
+                </a:solidFill>
+              </a14:hiddenFill>
+            </a:ext>
+          </a:extLst>
+        </p:spPr>
+        <p:txBody>
+          <a:bodyPr vert="horz" wrap="square" lIns="91440" tIns="45720" rIns="91440" bIns="45720" numCol="1" anchor="t" anchorCtr="0" compatLnSpc="1">
+            <a:prstTxWarp prst="textNoShape">
+              <a:avLst/>
+            </a:prstTxWarp>
+          </a:bodyPr>
+          <a:lstStyle/>
+          <a:p>
+            <a:endParaRPr lang="en-US"/>
+          </a:p>
+        </p:txBody>
+      </p:sp>
+      <p:sp>
+        <p:nvSpPr>
+          <p:cNvPr id="29" name="AutoShape 15" descr="N(\mu ,\sigma ^{2})">
+            <a:extLst>
+              <a:ext uri="{FF2B5EF4-FFF2-40B4-BE49-F238E27FC236}">
+                <a16:creationId xmlns:a16="http://schemas.microsoft.com/office/drawing/2014/main" id="{6334E346-9AFF-7844-8727-71065320839D}"/>
+              </a:ext>
+            </a:extLst>
+          </p:cNvPr>
+          <p:cNvSpPr>
+            <a:spLocks noChangeAspect="1" noChangeArrowheads="1"/>
+          </p:cNvSpPr>
+          <p:nvPr/>
+        </p:nvSpPr>
+        <p:spPr bwMode="auto">
+          <a:xfrm>
+            <a:off x="244475" y="7937"/>
+            <a:ext cx="304800" cy="304801"/>
+          </a:xfrm>
+          <a:prstGeom prst="rect">
+            <a:avLst/>
+          </a:prstGeom>
+          <a:noFill/>
+          <a:extLst>
+            <a:ext uri="{909E8E84-426E-40DD-AFC4-6F175D3DCCD1}">
+              <a14:hiddenFill xmlns:a14="http://schemas.microsoft.com/office/drawing/2010/main">
+                <a:solidFill>
+                  <a:srgbClr val="FFFFFF"/>
+                </a:solidFill>
+              </a14:hiddenFill>
+            </a:ext>
+          </a:extLst>
+        </p:spPr>
+        <p:txBody>
+          <a:bodyPr vert="horz" wrap="square" lIns="91440" tIns="45720" rIns="91440" bIns="45720" numCol="1" anchor="t" anchorCtr="0" compatLnSpc="1">
+            <a:prstTxWarp prst="textNoShape">
+              <a:avLst/>
+            </a:prstTxWarp>
+          </a:bodyPr>
+          <a:lstStyle/>
+          <a:p>
+            <a:endParaRPr lang="en-US"/>
+          </a:p>
+        </p:txBody>
+      </p:sp>
+      <p:sp>
+        <p:nvSpPr>
+          <p:cNvPr id="30" name="AutoShape 16" descr="n">
+            <a:extLst>
+              <a:ext uri="{FF2B5EF4-FFF2-40B4-BE49-F238E27FC236}">
+                <a16:creationId xmlns:a16="http://schemas.microsoft.com/office/drawing/2014/main" id="{54E917FD-0239-3344-AA9F-056B86E7A6A8}"/>
+              </a:ext>
+            </a:extLst>
+          </p:cNvPr>
+          <p:cNvSpPr>
+            <a:spLocks noChangeAspect="1" noChangeArrowheads="1"/>
+          </p:cNvSpPr>
+          <p:nvPr/>
+        </p:nvSpPr>
+        <p:spPr bwMode="auto">
+          <a:xfrm>
+            <a:off x="244475" y="7937"/>
+            <a:ext cx="304800" cy="304801"/>
+          </a:xfrm>
+          <a:prstGeom prst="rect">
+            <a:avLst/>
+          </a:prstGeom>
+          <a:noFill/>
+          <a:extLst>
+            <a:ext uri="{909E8E84-426E-40DD-AFC4-6F175D3DCCD1}">
+              <a14:hiddenFill xmlns:a14="http://schemas.microsoft.com/office/drawing/2010/main">
+                <a:solidFill>
+                  <a:srgbClr val="FFFFFF"/>
+                </a:solidFill>
+              </a14:hiddenFill>
+            </a:ext>
+          </a:extLst>
+        </p:spPr>
+        <p:txBody>
+          <a:bodyPr vert="horz" wrap="square" lIns="91440" tIns="45720" rIns="91440" bIns="45720" numCol="1" anchor="t" anchorCtr="0" compatLnSpc="1">
+            <a:prstTxWarp prst="textNoShape">
+              <a:avLst/>
+            </a:prstTxWarp>
+          </a:bodyPr>
+          <a:lstStyle/>
+          <a:p>
+            <a:endParaRPr lang="en-US"/>
+          </a:p>
+        </p:txBody>
+      </p:sp>
+      <p:sp>
+        <p:nvSpPr>
+          <p:cNvPr id="31" name="AutoShape 17" descr="\mu ">
+            <a:extLst>
+              <a:ext uri="{FF2B5EF4-FFF2-40B4-BE49-F238E27FC236}">
+                <a16:creationId xmlns:a16="http://schemas.microsoft.com/office/drawing/2014/main" id="{12033F84-97C7-9749-9B73-C3190C5DCA19}"/>
+              </a:ext>
+            </a:extLst>
+          </p:cNvPr>
+          <p:cNvSpPr>
+            <a:spLocks noChangeAspect="1" noChangeArrowheads="1"/>
+          </p:cNvSpPr>
+          <p:nvPr/>
+        </p:nvSpPr>
+        <p:spPr bwMode="auto">
+          <a:xfrm>
+            <a:off x="244475" y="7937"/>
+            <a:ext cx="304800" cy="304801"/>
+          </a:xfrm>
+          <a:prstGeom prst="rect">
+            <a:avLst/>
+          </a:prstGeom>
+          <a:noFill/>
+          <a:extLst>
+            <a:ext uri="{909E8E84-426E-40DD-AFC4-6F175D3DCCD1}">
+              <a14:hiddenFill xmlns:a14="http://schemas.microsoft.com/office/drawing/2010/main">
+                <a:solidFill>
+                  <a:srgbClr val="FFFFFF"/>
+                </a:solidFill>
+              </a14:hiddenFill>
+            </a:ext>
+          </a:extLst>
+        </p:spPr>
+        <p:txBody>
+          <a:bodyPr vert="horz" wrap="square" lIns="91440" tIns="45720" rIns="91440" bIns="45720" numCol="1" anchor="t" anchorCtr="0" compatLnSpc="1">
+            <a:prstTxWarp prst="textNoShape">
+              <a:avLst/>
+            </a:prstTxWarp>
+          </a:bodyPr>
+          <a:lstStyle/>
+          <a:p>
+            <a:endParaRPr lang="en-US"/>
+          </a:p>
+        </p:txBody>
+      </p:sp>
+      <p:sp>
+        <p:nvSpPr>
+          <p:cNvPr id="32" name="AutoShape 18" descr="\sigma ^{2}">
+            <a:extLst>
+              <a:ext uri="{FF2B5EF4-FFF2-40B4-BE49-F238E27FC236}">
+                <a16:creationId xmlns:a16="http://schemas.microsoft.com/office/drawing/2014/main" id="{6665A26D-3C4B-794C-B3F4-AACAC7ADB6FA}"/>
+              </a:ext>
+            </a:extLst>
+          </p:cNvPr>
+          <p:cNvSpPr>
+            <a:spLocks noChangeAspect="1" noChangeArrowheads="1"/>
+          </p:cNvSpPr>
+          <p:nvPr/>
+        </p:nvSpPr>
+        <p:spPr bwMode="auto">
+          <a:xfrm>
+            <a:off x="244475" y="7937"/>
+            <a:ext cx="304800" cy="304801"/>
+          </a:xfrm>
+          <a:prstGeom prst="rect">
+            <a:avLst/>
+          </a:prstGeom>
+          <a:noFill/>
+          <a:extLst>
+            <a:ext uri="{909E8E84-426E-40DD-AFC4-6F175D3DCCD1}">
+              <a14:hiddenFill xmlns:a14="http://schemas.microsoft.com/office/drawing/2010/main">
+                <a:solidFill>
+                  <a:srgbClr val="FFFFFF"/>
+                </a:solidFill>
+              </a14:hiddenFill>
+            </a:ext>
+          </a:extLst>
+        </p:spPr>
+        <p:txBody>
+          <a:bodyPr vert="horz" wrap="square" lIns="91440" tIns="45720" rIns="91440" bIns="45720" numCol="1" anchor="t" anchorCtr="0" compatLnSpc="1">
+            <a:prstTxWarp prst="textNoShape">
+              <a:avLst/>
+            </a:prstTxWarp>
+          </a:bodyPr>
+          <a:lstStyle/>
+          <a:p>
+            <a:endParaRPr lang="en-US"/>
+          </a:p>
+        </p:txBody>
+      </p:sp>
+      <p:sp>
+        <p:nvSpPr>
+          <p:cNvPr id="33" name="TextBox 32">
+            <a:extLst>
+              <a:ext uri="{FF2B5EF4-FFF2-40B4-BE49-F238E27FC236}">
+                <a16:creationId xmlns:a16="http://schemas.microsoft.com/office/drawing/2014/main" id="{D88C225F-74A8-284B-B086-528622A25343}"/>
+              </a:ext>
+            </a:extLst>
+          </p:cNvPr>
+          <p:cNvSpPr txBox="1"/>
+          <p:nvPr/>
+        </p:nvSpPr>
+        <p:spPr>
+          <a:xfrm>
+            <a:off x="2855075" y="3739303"/>
+            <a:ext cx="1911853" cy="307777"/>
+          </a:xfrm>
+          <a:prstGeom prst="rect">
+            <a:avLst/>
+          </a:prstGeom>
+          <a:noFill/>
+        </p:spPr>
+        <p:txBody>
+          <a:bodyPr wrap="square" rtlCol="0">
+            <a:spAutoFit/>
+          </a:bodyPr>
+          <a:lstStyle/>
+          <a:p>
+            <a:r>
+              <a:rPr lang="en-US" dirty="0"/>
+              <a:t>----- Sample mean</a:t>
+            </a:r>
+          </a:p>
+        </p:txBody>
+      </p:sp>
+      <p:sp>
+        <p:nvSpPr>
+          <p:cNvPr id="34" name="TextBox 33">
+            <a:extLst>
+              <a:ext uri="{FF2B5EF4-FFF2-40B4-BE49-F238E27FC236}">
+                <a16:creationId xmlns:a16="http://schemas.microsoft.com/office/drawing/2014/main" id="{F58099A2-8589-4949-9C6D-F4D510DDFF0D}"/>
+              </a:ext>
+            </a:extLst>
+          </p:cNvPr>
+          <p:cNvSpPr txBox="1"/>
+          <p:nvPr/>
+        </p:nvSpPr>
+        <p:spPr>
+          <a:xfrm>
+            <a:off x="2855075" y="4344461"/>
+            <a:ext cx="2417179" cy="307777"/>
+          </a:xfrm>
+          <a:prstGeom prst="rect">
+            <a:avLst/>
+          </a:prstGeom>
+          <a:noFill/>
+        </p:spPr>
+        <p:txBody>
+          <a:bodyPr wrap="square" rtlCol="0">
+            <a:spAutoFit/>
+          </a:bodyPr>
+          <a:lstStyle/>
+          <a:p>
+            <a:r>
+              <a:rPr lang="en-US" dirty="0"/>
+              <a:t>----- Sample variance</a:t>
+            </a:r>
+          </a:p>
+        </p:txBody>
+      </p:sp>
+      <p:sp>
+        <p:nvSpPr>
+          <p:cNvPr id="35" name="TextBox 34">
+            <a:extLst>
+              <a:ext uri="{FF2B5EF4-FFF2-40B4-BE49-F238E27FC236}">
+                <a16:creationId xmlns:a16="http://schemas.microsoft.com/office/drawing/2014/main" id="{24B9A98C-F3BB-7448-9ECD-80269D7A263C}"/>
+              </a:ext>
+            </a:extLst>
+          </p:cNvPr>
+          <p:cNvSpPr txBox="1"/>
+          <p:nvPr/>
+        </p:nvSpPr>
+        <p:spPr>
+          <a:xfrm>
+            <a:off x="1318961" y="5252489"/>
+            <a:ext cx="3613986" cy="307777"/>
+          </a:xfrm>
+          <a:prstGeom prst="rect">
+            <a:avLst/>
+          </a:prstGeom>
+          <a:noFill/>
+        </p:spPr>
+        <p:txBody>
+          <a:bodyPr wrap="square" rtlCol="0">
+            <a:spAutoFit/>
+          </a:bodyPr>
+          <a:lstStyle/>
+          <a:p>
+            <a:r>
+              <a:rPr lang="en-US" dirty="0"/>
+              <a:t>----- Random variable, Normal distribution</a:t>
+            </a:r>
+          </a:p>
+        </p:txBody>
+      </p:sp>
+      <p:sp>
+        <p:nvSpPr>
+          <p:cNvPr id="36" name="TextBox 35">
+            <a:extLst>
+              <a:ext uri="{FF2B5EF4-FFF2-40B4-BE49-F238E27FC236}">
+                <a16:creationId xmlns:a16="http://schemas.microsoft.com/office/drawing/2014/main" id="{CAA20264-68BC-504C-9790-33B4CAD84579}"/>
+              </a:ext>
+            </a:extLst>
+          </p:cNvPr>
+          <p:cNvSpPr txBox="1"/>
+          <p:nvPr/>
+        </p:nvSpPr>
+        <p:spPr>
+          <a:xfrm>
+            <a:off x="1318961" y="6068334"/>
+            <a:ext cx="3613986" cy="307777"/>
+          </a:xfrm>
+          <a:prstGeom prst="rect">
+            <a:avLst/>
+          </a:prstGeom>
+          <a:noFill/>
+        </p:spPr>
+        <p:txBody>
+          <a:bodyPr wrap="square" rtlCol="0">
+            <a:spAutoFit/>
+          </a:bodyPr>
+          <a:lstStyle/>
+          <a:p>
+            <a:r>
+              <a:rPr lang="en-US" dirty="0"/>
+              <a:t>----- Random variable, t-distribution</a:t>
+            </a:r>
+          </a:p>
+        </p:txBody>
+      </p:sp>
+    </p:spTree>
+    <p:extLst>
+      <p:ext uri="{BB962C8B-B14F-4D97-AF65-F5344CB8AC3E}">
+        <p14:creationId xmlns:p14="http://schemas.microsoft.com/office/powerpoint/2010/main" val="3120259764"/>
+      </p:ext>
+    </p:extLst>
+  </p:cSld>
+  <p:clrMapOvr>
+    <a:masterClrMapping/>
+  </p:clrMapOvr>
+</p:sld>
+</file>
+
+<file path=ppt/slides/slide18.xml><?xml version="1.0" encoding="utf-8"?>
+<p:sld xmlns:a="http://schemas.openxmlformats.org/drawingml/2006/main" xmlns:r="http://schemas.openxmlformats.org/officeDocument/2006/relationships" xmlns:p="http://schemas.openxmlformats.org/presentationml/2006/main">
+  <p:cSld>
+    <p:spTree>
+      <p:nvGrpSpPr>
+        <p:cNvPr id="1" name=""/>
+        <p:cNvGrpSpPr/>
+        <p:nvPr/>
+      </p:nvGrpSpPr>
+      <p:grpSpPr>
+        <a:xfrm>
+          <a:off x="0" y="0"/>
+          <a:ext cx="0" cy="0"/>
+          <a:chOff x="0" y="0"/>
+          <a:chExt cx="0" cy="0"/>
+        </a:xfrm>
+      </p:grpSpPr>
+      <p:sp>
+        <p:nvSpPr>
+          <p:cNvPr id="4" name="TextBox 3">
+            <a:extLst>
+              <a:ext uri="{FF2B5EF4-FFF2-40B4-BE49-F238E27FC236}">
+                <a16:creationId xmlns:a16="http://schemas.microsoft.com/office/drawing/2014/main" id="{1EB5F268-965F-C142-A102-83C02389B555}"/>
+              </a:ext>
+            </a:extLst>
+          </p:cNvPr>
+          <p:cNvSpPr txBox="1"/>
+          <p:nvPr/>
+        </p:nvSpPr>
+        <p:spPr>
+          <a:xfrm>
+            <a:off x="32770" y="22260"/>
+            <a:ext cx="5906814" cy="6986528"/>
+          </a:xfrm>
+          <a:prstGeom prst="rect">
+            <a:avLst/>
+          </a:prstGeom>
+          <a:noFill/>
+        </p:spPr>
+        <p:txBody>
+          <a:bodyPr wrap="square" rtlCol="0">
+            <a:spAutoFit/>
+          </a:bodyPr>
+          <a:lstStyle/>
+          <a:p>
+            <a:r>
+              <a:rPr lang="en-US" dirty="0"/>
+              <a:t>More Statistics:</a:t>
+            </a:r>
+          </a:p>
+          <a:p>
+            <a:endParaRPr lang="en-US" dirty="0"/>
+          </a:p>
+          <a:p>
+            <a:r>
+              <a:rPr lang="en-US" dirty="0"/>
+              <a:t>Confidence Interval </a:t>
+            </a:r>
+          </a:p>
+          <a:p>
+            <a:r>
+              <a:rPr lang="en-US" dirty="0"/>
+              <a:t>  – ( https://</a:t>
+            </a:r>
+            <a:r>
+              <a:rPr lang="en-US" dirty="0" err="1"/>
+              <a:t>en.wikipedia.org</a:t>
+            </a:r>
+            <a:r>
+              <a:rPr lang="en-US" dirty="0"/>
+              <a:t>/wiki/</a:t>
+            </a:r>
+            <a:r>
+              <a:rPr lang="en-US" dirty="0" err="1"/>
+              <a:t>Confidence_interval</a:t>
+            </a:r>
+            <a:r>
+              <a:rPr lang="en-US" dirty="0"/>
+              <a:t> ) –</a:t>
+            </a:r>
+          </a:p>
+          <a:p>
+            <a:endParaRPr lang="en-US" dirty="0"/>
+          </a:p>
+          <a:p>
+            <a:r>
+              <a:rPr lang="en-US" dirty="0"/>
+              <a:t>Cluster Analysis </a:t>
+            </a:r>
+          </a:p>
+          <a:p>
+            <a:r>
+              <a:rPr lang="en-US" dirty="0"/>
+              <a:t>  – finding groups (clusters) in data.</a:t>
+            </a:r>
+          </a:p>
+          <a:p>
+            <a:r>
+              <a:rPr lang="en-US" dirty="0"/>
+              <a:t>  – ( https://</a:t>
+            </a:r>
+            <a:r>
+              <a:rPr lang="en-US" dirty="0" err="1"/>
+              <a:t>en.wikipedia.org</a:t>
+            </a:r>
+            <a:r>
+              <a:rPr lang="en-US" dirty="0"/>
+              <a:t>/wiki/</a:t>
+            </a:r>
+            <a:r>
+              <a:rPr lang="en-US" dirty="0" err="1"/>
+              <a:t>Cluster_analysis</a:t>
+            </a:r>
+            <a:r>
+              <a:rPr lang="en-US" dirty="0"/>
+              <a:t> ) </a:t>
+            </a:r>
+          </a:p>
+          <a:p>
+            <a:endParaRPr lang="en-US" dirty="0"/>
+          </a:p>
+          <a:p>
+            <a:r>
+              <a:rPr lang="en-US" dirty="0"/>
+              <a:t>Student’s t-distribution </a:t>
+            </a:r>
+          </a:p>
+          <a:p>
+            <a:r>
+              <a:rPr lang="en-US" dirty="0"/>
+              <a:t>  – estimating the mean of a normally distributed population </a:t>
+            </a:r>
+          </a:p>
+          <a:p>
+            <a:r>
+              <a:rPr lang="en-US" dirty="0"/>
+              <a:t>    in situations where the sample size is small and </a:t>
+            </a:r>
+          </a:p>
+          <a:p>
+            <a:r>
+              <a:rPr lang="en-US" dirty="0"/>
+              <a:t>    population standard deviation is unknown.</a:t>
+            </a:r>
+          </a:p>
+          <a:p>
+            <a:r>
+              <a:rPr lang="en-US" dirty="0"/>
+              <a:t>  – ( https://</a:t>
+            </a:r>
+            <a:r>
+              <a:rPr lang="en-US" dirty="0" err="1"/>
+              <a:t>en.wikipedia.org</a:t>
+            </a:r>
+            <a:r>
+              <a:rPr lang="en-US" dirty="0"/>
+              <a:t>/wiki/Student%27s_t-distribution ) </a:t>
+            </a:r>
+          </a:p>
+          <a:p>
+            <a:endParaRPr lang="en-US" dirty="0"/>
+          </a:p>
+          <a:p>
+            <a:r>
+              <a:rPr lang="en-US" dirty="0"/>
+              <a:t>Chi-squared distribution </a:t>
+            </a:r>
+          </a:p>
+          <a:p>
+            <a:r>
+              <a:rPr lang="en-US" dirty="0"/>
+              <a:t>  – distribution of a sum of the squares of k independent </a:t>
+            </a:r>
+          </a:p>
+          <a:p>
+            <a:r>
+              <a:rPr lang="en-US" dirty="0"/>
+              <a:t>    standard normal random variables.</a:t>
+            </a:r>
+          </a:p>
+          <a:p>
+            <a:r>
+              <a:rPr lang="en-US" dirty="0"/>
+              <a:t>  – ( https://</a:t>
+            </a:r>
+            <a:r>
+              <a:rPr lang="en-US" dirty="0" err="1"/>
+              <a:t>en.wikipedia.org</a:t>
+            </a:r>
+            <a:r>
+              <a:rPr lang="en-US" dirty="0"/>
+              <a:t>/wiki/Chi-</a:t>
+            </a:r>
+            <a:r>
+              <a:rPr lang="en-US" dirty="0" err="1"/>
+              <a:t>squared_distribution</a:t>
+            </a:r>
+            <a:r>
+              <a:rPr lang="en-US" dirty="0"/>
+              <a:t> ) </a:t>
+            </a:r>
+          </a:p>
+          <a:p>
+            <a:endParaRPr lang="en-US" dirty="0"/>
+          </a:p>
+          <a:p>
+            <a:r>
+              <a:rPr lang="en-US" dirty="0"/>
+              <a:t>F-distribution </a:t>
+            </a:r>
+          </a:p>
+          <a:p>
+            <a:r>
+              <a:rPr lang="en-US" dirty="0"/>
+              <a:t>  – right-skewed distribution used most commonly in Analysis of </a:t>
+            </a:r>
+          </a:p>
+          <a:p>
+            <a:endParaRPr lang="en-US" dirty="0"/>
+          </a:p>
+          <a:p>
+            <a:r>
+              <a:rPr lang="en-US" dirty="0"/>
+              <a:t>Variance.</a:t>
+            </a:r>
+          </a:p>
+          <a:p>
+            <a:r>
+              <a:rPr lang="en-US" dirty="0"/>
+              <a:t>  – ( https://</a:t>
+            </a:r>
+            <a:r>
+              <a:rPr lang="en-US" dirty="0" err="1"/>
+              <a:t>en.wikipedia.org</a:t>
+            </a:r>
+            <a:r>
+              <a:rPr lang="en-US" dirty="0"/>
+              <a:t>/wiki/F-distribution ) </a:t>
+            </a:r>
+          </a:p>
+          <a:p>
+            <a:endParaRPr lang="en-US" dirty="0"/>
+          </a:p>
+          <a:p>
+            <a:r>
+              <a:rPr lang="en-US" dirty="0"/>
+              <a:t>Gamma distribution </a:t>
+            </a:r>
+          </a:p>
+          <a:p>
+            <a:r>
+              <a:rPr lang="en-US" dirty="0"/>
+              <a:t>  – ( https://</a:t>
+            </a:r>
+            <a:r>
+              <a:rPr lang="en-US" dirty="0" err="1"/>
+              <a:t>en.wikipedia.org</a:t>
+            </a:r>
+            <a:r>
+              <a:rPr lang="en-US" dirty="0"/>
+              <a:t>/wiki/</a:t>
+            </a:r>
+            <a:r>
+              <a:rPr lang="en-US" dirty="0" err="1"/>
+              <a:t>Gamma_distribution</a:t>
+            </a:r>
+            <a:r>
+              <a:rPr lang="en-US" dirty="0"/>
+              <a:t> ) </a:t>
+            </a:r>
+          </a:p>
+          <a:p>
+            <a:r>
+              <a:rPr lang="en-US" dirty="0"/>
+              <a:t>  – a two-parameter family of continuous probability distributions. </a:t>
+            </a:r>
+          </a:p>
+          <a:p>
+            <a:r>
+              <a:rPr lang="en-US" dirty="0"/>
+              <a:t>    The common exponential distribution and chi-squared </a:t>
+            </a:r>
+          </a:p>
+          <a:p>
+            <a:r>
+              <a:rPr lang="en-US" dirty="0"/>
+              <a:t>    distribution are special cases of the gamma distribution.</a:t>
+            </a:r>
+          </a:p>
+        </p:txBody>
+      </p:sp>
+      <p:sp>
+        <p:nvSpPr>
+          <p:cNvPr id="5" name="TextBox 4">
+            <a:extLst>
+              <a:ext uri="{FF2B5EF4-FFF2-40B4-BE49-F238E27FC236}">
+                <a16:creationId xmlns:a16="http://schemas.microsoft.com/office/drawing/2014/main" id="{E72EEA3B-9D50-A145-B8FE-B6686486D979}"/>
+              </a:ext>
+            </a:extLst>
+          </p:cNvPr>
+          <p:cNvSpPr txBox="1"/>
+          <p:nvPr/>
+        </p:nvSpPr>
+        <p:spPr>
+          <a:xfrm>
+            <a:off x="6096000" y="178676"/>
+            <a:ext cx="6011917" cy="6001643"/>
+          </a:xfrm>
+          <a:prstGeom prst="rect">
+            <a:avLst/>
+          </a:prstGeom>
+          <a:noFill/>
+        </p:spPr>
+        <p:txBody>
+          <a:bodyPr wrap="square" rtlCol="0">
+            <a:spAutoFit/>
+          </a:bodyPr>
+          <a:lstStyle/>
+          <a:p>
+            <a:r>
+              <a:rPr lang="en-US" sz="1200" dirty="0"/>
+              <a:t>Stochastic Processes, Time Series Analysis</a:t>
+            </a:r>
+          </a:p>
+          <a:p>
+            <a:r>
+              <a:rPr lang="en-US" sz="1200" dirty="0"/>
+              <a:t>- https://</a:t>
+            </a:r>
+            <a:r>
+              <a:rPr lang="en-US" sz="1200" dirty="0" err="1"/>
+              <a:t>en.wikipedia.org</a:t>
+            </a:r>
+            <a:r>
+              <a:rPr lang="en-US" sz="1200" dirty="0"/>
+              <a:t>/wiki/</a:t>
+            </a:r>
+            <a:r>
+              <a:rPr lang="en-US" sz="1200" dirty="0" err="1"/>
+              <a:t>Stochastic_process</a:t>
+            </a:r>
+            <a:r>
+              <a:rPr lang="en-US" sz="1200" dirty="0"/>
+              <a:t> –</a:t>
+            </a:r>
+          </a:p>
+          <a:p>
+            <a:r>
+              <a:rPr lang="en-US" sz="1200" dirty="0"/>
+              <a:t>- https://</a:t>
+            </a:r>
+            <a:r>
+              <a:rPr lang="en-US" sz="1200" dirty="0" err="1"/>
+              <a:t>en.wikipedia.org</a:t>
+            </a:r>
+            <a:r>
+              <a:rPr lang="en-US" sz="1200" dirty="0"/>
+              <a:t>/wiki/</a:t>
+            </a:r>
+            <a:r>
+              <a:rPr lang="en-US" sz="1200" dirty="0" err="1"/>
+              <a:t>Time_series</a:t>
+            </a:r>
+            <a:r>
+              <a:rPr lang="en-US" sz="1200" dirty="0"/>
+              <a:t> –</a:t>
+            </a:r>
+          </a:p>
+          <a:p>
+            <a:r>
+              <a:rPr lang="en-US" sz="1200" dirty="0"/>
+              <a:t>- https://</a:t>
+            </a:r>
+            <a:r>
+              <a:rPr lang="en-US" sz="1200" dirty="0" err="1"/>
+              <a:t>en.wikipedia.org</a:t>
+            </a:r>
+            <a:r>
+              <a:rPr lang="en-US" sz="1200" dirty="0"/>
+              <a:t>/wiki/</a:t>
+            </a:r>
+            <a:r>
+              <a:rPr lang="en-US" sz="1200" dirty="0" err="1"/>
+              <a:t>Random_walk</a:t>
+            </a:r>
+            <a:r>
+              <a:rPr lang="en-US" sz="1200" dirty="0"/>
+              <a:t> –</a:t>
+            </a:r>
+          </a:p>
+          <a:p>
+            <a:r>
+              <a:rPr lang="en-US" sz="1200" dirty="0"/>
+              <a:t>- https://</a:t>
+            </a:r>
+            <a:r>
+              <a:rPr lang="en-US" sz="1200" dirty="0" err="1"/>
+              <a:t>en.wikipedia.org</a:t>
+            </a:r>
+            <a:r>
+              <a:rPr lang="en-US" sz="1200" dirty="0"/>
+              <a:t>/wiki/</a:t>
+            </a:r>
+            <a:r>
+              <a:rPr lang="en-US" sz="1200" dirty="0" err="1"/>
+              <a:t>Brownian_motion</a:t>
+            </a:r>
+            <a:r>
+              <a:rPr lang="en-US" sz="1200" dirty="0"/>
+              <a:t> –</a:t>
+            </a:r>
+          </a:p>
+          <a:p>
+            <a:r>
+              <a:rPr lang="en-US" sz="1200" dirty="0"/>
+              <a:t>- https://</a:t>
+            </a:r>
+            <a:r>
+              <a:rPr lang="en-US" sz="1200" dirty="0" err="1"/>
+              <a:t>en.wikipedia.org</a:t>
+            </a:r>
+            <a:r>
+              <a:rPr lang="en-US" sz="1200" dirty="0"/>
+              <a:t>/wiki/Diffusion , </a:t>
+            </a:r>
+          </a:p>
+          <a:p>
+            <a:r>
+              <a:rPr lang="en-US" sz="1200" dirty="0"/>
+              <a:t>- https://</a:t>
+            </a:r>
+            <a:r>
+              <a:rPr lang="en-US" sz="1200" dirty="0" err="1"/>
+              <a:t>en.wikipedia.org</a:t>
+            </a:r>
+            <a:r>
+              <a:rPr lang="en-US" sz="1200" dirty="0"/>
+              <a:t>/wiki/</a:t>
+            </a:r>
+            <a:r>
+              <a:rPr lang="en-US" sz="1200" dirty="0" err="1"/>
+              <a:t>Diffusion_process</a:t>
+            </a:r>
+            <a:r>
+              <a:rPr lang="en-US" sz="1200" dirty="0"/>
+              <a:t> –</a:t>
+            </a:r>
+          </a:p>
+          <a:p>
+            <a:r>
+              <a:rPr lang="en-US" sz="1200" dirty="0"/>
+              <a:t>- https://</a:t>
+            </a:r>
+            <a:r>
+              <a:rPr lang="en-US" sz="1200" dirty="0" err="1"/>
+              <a:t>en.wikipedia.org</a:t>
+            </a:r>
+            <a:r>
+              <a:rPr lang="en-US" sz="1200" dirty="0"/>
+              <a:t>/wiki/</a:t>
+            </a:r>
+            <a:r>
+              <a:rPr lang="en-US" sz="1200" dirty="0" err="1"/>
+              <a:t>Stationary_process</a:t>
+            </a:r>
+            <a:r>
+              <a:rPr lang="en-US" sz="1200" dirty="0"/>
+              <a:t> –</a:t>
+            </a:r>
+          </a:p>
+          <a:p>
+            <a:r>
+              <a:rPr lang="en-US" sz="1200" dirty="0"/>
+              <a:t>- https://</a:t>
+            </a:r>
+            <a:r>
+              <a:rPr lang="en-US" sz="1200" dirty="0" err="1"/>
+              <a:t>en.wikipedia.org</a:t>
+            </a:r>
+            <a:r>
+              <a:rPr lang="en-US" sz="1200" dirty="0"/>
+              <a:t>/wiki/</a:t>
+            </a:r>
+            <a:r>
+              <a:rPr lang="en-US" sz="1200" dirty="0" err="1"/>
+              <a:t>Stable_process</a:t>
+            </a:r>
+            <a:r>
+              <a:rPr lang="en-US" sz="1200" dirty="0"/>
+              <a:t> –</a:t>
+            </a:r>
+          </a:p>
+          <a:p>
+            <a:endParaRPr lang="en-US" sz="1200" dirty="0"/>
+          </a:p>
+          <a:p>
+            <a:r>
+              <a:rPr lang="en-US" sz="1200" dirty="0"/>
+              <a:t>Poisson Process</a:t>
+            </a:r>
+          </a:p>
+          <a:p>
+            <a:r>
+              <a:rPr lang="en-US" sz="1200" dirty="0"/>
+              <a:t>– https://</a:t>
+            </a:r>
+            <a:r>
+              <a:rPr lang="en-US" sz="1200" dirty="0" err="1"/>
+              <a:t>en.wikipedia.org</a:t>
+            </a:r>
+            <a:r>
+              <a:rPr lang="en-US" sz="1200" dirty="0"/>
+              <a:t>/wiki/</a:t>
+            </a:r>
+            <a:r>
+              <a:rPr lang="en-US" sz="1200" dirty="0" err="1"/>
+              <a:t>Poisson_point_process</a:t>
+            </a:r>
+            <a:r>
+              <a:rPr lang="en-US" sz="1200" dirty="0"/>
+              <a:t> –</a:t>
+            </a:r>
+          </a:p>
+          <a:p>
+            <a:r>
+              <a:rPr lang="en-US" sz="1200" dirty="0"/>
+              <a:t>– https://</a:t>
+            </a:r>
+            <a:r>
+              <a:rPr lang="en-US" sz="1200" dirty="0" err="1"/>
+              <a:t>en.wikipedia.org</a:t>
+            </a:r>
+            <a:r>
+              <a:rPr lang="en-US" sz="1200" dirty="0"/>
+              <a:t>/wiki/</a:t>
+            </a:r>
+            <a:r>
+              <a:rPr lang="en-US" sz="1200" dirty="0" err="1"/>
+              <a:t>Dirac_delta_function</a:t>
+            </a:r>
+            <a:r>
+              <a:rPr lang="en-US" sz="1200" dirty="0"/>
+              <a:t> –</a:t>
+            </a:r>
+          </a:p>
+          <a:p>
+            <a:r>
+              <a:rPr lang="en-US" sz="1200" dirty="0"/>
+              <a:t>– https://</a:t>
+            </a:r>
+            <a:r>
+              <a:rPr lang="en-US" sz="1200" dirty="0" err="1"/>
+              <a:t>en.wikipedia.org</a:t>
+            </a:r>
+            <a:r>
+              <a:rPr lang="en-US" sz="1200" dirty="0"/>
+              <a:t>/wiki/</a:t>
+            </a:r>
+            <a:r>
+              <a:rPr lang="en-US" sz="1200" dirty="0" err="1"/>
+              <a:t>Compound_Poisson_process</a:t>
+            </a:r>
+            <a:r>
+              <a:rPr lang="en-US" sz="1200" dirty="0"/>
+              <a:t> –</a:t>
+            </a:r>
+          </a:p>
+          <a:p>
+            <a:endParaRPr lang="en-US" sz="1200" dirty="0"/>
+          </a:p>
+          <a:p>
+            <a:r>
+              <a:rPr lang="en-US" sz="1200" dirty="0"/>
+              <a:t>White Noise, Gaussian Noise, Brownian Noise</a:t>
+            </a:r>
+          </a:p>
+          <a:p>
+            <a:r>
+              <a:rPr lang="en-US" sz="1200" dirty="0"/>
+              <a:t>– https://</a:t>
+            </a:r>
+            <a:r>
+              <a:rPr lang="en-US" sz="1200" dirty="0" err="1"/>
+              <a:t>en.wikipedia.org</a:t>
+            </a:r>
+            <a:r>
+              <a:rPr lang="en-US" sz="1200" dirty="0"/>
+              <a:t>/wiki/</a:t>
+            </a:r>
+            <a:r>
+              <a:rPr lang="en-US" sz="1200" dirty="0" err="1"/>
+              <a:t>White_noise</a:t>
+            </a:r>
+            <a:r>
+              <a:rPr lang="en-US" sz="1200" dirty="0"/>
+              <a:t> –</a:t>
+            </a:r>
+          </a:p>
+          <a:p>
+            <a:r>
+              <a:rPr lang="en-US" sz="1200" dirty="0"/>
+              <a:t>– https://</a:t>
+            </a:r>
+            <a:r>
+              <a:rPr lang="en-US" sz="1200" dirty="0" err="1"/>
+              <a:t>en.wikipedia.org</a:t>
+            </a:r>
+            <a:r>
+              <a:rPr lang="en-US" sz="1200" dirty="0"/>
+              <a:t>/wiki/</a:t>
+            </a:r>
+            <a:r>
+              <a:rPr lang="en-US" sz="1200" dirty="0" err="1"/>
+              <a:t>Gaussian_noise</a:t>
+            </a:r>
+            <a:r>
+              <a:rPr lang="en-US" sz="1200" dirty="0"/>
+              <a:t> –</a:t>
+            </a:r>
+          </a:p>
+          <a:p>
+            <a:r>
+              <a:rPr lang="en-US" sz="1200" dirty="0"/>
+              <a:t>– https://</a:t>
+            </a:r>
+            <a:r>
+              <a:rPr lang="en-US" sz="1200" dirty="0" err="1"/>
+              <a:t>en.wikipedia.org</a:t>
+            </a:r>
+            <a:r>
+              <a:rPr lang="en-US" sz="1200" dirty="0"/>
+              <a:t>/wiki/</a:t>
+            </a:r>
+            <a:r>
+              <a:rPr lang="en-US" sz="1200" dirty="0" err="1"/>
+              <a:t>Brownian_noise</a:t>
+            </a:r>
+            <a:r>
+              <a:rPr lang="en-US" sz="1200" dirty="0"/>
+              <a:t> –</a:t>
+            </a:r>
+          </a:p>
+          <a:p>
+            <a:endParaRPr lang="en-US" sz="1200" dirty="0"/>
+          </a:p>
+          <a:p>
+            <a:r>
+              <a:rPr lang="en-US" sz="1200" dirty="0"/>
+              <a:t>Markov Process</a:t>
+            </a:r>
+          </a:p>
+          <a:p>
+            <a:r>
+              <a:rPr lang="en-US" sz="1200" dirty="0"/>
+              <a:t>– https://</a:t>
+            </a:r>
+            <a:r>
+              <a:rPr lang="en-US" sz="1200" dirty="0" err="1"/>
+              <a:t>en.wikipedia.org</a:t>
+            </a:r>
+            <a:r>
+              <a:rPr lang="en-US" sz="1200" dirty="0"/>
+              <a:t>/wiki/</a:t>
+            </a:r>
+            <a:r>
+              <a:rPr lang="en-US" sz="1200" dirty="0" err="1"/>
+              <a:t>Markov_chain</a:t>
+            </a:r>
+            <a:r>
+              <a:rPr lang="en-US" sz="1200" dirty="0"/>
+              <a:t> –</a:t>
+            </a:r>
+          </a:p>
+          <a:p>
+            <a:r>
+              <a:rPr lang="en-US" sz="1200" dirty="0"/>
+              <a:t>– https://</a:t>
+            </a:r>
+            <a:r>
+              <a:rPr lang="en-US" sz="1200" dirty="0" err="1"/>
+              <a:t>en.wikipedia.org</a:t>
+            </a:r>
+            <a:r>
+              <a:rPr lang="en-US" sz="1200" dirty="0"/>
+              <a:t>/wiki/</a:t>
+            </a:r>
+            <a:r>
+              <a:rPr lang="en-US" sz="1200" dirty="0" err="1"/>
+              <a:t>Markov_process</a:t>
+            </a:r>
+            <a:r>
+              <a:rPr lang="en-US" sz="1200" dirty="0"/>
+              <a:t> –</a:t>
+            </a:r>
+          </a:p>
+          <a:p>
+            <a:endParaRPr lang="en-US" sz="1200" dirty="0"/>
+          </a:p>
+          <a:p>
+            <a:r>
+              <a:rPr lang="en-US" sz="1200" dirty="0"/>
+              <a:t>Correlation function:</a:t>
+            </a:r>
+          </a:p>
+          <a:p>
+            <a:r>
+              <a:rPr lang="en-US" sz="1200" dirty="0"/>
+              <a:t>– https://</a:t>
+            </a:r>
+            <a:r>
+              <a:rPr lang="en-US" sz="1200" dirty="0" err="1"/>
+              <a:t>en.wikipedia.org</a:t>
+            </a:r>
+            <a:r>
+              <a:rPr lang="en-US" sz="1200" dirty="0"/>
+              <a:t>/wiki/</a:t>
+            </a:r>
+            <a:r>
+              <a:rPr lang="en-US" sz="1200" dirty="0" err="1"/>
+              <a:t>Correlation_function</a:t>
+            </a:r>
+            <a:r>
+              <a:rPr lang="en-US" sz="1200" dirty="0"/>
+              <a:t> –</a:t>
+            </a:r>
+          </a:p>
+          <a:p>
+            <a:r>
+              <a:rPr lang="en-US" sz="1200" dirty="0"/>
+              <a:t>– https://</a:t>
+            </a:r>
+            <a:r>
+              <a:rPr lang="en-US" sz="1200" dirty="0" err="1"/>
+              <a:t>en.wikipedia.org</a:t>
+            </a:r>
+            <a:r>
+              <a:rPr lang="en-US" sz="1200" dirty="0"/>
+              <a:t>/wiki/Autocorrelation –</a:t>
+            </a:r>
+          </a:p>
+          <a:p>
+            <a:endParaRPr lang="en-US" sz="1200" dirty="0"/>
+          </a:p>
+          <a:p>
+            <a:r>
+              <a:rPr lang="en-US" sz="1200" dirty="0"/>
+              <a:t>Spectral Density, Fourier Analysis</a:t>
+            </a:r>
+          </a:p>
+          <a:p>
+            <a:r>
+              <a:rPr lang="en-US" sz="1200" dirty="0"/>
+              <a:t>– https://</a:t>
+            </a:r>
+            <a:r>
+              <a:rPr lang="en-US" sz="1200" dirty="0" err="1"/>
+              <a:t>en.wikipedia.org</a:t>
+            </a:r>
+            <a:r>
+              <a:rPr lang="en-US" sz="1200" dirty="0"/>
+              <a:t>/wiki/</a:t>
+            </a:r>
+            <a:r>
+              <a:rPr lang="en-US" sz="1200" dirty="0" err="1"/>
+              <a:t>Spectral_density</a:t>
+            </a:r>
+            <a:r>
+              <a:rPr lang="en-US" sz="1200" dirty="0"/>
+              <a:t> –</a:t>
+            </a:r>
+          </a:p>
+          <a:p>
+            <a:r>
+              <a:rPr lang="en-US" sz="1200" dirty="0"/>
+              <a:t>– https://</a:t>
+            </a:r>
+            <a:r>
+              <a:rPr lang="en-US" sz="1200" dirty="0" err="1"/>
+              <a:t>en.wikipedia.org</a:t>
+            </a:r>
+            <a:r>
+              <a:rPr lang="en-US" sz="1200" dirty="0"/>
+              <a:t>/wiki/</a:t>
+            </a:r>
+            <a:r>
+              <a:rPr lang="en-US" sz="1200" dirty="0" err="1"/>
+              <a:t>Fourier_analysis</a:t>
+            </a:r>
+            <a:r>
+              <a:rPr lang="en-US" sz="1200" dirty="0"/>
+              <a:t> –</a:t>
+            </a:r>
+          </a:p>
+          <a:p>
+            <a:r>
+              <a:rPr lang="en-US" sz="1200" dirty="0"/>
+              <a:t>– https://</a:t>
+            </a:r>
+            <a:r>
+              <a:rPr lang="en-US" sz="1200" dirty="0" err="1"/>
+              <a:t>en.wikipedia.org</a:t>
+            </a:r>
+            <a:r>
+              <a:rPr lang="en-US" sz="1200" dirty="0"/>
+              <a:t>/wiki/</a:t>
+            </a:r>
+            <a:r>
+              <a:rPr lang="en-US" sz="1200" dirty="0" err="1"/>
+              <a:t>Fast_Fourier_transform</a:t>
+            </a:r>
+            <a:r>
+              <a:rPr lang="en-US" sz="1200" dirty="0"/>
+              <a:t> –</a:t>
+            </a:r>
+          </a:p>
+        </p:txBody>
+      </p:sp>
+    </p:spTree>
+    <p:extLst>
+      <p:ext uri="{BB962C8B-B14F-4D97-AF65-F5344CB8AC3E}">
+        <p14:creationId xmlns:p14="http://schemas.microsoft.com/office/powerpoint/2010/main" val="4244283212"/>
+      </p:ext>
+    </p:extLst>
+  </p:cSld>
+  <p:clrMapOvr>
+    <a:masterClrMapping/>
+  </p:clrMapOvr>
+</p:sld>
+</file>
+
+<file path=ppt/slides/slide19.xml><?xml version="1.0" encoding="utf-8"?>
+<p:sld xmlns:a="http://schemas.openxmlformats.org/drawingml/2006/main" xmlns:r="http://schemas.openxmlformats.org/officeDocument/2006/relationships" xmlns:p="http://schemas.openxmlformats.org/presentationml/2006/main">
+  <p:cSld>
+    <p:spTree>
+      <p:nvGrpSpPr>
+        <p:cNvPr id="1" name=""/>
+        <p:cNvGrpSpPr/>
+        <p:nvPr/>
+      </p:nvGrpSpPr>
+      <p:grpSpPr>
+        <a:xfrm>
+          <a:off x="0" y="0"/>
+          <a:ext cx="0" cy="0"/>
+          <a:chOff x="0" y="0"/>
+          <a:chExt cx="0" cy="0"/>
+        </a:xfrm>
+      </p:grpSpPr>
+      <p:sp>
+        <p:nvSpPr>
+          <p:cNvPr id="4" name="TextBox 3">
+            <a:extLst>
+              <a:ext uri="{FF2B5EF4-FFF2-40B4-BE49-F238E27FC236}">
+                <a16:creationId xmlns:a16="http://schemas.microsoft.com/office/drawing/2014/main" id="{1EB5F268-965F-C142-A102-83C02389B555}"/>
+              </a:ext>
+            </a:extLst>
+          </p:cNvPr>
+          <p:cNvSpPr txBox="1"/>
+          <p:nvPr/>
+        </p:nvSpPr>
+        <p:spPr>
+          <a:xfrm>
+            <a:off x="189186" y="178676"/>
+            <a:ext cx="5906814" cy="3970318"/>
+          </a:xfrm>
+          <a:prstGeom prst="rect">
+            <a:avLst/>
+          </a:prstGeom>
+          <a:noFill/>
+        </p:spPr>
+        <p:txBody>
+          <a:bodyPr wrap="square" rtlCol="0">
+            <a:spAutoFit/>
+          </a:bodyPr>
+          <a:lstStyle/>
+          <a:p>
+            <a:r>
+              <a:rPr lang="en-US" dirty="0"/>
+              <a:t>Convolution, Functional Analysis</a:t>
+            </a:r>
+          </a:p>
+          <a:p>
+            <a:r>
+              <a:rPr lang="en-US" dirty="0"/>
+              <a:t>– https://</a:t>
+            </a:r>
+            <a:r>
+              <a:rPr lang="en-US" dirty="0" err="1"/>
+              <a:t>en.wikipedia.org</a:t>
+            </a:r>
+            <a:r>
+              <a:rPr lang="en-US" dirty="0"/>
+              <a:t>/wiki/Convolution –</a:t>
+            </a:r>
+          </a:p>
+          <a:p>
+            <a:r>
+              <a:rPr lang="en-US" dirty="0"/>
+              <a:t>– https://</a:t>
+            </a:r>
+            <a:r>
+              <a:rPr lang="en-US" dirty="0" err="1"/>
+              <a:t>en.wikipedia.org</a:t>
+            </a:r>
+            <a:r>
+              <a:rPr lang="en-US" dirty="0"/>
+              <a:t>/wiki/</a:t>
+            </a:r>
+            <a:r>
+              <a:rPr lang="en-US" dirty="0" err="1"/>
+              <a:t>Functional_analysis</a:t>
+            </a:r>
+            <a:r>
+              <a:rPr lang="en-US" dirty="0"/>
+              <a:t> –</a:t>
+            </a:r>
+          </a:p>
+          <a:p>
+            <a:endParaRPr lang="en-US" dirty="0"/>
+          </a:p>
+          <a:p>
+            <a:r>
+              <a:rPr lang="en-US" dirty="0"/>
+              <a:t>Extracting signal from Noise</a:t>
+            </a:r>
+          </a:p>
+          <a:p>
+            <a:r>
+              <a:rPr lang="en-US" dirty="0"/>
+              <a:t>– https://</a:t>
+            </a:r>
+            <a:r>
+              <a:rPr lang="en-US" dirty="0" err="1"/>
+              <a:t>en.wikipedia.org</a:t>
+            </a:r>
+            <a:r>
+              <a:rPr lang="en-US" dirty="0"/>
+              <a:t>/wiki/Signal-to-</a:t>
+            </a:r>
+            <a:r>
+              <a:rPr lang="en-US" dirty="0" err="1"/>
+              <a:t>noise_ratio</a:t>
+            </a:r>
+            <a:r>
+              <a:rPr lang="en-US" dirty="0"/>
+              <a:t> –</a:t>
+            </a:r>
+          </a:p>
+          <a:p>
+            <a:r>
+              <a:rPr lang="en-US" dirty="0"/>
+              <a:t>– https://</a:t>
+            </a:r>
+            <a:r>
+              <a:rPr lang="en-US" dirty="0" err="1"/>
+              <a:t>en.wikipedia.org</a:t>
+            </a:r>
+            <a:r>
+              <a:rPr lang="en-US" dirty="0"/>
+              <a:t>/wiki/</a:t>
+            </a:r>
+            <a:r>
+              <a:rPr lang="en-US" dirty="0" err="1"/>
+              <a:t>Noise_reduction</a:t>
+            </a:r>
+            <a:r>
+              <a:rPr lang="en-US" dirty="0"/>
+              <a:t> – (filtering, etc.)</a:t>
+            </a:r>
+          </a:p>
+          <a:p>
+            <a:r>
+              <a:rPr lang="en-US" dirty="0"/>
+              <a:t>If we add N samples “s” of noisy data, then the signal will add proportionally to N,</a:t>
+            </a:r>
+          </a:p>
+          <a:p>
+            <a:r>
+              <a:rPr lang="en-US" dirty="0"/>
+              <a:t>whereas noise will grow only as sqrt(N). So, if we add 100 samples, we will</a:t>
+            </a:r>
+          </a:p>
+          <a:p>
+            <a:r>
+              <a:rPr lang="en-US" dirty="0"/>
+              <a:t>improve out Signal/Noise ratio ~10 times.</a:t>
+            </a:r>
+          </a:p>
+          <a:p>
+            <a:endParaRPr lang="en-US" dirty="0"/>
+          </a:p>
+          <a:p>
+            <a:r>
+              <a:rPr lang="en-US" dirty="0"/>
+              <a:t>Monte Carlo Method</a:t>
+            </a:r>
+          </a:p>
+          <a:p>
+            <a:r>
+              <a:rPr lang="en-US" dirty="0"/>
+              <a:t>– https://</a:t>
+            </a:r>
+            <a:r>
+              <a:rPr lang="en-US" dirty="0" err="1"/>
+              <a:t>en.wikipedia.org</a:t>
+            </a:r>
+            <a:r>
+              <a:rPr lang="en-US" dirty="0"/>
+              <a:t>/wiki/</a:t>
+            </a:r>
+            <a:r>
+              <a:rPr lang="en-US" dirty="0" err="1"/>
+              <a:t>Monte_Carlo_method</a:t>
+            </a:r>
+            <a:r>
+              <a:rPr lang="en-US" dirty="0"/>
+              <a:t> – </a:t>
+            </a:r>
+          </a:p>
+          <a:p>
+            <a:r>
+              <a:rPr lang="en-US" dirty="0"/>
+              <a:t>used to evaluate something by using randomly-generated samples. </a:t>
+            </a:r>
+          </a:p>
+          <a:p>
+            <a:r>
+              <a:rPr lang="en-US" dirty="0"/>
+              <a:t>The more samples – the more accurate the result.</a:t>
+            </a:r>
+          </a:p>
+          <a:p>
+            <a:endParaRPr lang="en-US" dirty="0"/>
+          </a:p>
+        </p:txBody>
+      </p:sp>
+    </p:spTree>
+    <p:extLst>
+      <p:ext uri="{BB962C8B-B14F-4D97-AF65-F5344CB8AC3E}">
+        <p14:creationId xmlns:p14="http://schemas.microsoft.com/office/powerpoint/2010/main" val="1295097877"/>
+      </p:ext>
+    </p:extLst>
   </p:cSld>
   <p:clrMapOvr>
     <a:masterClrMapping/>
@@ -23392,7 +25036,7 @@
         </p:nvSpPr>
         <p:spPr>
           <a:xfrm>
-            <a:off x="6096000" y="2480441"/>
+            <a:off x="6190593" y="663672"/>
             <a:ext cx="6001407" cy="3970318"/>
           </a:xfrm>
           <a:prstGeom prst="rect">
@@ -23720,6 +25364,42 @@
           </a:p>
         </p:txBody>
       </p:sp>
+      <p:pic>
+        <p:nvPicPr>
+          <p:cNvPr id="2" name="Picture 1">
+            <a:extLst>
+              <a:ext uri="{FF2B5EF4-FFF2-40B4-BE49-F238E27FC236}">
+                <a16:creationId xmlns:a16="http://schemas.microsoft.com/office/drawing/2014/main" id="{53B9C2FE-C703-344E-807C-1F34D0C83917}"/>
+              </a:ext>
+            </a:extLst>
+          </p:cNvPr>
+          <p:cNvPicPr>
+            <a:picLocks noChangeAspect="1"/>
+          </p:cNvPicPr>
+          <p:nvPr/>
+        </p:nvPicPr>
+        <p:blipFill>
+          <a:blip r:embed="rId2" cstate="email">
+            <a:extLst>
+              <a:ext uri="{28A0092B-C50C-407E-A947-70E740481C1C}">
+                <a14:useLocalDpi xmlns:a14="http://schemas.microsoft.com/office/drawing/2010/main"/>
+              </a:ext>
+            </a:extLst>
+          </a:blip>
+          <a:stretch>
+            <a:fillRect/>
+          </a:stretch>
+        </p:blipFill>
+        <p:spPr>
+          <a:xfrm>
+            <a:off x="6695908" y="258901"/>
+            <a:ext cx="5143166" cy="6227906"/>
+          </a:xfrm>
+          <a:prstGeom prst="rect">
+            <a:avLst/>
+          </a:prstGeom>
+        </p:spPr>
+      </p:pic>
     </p:spTree>
     <p:extLst>
       <p:ext uri="{BB962C8B-B14F-4D97-AF65-F5344CB8AC3E}">
@@ -23764,7 +25444,7 @@
         </p:nvSpPr>
         <p:spPr>
           <a:xfrm>
-            <a:off x="6589986" y="105100"/>
+            <a:off x="6505765" y="4242179"/>
             <a:ext cx="5517931" cy="2462213"/>
           </a:xfrm>
           <a:prstGeom prst="rect">
@@ -23867,7 +25547,7 @@
         <p:spPr>
           <a:xfrm>
             <a:off x="84083" y="86343"/>
-            <a:ext cx="6011917" cy="6124754"/>
+            <a:ext cx="6011917" cy="6771084"/>
           </a:xfrm>
           <a:prstGeom prst="rect">
             <a:avLst/>
@@ -23888,16 +25568,286 @@
           <a:p>
             <a:r>
               <a:rPr lang="en-US" dirty="0"/>
-              <a:t>– https://</a:t>
-            </a:r>
-            <a:r>
-              <a:rPr lang="en-US" dirty="0" err="1"/>
+              <a:t>– </a:t>
+            </a:r>
+            <a:r>
+              <a:rPr lang="en-US" dirty="0">
+                <a:hlinkClick r:id="rId2"/>
+              </a:rPr>
+              <a:t>https://en.wikipedia.org/wiki/Thomas_Bayes</a:t>
+            </a:r>
+            <a:r>
+              <a:rPr lang="en-US" dirty="0"/>
+              <a:t> - </a:t>
+            </a:r>
+            <a:br>
+              <a:rPr lang="en-US" dirty="0"/>
+            </a:br>
+            <a:r>
+              <a:rPr lang="en-US" dirty="0"/>
+              <a:t>– </a:t>
+            </a:r>
+            <a:r>
+              <a:rPr lang="en-US" dirty="0">
+                <a:hlinkClick r:id="rId3"/>
+              </a:rPr>
+              <a:t>https://</a:t>
+            </a:r>
+            <a:r>
+              <a:rPr lang="en-US" dirty="0" err="1">
+                <a:hlinkClick r:id="rId3"/>
+              </a:rPr>
               <a:t>en.wikipedia.org</a:t>
             </a:r>
             <a:r>
-              <a:rPr lang="en-US" dirty="0"/>
+              <a:rPr lang="en-US" dirty="0">
+                <a:hlinkClick r:id="rId3"/>
+              </a:rPr>
+              <a:t>/wiki/Bayes%27_theorem</a:t>
+            </a:r>
+            <a:r>
+              <a:rPr lang="en-US" dirty="0"/>
+              <a:t> –</a:t>
+            </a:r>
+          </a:p>
+          <a:p>
+            <a:r>
+              <a:rPr lang="en-US" dirty="0"/>
+              <a:t>– </a:t>
+            </a:r>
+            <a:r>
+              <a:rPr lang="en-US" dirty="0">
+                <a:hlinkClick r:id="rId4"/>
+              </a:rPr>
+              <a:t>https://</a:t>
+            </a:r>
+            <a:r>
+              <a:rPr lang="en-US" dirty="0" err="1">
+                <a:hlinkClick r:id="rId4"/>
+              </a:rPr>
+              <a:t>en.wikipedia.org</a:t>
+            </a:r>
+            <a:r>
+              <a:rPr lang="en-US" dirty="0">
+                <a:hlinkClick r:id="rId4"/>
+              </a:rPr>
               <a:t>/wiki/</a:t>
             </a:r>
+            <a:r>
+              <a:rPr lang="en-US" dirty="0" err="1">
+                <a:hlinkClick r:id="rId4"/>
+              </a:rPr>
+              <a:t>Bayesian_inference</a:t>
+            </a:r>
+            <a:r>
+              <a:rPr lang="en-US" dirty="0"/>
+              <a:t> –</a:t>
+            </a:r>
+          </a:p>
+          <a:p>
+            <a:endParaRPr lang="en-US" dirty="0"/>
+          </a:p>
+          <a:p>
+            <a:r>
+              <a:rPr lang="en-US" dirty="0"/>
+              <a:t>P(A|B) = P(B|A)*P(A)/P(B)</a:t>
+            </a:r>
+          </a:p>
+          <a:p>
+            <a:endParaRPr lang="en-US" dirty="0"/>
+          </a:p>
+          <a:p>
+            <a:r>
+              <a:rPr lang="en-US" dirty="0"/>
+              <a:t>where A and B are events and P(B) not equal 0.</a:t>
+            </a:r>
+          </a:p>
+          <a:p>
+            <a:endParaRPr lang="en-US" dirty="0"/>
+          </a:p>
+          <a:p>
+            <a:r>
+              <a:rPr lang="en-US" dirty="0"/>
+              <a:t>Frequentist interpretation of Bayes’ theorem.</a:t>
+            </a:r>
+          </a:p>
+          <a:p>
+            <a:r>
+              <a:rPr lang="en-US" dirty="0"/>
+              <a:t>Probability measures a proportion of outcomes.</a:t>
+            </a:r>
+          </a:p>
+          <a:p>
+            <a:r>
+              <a:rPr lang="en-US" dirty="0"/>
+              <a:t>Suppose an experiment is performed many times.</a:t>
+            </a:r>
+          </a:p>
+          <a:p>
+            <a:endParaRPr lang="en-US" dirty="0"/>
+          </a:p>
+          <a:p>
+            <a:r>
+              <a:rPr lang="en-US" dirty="0"/>
+              <a:t>P(A) is the proportion of outcomes with property A,</a:t>
+            </a:r>
+          </a:p>
+          <a:p>
+            <a:r>
+              <a:rPr lang="en-US" dirty="0"/>
+              <a:t>and P(B) that with property B.</a:t>
+            </a:r>
+          </a:p>
+          <a:p>
+            <a:endParaRPr lang="en-US" dirty="0"/>
+          </a:p>
+          <a:p>
+            <a:r>
+              <a:rPr lang="en-US" dirty="0"/>
+              <a:t>P(B|A) is the proportion of outcomes with property B </a:t>
+            </a:r>
+          </a:p>
+          <a:p>
+            <a:r>
+              <a:rPr lang="en-US" dirty="0"/>
+              <a:t>out of outcomes with property A,</a:t>
+            </a:r>
+          </a:p>
+          <a:p>
+            <a:endParaRPr lang="en-US" dirty="0"/>
+          </a:p>
+          <a:p>
+            <a:r>
+              <a:rPr lang="en-US" dirty="0"/>
+              <a:t>and P(A|B) the proportion of those with A out of those with B.</a:t>
+            </a:r>
+          </a:p>
+          <a:p>
+            <a:endParaRPr lang="en-US" dirty="0"/>
+          </a:p>
+          <a:p>
+            <a:r>
+              <a:rPr lang="en-US" dirty="0"/>
+              <a:t>Bayesian interpretation of Bayes’ theorem.</a:t>
+            </a:r>
+          </a:p>
+          <a:p>
+            <a:r>
+              <a:rPr lang="en-US" dirty="0"/>
+              <a:t>Probability measures a degree of belief.</a:t>
+            </a:r>
+          </a:p>
+          <a:p>
+            <a:r>
+              <a:rPr lang="en-US" dirty="0"/>
+              <a:t>Bayes’ theorem then links the degree of belief in a proposition before (A)</a:t>
+            </a:r>
+          </a:p>
+          <a:p>
+            <a:r>
+              <a:rPr lang="en-US" dirty="0"/>
+              <a:t>and after (B) accounting for evidence.</a:t>
+            </a:r>
+          </a:p>
+          <a:p>
+            <a:endParaRPr lang="en-US" dirty="0"/>
+          </a:p>
+          <a:p>
+            <a:r>
+              <a:rPr lang="en-US" dirty="0"/>
+              <a:t>For example, suppose it is believed with 50% certainty </a:t>
+            </a:r>
+          </a:p>
+          <a:p>
+            <a:r>
+              <a:rPr lang="en-US" dirty="0"/>
+              <a:t>that a coin is twice as likely to land heads than tails.</a:t>
+            </a:r>
+          </a:p>
+          <a:p>
+            <a:r>
+              <a:rPr lang="en-US" dirty="0"/>
+              <a:t>If the coin is flipped a number of times and the outcomes observed,</a:t>
+            </a:r>
+          </a:p>
+          <a:p>
+            <a:r>
+              <a:rPr lang="en-US" dirty="0"/>
+              <a:t>then that degree of belief may rise, fall or </a:t>
+            </a:r>
+          </a:p>
+          <a:p>
+            <a:r>
+              <a:rPr lang="en-US" dirty="0"/>
+              <a:t>remain the same depending on the results.</a:t>
+            </a:r>
+          </a:p>
+        </p:txBody>
+      </p:sp>
+      <p:pic>
+        <p:nvPicPr>
+          <p:cNvPr id="3" name="Picture 2">
+            <a:extLst>
+              <a:ext uri="{FF2B5EF4-FFF2-40B4-BE49-F238E27FC236}">
+                <a16:creationId xmlns:a16="http://schemas.microsoft.com/office/drawing/2014/main" id="{5C70D884-EC0B-1A48-94E2-CD2923F3622A}"/>
+              </a:ext>
+            </a:extLst>
+          </p:cNvPr>
+          <p:cNvPicPr>
+            <a:picLocks noChangeAspect="1"/>
+          </p:cNvPicPr>
+          <p:nvPr/>
+        </p:nvPicPr>
+        <p:blipFill>
+          <a:blip r:embed="rId5" cstate="email">
+            <a:extLst>
+              <a:ext uri="{28A0092B-C50C-407E-A947-70E740481C1C}">
+                <a14:useLocalDpi xmlns:a14="http://schemas.microsoft.com/office/drawing/2010/main"/>
+              </a:ext>
+            </a:extLst>
+          </a:blip>
+          <a:stretch>
+            <a:fillRect/>
+          </a:stretch>
+        </p:blipFill>
+        <p:spPr>
+          <a:xfrm>
+            <a:off x="8070850" y="177588"/>
+            <a:ext cx="3822700" cy="2044700"/>
+          </a:xfrm>
+          <a:prstGeom prst="rect">
+            <a:avLst/>
+          </a:prstGeom>
+        </p:spPr>
+      </p:pic>
+      <p:sp>
+        <p:nvSpPr>
+          <p:cNvPr id="6" name="TextBox 5">
+            <a:extLst>
+              <a:ext uri="{FF2B5EF4-FFF2-40B4-BE49-F238E27FC236}">
+                <a16:creationId xmlns:a16="http://schemas.microsoft.com/office/drawing/2014/main" id="{6CB6F775-63F0-274F-A53D-9922B5035949}"/>
+              </a:ext>
+            </a:extLst>
+          </p:cNvPr>
+          <p:cNvSpPr txBox="1"/>
+          <p:nvPr/>
+        </p:nvSpPr>
+        <p:spPr>
+          <a:xfrm>
+            <a:off x="8404392" y="2322095"/>
+            <a:ext cx="3489158" cy="307777"/>
+          </a:xfrm>
+          <a:prstGeom prst="rect">
+            <a:avLst/>
+          </a:prstGeom>
+          <a:noFill/>
+        </p:spPr>
+        <p:txBody>
+          <a:bodyPr wrap="square" rtlCol="0">
+            <a:spAutoFit/>
+          </a:bodyPr>
+          <a:lstStyle/>
+          <a:p>
             <a:r>
               <a:rPr lang="en-US" dirty="0" err="1"/>
               <a:t>Thomas_Bayes</a:t>
@@ -23913,171 +25863,6 @@
             <a:r>
               <a:rPr lang="en-US" dirty="0"/>
               <a:t>/; 1701–1761)</a:t>
-            </a:r>
-          </a:p>
-          <a:p>
-            <a:r>
-              <a:rPr lang="en-US" dirty="0"/>
-              <a:t>– https://</a:t>
-            </a:r>
-            <a:r>
-              <a:rPr lang="en-US" dirty="0" err="1"/>
-              <a:t>en.wikipedia.org</a:t>
-            </a:r>
-            <a:r>
-              <a:rPr lang="en-US" dirty="0"/>
-              <a:t>/wiki/Bayes%27_theorem –</a:t>
-            </a:r>
-          </a:p>
-          <a:p>
-            <a:r>
-              <a:rPr lang="en-US" dirty="0"/>
-              <a:t>– https://</a:t>
-            </a:r>
-            <a:r>
-              <a:rPr lang="en-US" dirty="0" err="1"/>
-              <a:t>en.wikipedia.org</a:t>
-            </a:r>
-            <a:r>
-              <a:rPr lang="en-US" dirty="0"/>
-              <a:t>/wiki/</a:t>
-            </a:r>
-            <a:r>
-              <a:rPr lang="en-US" dirty="0" err="1"/>
-              <a:t>Bayesian_inference</a:t>
-            </a:r>
-            <a:r>
-              <a:rPr lang="en-US" dirty="0"/>
-              <a:t> –</a:t>
-            </a:r>
-          </a:p>
-          <a:p>
-            <a:endParaRPr lang="en-US" dirty="0"/>
-          </a:p>
-          <a:p>
-            <a:r>
-              <a:rPr lang="en-US" dirty="0"/>
-              <a:t>P(A|B) = P(B|A)*P(A)/P(B)</a:t>
-            </a:r>
-          </a:p>
-          <a:p>
-            <a:endParaRPr lang="en-US" dirty="0"/>
-          </a:p>
-          <a:p>
-            <a:r>
-              <a:rPr lang="en-US" dirty="0"/>
-              <a:t>where A and B are events and P(B) not equal 0.</a:t>
-            </a:r>
-          </a:p>
-          <a:p>
-            <a:endParaRPr lang="en-US" dirty="0"/>
-          </a:p>
-          <a:p>
-            <a:r>
-              <a:rPr lang="en-US" dirty="0"/>
-              <a:t>Frequentist interpretation of Bayes’ theorem.</a:t>
-            </a:r>
-          </a:p>
-          <a:p>
-            <a:r>
-              <a:rPr lang="en-US" dirty="0"/>
-              <a:t>Probability measures a proportion of outcomes.</a:t>
-            </a:r>
-          </a:p>
-          <a:p>
-            <a:r>
-              <a:rPr lang="en-US" dirty="0"/>
-              <a:t>Suppose an experiment is performed many times.</a:t>
-            </a:r>
-          </a:p>
-          <a:p>
-            <a:r>
-              <a:rPr lang="en-US" dirty="0"/>
-              <a:t>P(A) is the proportion of outcomes with property A,</a:t>
-            </a:r>
-          </a:p>
-          <a:p>
-            <a:r>
-              <a:rPr lang="en-US" dirty="0"/>
-              <a:t>and P(B) that with property B.</a:t>
-            </a:r>
-          </a:p>
-          <a:p>
-            <a:r>
-              <a:rPr lang="en-US" dirty="0"/>
-              <a:t>P(B|A) is the proportion of outcomes with property B </a:t>
-            </a:r>
-          </a:p>
-          <a:p>
-            <a:r>
-              <a:rPr lang="en-US" dirty="0"/>
-              <a:t>out of outcomes with property A,</a:t>
-            </a:r>
-          </a:p>
-          <a:p>
-            <a:r>
-              <a:rPr lang="en-US" dirty="0"/>
-              <a:t>and P(A|B) the proportion of those with A out of those with B.</a:t>
-            </a:r>
-          </a:p>
-          <a:p>
-            <a:endParaRPr lang="en-US" dirty="0"/>
-          </a:p>
-          <a:p>
-            <a:r>
-              <a:rPr lang="en-US" dirty="0"/>
-              <a:t>Bayesian interpretation of Bayes’ theorem.</a:t>
-            </a:r>
-          </a:p>
-          <a:p>
-            <a:r>
-              <a:rPr lang="en-US" dirty="0"/>
-              <a:t>Probability measures a degree of belief.</a:t>
-            </a:r>
-          </a:p>
-          <a:p>
-            <a:r>
-              <a:rPr lang="en-US" dirty="0"/>
-              <a:t>Bayes’ theorem then links the degree of belief in a proposition before (A)</a:t>
-            </a:r>
-          </a:p>
-          <a:p>
-            <a:r>
-              <a:rPr lang="en-US" dirty="0"/>
-              <a:t>and after (B) accounting for evidence.</a:t>
-            </a:r>
-          </a:p>
-          <a:p>
-            <a:endParaRPr lang="en-US" dirty="0"/>
-          </a:p>
-          <a:p>
-            <a:r>
-              <a:rPr lang="en-US" dirty="0"/>
-              <a:t>For example, suppose it is believed with 50% certainty </a:t>
-            </a:r>
-          </a:p>
-          <a:p>
-            <a:r>
-              <a:rPr lang="en-US" dirty="0"/>
-              <a:t>that a coin is twice as likely to land heads than tails.</a:t>
-            </a:r>
-          </a:p>
-          <a:p>
-            <a:r>
-              <a:rPr lang="en-US" dirty="0"/>
-              <a:t>If the coin is flipped a number of times and the outcomes observed,</a:t>
-            </a:r>
-          </a:p>
-          <a:p>
-            <a:r>
-              <a:rPr lang="en-US" dirty="0"/>
-              <a:t>then that degree of belief may rise, fall or </a:t>
-            </a:r>
-          </a:p>
-          <a:p>
-            <a:r>
-              <a:rPr lang="en-US" dirty="0"/>
-              <a:t>remain the same depending on the results.</a:t>
             </a:r>
           </a:p>
         </p:txBody>
@@ -24096,6 +25881,1439 @@
 </file>
 
 <file path=ppt/slides/slide5.xml><?xml version="1.0" encoding="utf-8"?>
+<p:sld xmlns:a="http://schemas.openxmlformats.org/drawingml/2006/main" xmlns:r="http://schemas.openxmlformats.org/officeDocument/2006/relationships" xmlns:p="http://schemas.openxmlformats.org/presentationml/2006/main">
+  <p:cSld>
+    <p:spTree>
+      <p:nvGrpSpPr>
+        <p:cNvPr id="1" name="Shape 87"/>
+        <p:cNvGrpSpPr/>
+        <p:nvPr/>
+      </p:nvGrpSpPr>
+      <p:grpSpPr>
+        <a:xfrm>
+          <a:off x="0" y="0"/>
+          <a:ext cx="0" cy="0"/>
+          <a:chOff x="0" y="0"/>
+          <a:chExt cx="0" cy="0"/>
+        </a:xfrm>
+      </p:grpSpPr>
+      <mc:AlternateContent xmlns:mc="http://schemas.openxmlformats.org/markup-compatibility/2006" xmlns:a14="http://schemas.microsoft.com/office/drawing/2010/main">
+        <mc:Choice Requires="a14">
+          <p:sp>
+            <p:nvSpPr>
+              <p:cNvPr id="88" name="Google Shape;88;p13"/>
+              <p:cNvSpPr txBox="1"/>
+              <p:nvPr/>
+            </p:nvSpPr>
+            <p:spPr>
+              <a:xfrm>
+                <a:off x="45811" y="978513"/>
+                <a:ext cx="6187097" cy="2739291"/>
+              </a:xfrm>
+              <a:prstGeom prst="rect">
+                <a:avLst/>
+              </a:prstGeom>
+              <a:noFill/>
+              <a:ln w="63500" cap="flat" cmpd="sng">
+                <a:solidFill>
+                  <a:schemeClr val="accent6"/>
+                </a:solidFill>
+                <a:prstDash val="solid"/>
+                <a:round/>
+                <a:headEnd type="none" w="sm" len="sm"/>
+                <a:tailEnd type="none" w="sm" len="sm"/>
+              </a:ln>
+            </p:spPr>
+            <p:txBody>
+              <a:bodyPr spcFirstLastPara="1" wrap="square" lIns="91425" tIns="45700" rIns="91425" bIns="45700" anchor="t" anchorCtr="0">
+                <a:noAutofit/>
+              </a:bodyPr>
+              <a:lstStyle/>
+              <a:p>
+                <a:pPr marL="0" marR="0" lvl="0" indent="0" algn="l" rtl="0">
+                  <a:spcBef>
+                    <a:spcPts val="0"/>
+                  </a:spcBef>
+                  <a:spcAft>
+                    <a:spcPts val="0"/>
+                  </a:spcAft>
+                  <a:buNone/>
+                </a:pPr>
+                <a:r>
+                  <a:rPr lang="en-US" sz="3200" b="1" i="0" u="none" strike="noStrike" cap="none" dirty="0">
+                    <a:solidFill>
+                      <a:srgbClr val="0070C0"/>
+                    </a:solidFill>
+                    <a:latin typeface="Calibri"/>
+                    <a:ea typeface="Calibri"/>
+                    <a:cs typeface="Calibri"/>
+                    <a:sym typeface="Calibri"/>
+                  </a:rPr>
+                  <a:t>Bayes’ Theorem </a:t>
+                </a:r>
+                <a:r>
+                  <a:rPr lang="en-US" sz="2000" b="0" i="0" u="none" strike="noStrike" cap="none" dirty="0">
+                    <a:solidFill>
+                      <a:schemeClr val="dk1"/>
+                    </a:solidFill>
+                    <a:latin typeface="Calibri"/>
+                    <a:ea typeface="Calibri"/>
+                    <a:cs typeface="Calibri"/>
+                    <a:sym typeface="Calibri"/>
+                  </a:rPr>
+                  <a:t>(conditional probability)</a:t>
+                </a:r>
+              </a:p>
+              <a:p>
+                <a:pPr marL="0" marR="0" lvl="0" indent="0" algn="l" rtl="0">
+                  <a:spcBef>
+                    <a:spcPts val="0"/>
+                  </a:spcBef>
+                  <a:spcAft>
+                    <a:spcPts val="0"/>
+                  </a:spcAft>
+                  <a:buNone/>
+                </a:pPr>
+                <a:endParaRPr lang="en-US" sz="2000" b="0" i="0" u="none" strike="noStrike" cap="none" dirty="0">
+                  <a:solidFill>
+                    <a:schemeClr val="dk1"/>
+                  </a:solidFill>
+                  <a:latin typeface="Calibri"/>
+                  <a:ea typeface="Calibri"/>
+                  <a:cs typeface="Calibri"/>
+                  <a:sym typeface="Calibri"/>
+                </a:endParaRPr>
+              </a:p>
+              <a:p>
+                <a:pPr/>
+                <a14:m>
+                  <m:oMathPara xmlns:m="http://schemas.openxmlformats.org/officeDocument/2006/math">
+                    <m:oMathParaPr>
+                      <m:jc m:val="center"/>
+                    </m:oMathParaPr>
+                    <m:oMath xmlns:m="http://schemas.openxmlformats.org/officeDocument/2006/math">
+                      <m:r>
+                        <a:rPr lang="en-US" b="1" i="1">
+                          <a:latin typeface="Cambria Math" panose="02040503050406030204" pitchFamily="18" charset="0"/>
+                        </a:rPr>
+                        <m:t>𝑷</m:t>
+                      </m:r>
+                      <m:r>
+                        <a:rPr lang="en-US" b="1" i="1">
+                          <a:latin typeface="Cambria Math" panose="02040503050406030204" pitchFamily="18" charset="0"/>
+                        </a:rPr>
+                        <m:t>(</m:t>
+                      </m:r>
+                      <m:r>
+                        <a:rPr lang="en-US" b="1" i="1">
+                          <a:latin typeface="Cambria Math" panose="02040503050406030204" pitchFamily="18" charset="0"/>
+                        </a:rPr>
+                        <m:t>𝑨</m:t>
+                      </m:r>
+                      <m:r>
+                        <a:rPr lang="en-US" b="1" i="1">
+                          <a:latin typeface="Cambria Math" panose="02040503050406030204" pitchFamily="18" charset="0"/>
+                        </a:rPr>
+                        <m:t>|</m:t>
+                      </m:r>
+                      <m:r>
+                        <a:rPr lang="en-US" b="1" i="1">
+                          <a:latin typeface="Cambria Math" panose="02040503050406030204" pitchFamily="18" charset="0"/>
+                        </a:rPr>
+                        <m:t>𝑩</m:t>
+                      </m:r>
+                      <m:r>
+                        <a:rPr lang="en-US" b="1" i="1">
+                          <a:latin typeface="Cambria Math" panose="02040503050406030204" pitchFamily="18" charset="0"/>
+                        </a:rPr>
+                        <m:t>) = </m:t>
+                      </m:r>
+                      <m:f>
+                        <m:fPr>
+                          <m:ctrlPr>
+                            <a:rPr lang="en-US" b="1" i="1">
+                              <a:latin typeface="Cambria Math" panose="02040503050406030204" pitchFamily="18" charset="0"/>
+                            </a:rPr>
+                          </m:ctrlPr>
+                        </m:fPr>
+                        <m:num>
+                          <m:r>
+                            <a:rPr lang="en-US" b="1" i="1">
+                              <a:latin typeface="Cambria Math" panose="02040503050406030204" pitchFamily="18" charset="0"/>
+                            </a:rPr>
+                            <m:t>𝑷</m:t>
+                          </m:r>
+                          <m:r>
+                            <a:rPr lang="en-US" b="1" i="1">
+                              <a:latin typeface="Cambria Math" panose="02040503050406030204" pitchFamily="18" charset="0"/>
+                            </a:rPr>
+                            <m:t>(</m:t>
+                          </m:r>
+                          <m:r>
+                            <a:rPr lang="en-US" b="1" i="1">
+                              <a:latin typeface="Cambria Math" panose="02040503050406030204" pitchFamily="18" charset="0"/>
+                            </a:rPr>
+                            <m:t>𝑩</m:t>
+                          </m:r>
+                          <m:r>
+                            <a:rPr lang="en-US" b="1" i="1">
+                              <a:latin typeface="Cambria Math" panose="02040503050406030204" pitchFamily="18" charset="0"/>
+                            </a:rPr>
+                            <m:t>|</m:t>
+                          </m:r>
+                          <m:r>
+                            <a:rPr lang="en-US" b="1" i="1">
+                              <a:latin typeface="Cambria Math" panose="02040503050406030204" pitchFamily="18" charset="0"/>
+                            </a:rPr>
+                            <m:t>𝑨</m:t>
+                          </m:r>
+                          <m:r>
+                            <a:rPr lang="en-US" b="1" i="1">
+                              <a:latin typeface="Cambria Math" panose="02040503050406030204" pitchFamily="18" charset="0"/>
+                            </a:rPr>
+                            <m:t>) ∗ </m:t>
+                          </m:r>
+                          <m:r>
+                            <a:rPr lang="en-US" b="1" i="1">
+                              <a:latin typeface="Cambria Math" panose="02040503050406030204" pitchFamily="18" charset="0"/>
+                            </a:rPr>
+                            <m:t>𝑷</m:t>
+                          </m:r>
+                          <m:r>
+                            <a:rPr lang="en-US" b="1" i="1">
+                              <a:latin typeface="Cambria Math" panose="02040503050406030204" pitchFamily="18" charset="0"/>
+                            </a:rPr>
+                            <m:t>(</m:t>
+                          </m:r>
+                          <m:r>
+                            <a:rPr lang="en-US" b="1" i="1">
+                              <a:latin typeface="Cambria Math" panose="02040503050406030204" pitchFamily="18" charset="0"/>
+                            </a:rPr>
+                            <m:t>𝑨</m:t>
+                          </m:r>
+                          <m:r>
+                            <a:rPr lang="en-US" b="1" i="1">
+                              <a:latin typeface="Cambria Math" panose="02040503050406030204" pitchFamily="18" charset="0"/>
+                            </a:rPr>
+                            <m:t>)</m:t>
+                          </m:r>
+                        </m:num>
+                        <m:den>
+                          <m:r>
+                            <a:rPr lang="en-US" b="1" i="1">
+                              <a:latin typeface="Cambria Math" panose="02040503050406030204" pitchFamily="18" charset="0"/>
+                            </a:rPr>
+                            <m:t>𝑷</m:t>
+                          </m:r>
+                          <m:r>
+                            <a:rPr lang="en-US" b="1" i="1">
+                              <a:latin typeface="Cambria Math" panose="02040503050406030204" pitchFamily="18" charset="0"/>
+                            </a:rPr>
+                            <m:t>(</m:t>
+                          </m:r>
+                          <m:r>
+                            <a:rPr lang="en-US" b="1" i="1">
+                              <a:latin typeface="Cambria Math" panose="02040503050406030204" pitchFamily="18" charset="0"/>
+                            </a:rPr>
+                            <m:t>𝑩</m:t>
+                          </m:r>
+                          <m:r>
+                            <a:rPr lang="en-US" b="1" i="1">
+                              <a:latin typeface="Cambria Math" panose="02040503050406030204" pitchFamily="18" charset="0"/>
+                            </a:rPr>
+                            <m:t>)</m:t>
+                          </m:r>
+                        </m:den>
+                      </m:f>
+                    </m:oMath>
+                  </m:oMathPara>
+                </a14:m>
+                <a:endParaRPr lang="en-US" dirty="0"/>
+              </a:p>
+              <a:p>
+                <a:pPr marL="0" marR="0" lvl="0" indent="0" algn="l" rtl="0">
+                  <a:spcBef>
+                    <a:spcPts val="0"/>
+                  </a:spcBef>
+                  <a:spcAft>
+                    <a:spcPts val="0"/>
+                  </a:spcAft>
+                  <a:buNone/>
+                </a:pPr>
+                <a:r>
+                  <a:rPr lang="en-US" sz="2000" dirty="0">
+                    <a:solidFill>
+                      <a:schemeClr val="dk1"/>
+                    </a:solidFill>
+                    <a:latin typeface="Calibri"/>
+                    <a:cs typeface="Calibri"/>
+                    <a:sym typeface="Calibri"/>
+                  </a:rPr>
+                  <a:t>or</a:t>
+                </a:r>
+              </a:p>
+              <a:p>
+                <a:pPr algn="ctr"/>
+                <a:r>
+                  <a:rPr lang="en-US" sz="2000" dirty="0">
+                    <a:solidFill>
+                      <a:schemeClr val="dk1"/>
+                    </a:solidFill>
+                    <a:latin typeface="Calibri"/>
+                    <a:cs typeface="Calibri"/>
+                    <a:sym typeface="Calibri"/>
+                  </a:rPr>
+                  <a:t>     </a:t>
+                </a:r>
+                <a14:m>
+                  <m:oMath xmlns:m="http://schemas.openxmlformats.org/officeDocument/2006/math">
+                    <m:r>
+                      <a:rPr lang="en-US" b="1" i="1">
+                        <a:latin typeface="Cambria Math" panose="02040503050406030204" pitchFamily="18" charset="0"/>
+                      </a:rPr>
+                      <m:t>𝑷</m:t>
+                    </m:r>
+                    <m:r>
+                      <a:rPr lang="en-US" b="1" i="1">
+                        <a:latin typeface="Cambria Math" panose="02040503050406030204" pitchFamily="18" charset="0"/>
+                      </a:rPr>
+                      <m:t>(</m:t>
+                    </m:r>
+                    <m:r>
+                      <a:rPr lang="en-US" b="1" i="1">
+                        <a:latin typeface="Cambria Math" panose="02040503050406030204" pitchFamily="18" charset="0"/>
+                      </a:rPr>
+                      <m:t>𝑨</m:t>
+                    </m:r>
+                    <m:r>
+                      <a:rPr lang="en-US" b="1" i="1">
+                        <a:latin typeface="Cambria Math" panose="02040503050406030204" pitchFamily="18" charset="0"/>
+                      </a:rPr>
+                      <m:t>|</m:t>
+                    </m:r>
+                    <m:r>
+                      <a:rPr lang="en-US" b="1" i="1">
+                        <a:latin typeface="Cambria Math" panose="02040503050406030204" pitchFamily="18" charset="0"/>
+                      </a:rPr>
+                      <m:t>𝑩</m:t>
+                    </m:r>
+                    <m:r>
+                      <a:rPr lang="en-US" b="1" i="1">
+                        <a:latin typeface="Cambria Math" panose="02040503050406030204" pitchFamily="18" charset="0"/>
+                      </a:rPr>
+                      <m:t>)∗ </m:t>
+                    </m:r>
+                    <m:r>
+                      <a:rPr lang="en-US" b="1" i="1">
+                        <a:latin typeface="Cambria Math" panose="02040503050406030204" pitchFamily="18" charset="0"/>
+                      </a:rPr>
+                      <m:t>𝑷</m:t>
+                    </m:r>
+                    <m:r>
+                      <a:rPr lang="en-US" b="1" i="1">
+                        <a:latin typeface="Cambria Math" panose="02040503050406030204" pitchFamily="18" charset="0"/>
+                      </a:rPr>
+                      <m:t>(</m:t>
+                    </m:r>
+                    <m:r>
+                      <a:rPr lang="en-US" b="1" i="1">
+                        <a:latin typeface="Cambria Math" panose="02040503050406030204" pitchFamily="18" charset="0"/>
+                      </a:rPr>
+                      <m:t>𝑩</m:t>
+                    </m:r>
+                    <m:r>
+                      <a:rPr lang="en-US" b="1" i="1">
+                        <a:latin typeface="Cambria Math" panose="02040503050406030204" pitchFamily="18" charset="0"/>
+                      </a:rPr>
+                      <m:t>) = </m:t>
+                    </m:r>
+                    <m:r>
+                      <a:rPr lang="en-US" b="1" i="1">
+                        <a:latin typeface="Cambria Math" panose="02040503050406030204" pitchFamily="18" charset="0"/>
+                      </a:rPr>
+                      <m:t>𝑷</m:t>
+                    </m:r>
+                    <m:r>
+                      <a:rPr lang="en-US" b="1" i="1">
+                        <a:latin typeface="Cambria Math" panose="02040503050406030204" pitchFamily="18" charset="0"/>
+                      </a:rPr>
+                      <m:t>(</m:t>
+                    </m:r>
+                    <m:r>
+                      <a:rPr lang="en-US" b="1" i="1">
+                        <a:latin typeface="Cambria Math" panose="02040503050406030204" pitchFamily="18" charset="0"/>
+                      </a:rPr>
+                      <m:t>𝑩</m:t>
+                    </m:r>
+                    <m:r>
+                      <a:rPr lang="en-US" b="1" i="1">
+                        <a:latin typeface="Cambria Math" panose="02040503050406030204" pitchFamily="18" charset="0"/>
+                      </a:rPr>
+                      <m:t>|</m:t>
+                    </m:r>
+                    <m:r>
+                      <a:rPr lang="en-US" b="1" i="1">
+                        <a:latin typeface="Cambria Math" panose="02040503050406030204" pitchFamily="18" charset="0"/>
+                      </a:rPr>
+                      <m:t>𝑨</m:t>
+                    </m:r>
+                    <m:r>
+                      <a:rPr lang="en-US" b="1" i="1">
+                        <a:latin typeface="Cambria Math" panose="02040503050406030204" pitchFamily="18" charset="0"/>
+                      </a:rPr>
+                      <m:t>) ∗ </m:t>
+                    </m:r>
+                    <m:r>
+                      <a:rPr lang="en-US" b="1" i="1">
+                        <a:latin typeface="Cambria Math" panose="02040503050406030204" pitchFamily="18" charset="0"/>
+                      </a:rPr>
+                      <m:t>𝑷</m:t>
+                    </m:r>
+                    <m:r>
+                      <a:rPr lang="en-US" b="1" i="1">
+                        <a:latin typeface="Cambria Math" panose="02040503050406030204" pitchFamily="18" charset="0"/>
+                      </a:rPr>
+                      <m:t>(</m:t>
+                    </m:r>
+                    <m:r>
+                      <a:rPr lang="en-US" b="1" i="1">
+                        <a:latin typeface="Cambria Math" panose="02040503050406030204" pitchFamily="18" charset="0"/>
+                      </a:rPr>
+                      <m:t>𝑨</m:t>
+                    </m:r>
+                    <m:r>
+                      <a:rPr lang="en-US" b="1" i="1">
+                        <a:latin typeface="Cambria Math" panose="02040503050406030204" pitchFamily="18" charset="0"/>
+                      </a:rPr>
+                      <m:t>)</m:t>
+                    </m:r>
+                  </m:oMath>
+                </a14:m>
+                <a:endParaRPr lang="en-US" dirty="0"/>
+              </a:p>
+              <a:p>
+                <a:pPr marL="0" marR="0" lvl="0" indent="0" algn="l" rtl="0">
+                  <a:spcBef>
+                    <a:spcPts val="0"/>
+                  </a:spcBef>
+                  <a:spcAft>
+                    <a:spcPts val="0"/>
+                  </a:spcAft>
+                  <a:buNone/>
+                </a:pPr>
+                <a:endParaRPr lang="en-US" sz="2000" dirty="0">
+                  <a:solidFill>
+                    <a:schemeClr val="dk1"/>
+                  </a:solidFill>
+                  <a:latin typeface="Calibri"/>
+                  <a:cs typeface="Calibri"/>
+                  <a:sym typeface="Calibri"/>
+                </a:endParaRPr>
+              </a:p>
+              <a:p>
+                <a:pPr marL="0" marR="0" lvl="0" indent="0" algn="l" rtl="0">
+                  <a:spcBef>
+                    <a:spcPts val="0"/>
+                  </a:spcBef>
+                  <a:spcAft>
+                    <a:spcPts val="0"/>
+                  </a:spcAft>
+                  <a:buNone/>
+                </a:pPr>
+                <a:r>
+                  <a:rPr lang="en-US" sz="2400" b="0" i="0" u="none" strike="noStrike" cap="none" dirty="0">
+                    <a:solidFill>
+                      <a:schemeClr val="dk1"/>
+                    </a:solidFill>
+                    <a:latin typeface="Calibri"/>
+                    <a:ea typeface="Calibri"/>
+                    <a:cs typeface="Calibri"/>
+                    <a:sym typeface="Calibri"/>
+                  </a:rPr>
+                  <a:t>where A and B are events, and P(B) not equal 0.</a:t>
+                </a:r>
+                <a:endParaRPr sz="2400" b="0" i="0" u="none" strike="noStrike" cap="none" dirty="0">
+                  <a:solidFill>
+                    <a:schemeClr val="dk1"/>
+                  </a:solidFill>
+                  <a:latin typeface="Calibri"/>
+                  <a:ea typeface="Calibri"/>
+                  <a:cs typeface="Calibri"/>
+                  <a:sym typeface="Calibri"/>
+                </a:endParaRPr>
+              </a:p>
+            </p:txBody>
+          </p:sp>
+        </mc:Choice>
+        <mc:Fallback xmlns="">
+          <p:sp>
+            <p:nvSpPr>
+              <p:cNvPr id="88" name="Google Shape;88;p13"/>
+              <p:cNvSpPr txBox="1">
+                <a:spLocks noRot="1" noChangeAspect="1" noMove="1" noResize="1" noEditPoints="1" noAdjustHandles="1" noChangeArrowheads="1" noChangeShapeType="1" noTextEdit="1"/>
+              </p:cNvSpPr>
+              <p:nvPr/>
+            </p:nvSpPr>
+            <p:spPr>
+              <a:xfrm>
+                <a:off x="45811" y="978513"/>
+                <a:ext cx="6187097" cy="2739291"/>
+              </a:xfrm>
+              <a:prstGeom prst="rect">
+                <a:avLst/>
+              </a:prstGeom>
+              <a:blipFill>
+                <a:blip r:embed="rId3"/>
+                <a:stretch>
+                  <a:fillRect l="-2051" t="-1743"/>
+                </a:stretch>
+              </a:blipFill>
+              <a:ln w="63500" cap="flat" cmpd="sng">
+                <a:solidFill>
+                  <a:schemeClr val="accent6"/>
+                </a:solidFill>
+                <a:prstDash val="solid"/>
+                <a:round/>
+                <a:headEnd type="none" w="sm" len="sm"/>
+                <a:tailEnd type="none" w="sm" len="sm"/>
+              </a:ln>
+            </p:spPr>
+            <p:txBody>
+              <a:bodyPr/>
+              <a:lstStyle/>
+              <a:p>
+                <a:r>
+                  <a:rPr lang="en-US">
+                    <a:noFill/>
+                  </a:rPr>
+                  <a:t> </a:t>
+                </a:r>
+              </a:p>
+            </p:txBody>
+          </p:sp>
+        </mc:Fallback>
+      </mc:AlternateContent>
+      <p:sp>
+        <p:nvSpPr>
+          <p:cNvPr id="89" name="Google Shape;89;p13"/>
+          <p:cNvSpPr txBox="1"/>
+          <p:nvPr/>
+        </p:nvSpPr>
+        <p:spPr>
+          <a:xfrm>
+            <a:off x="6532782" y="3589349"/>
+            <a:ext cx="5637488" cy="3278206"/>
+          </a:xfrm>
+          <a:prstGeom prst="rect">
+            <a:avLst/>
+          </a:prstGeom>
+          <a:noFill/>
+          <a:ln>
+            <a:noFill/>
+          </a:ln>
+        </p:spPr>
+        <p:txBody>
+          <a:bodyPr spcFirstLastPara="1" wrap="square" lIns="91425" tIns="45700" rIns="91425" bIns="45700" anchor="t" anchorCtr="0">
+            <a:noAutofit/>
+          </a:bodyPr>
+          <a:lstStyle/>
+          <a:p>
+            <a:pPr marL="0" marR="0" lvl="0" indent="0" algn="l" rtl="0">
+              <a:spcBef>
+                <a:spcPts val="0"/>
+              </a:spcBef>
+              <a:spcAft>
+                <a:spcPts val="0"/>
+              </a:spcAft>
+              <a:buNone/>
+            </a:pPr>
+            <a:r>
+              <a:rPr lang="en-US" sz="1800" b="0" i="0" u="none" strike="noStrike" cap="none" dirty="0">
+                <a:solidFill>
+                  <a:schemeClr val="dk1"/>
+                </a:solidFill>
+                <a:latin typeface="Calibri"/>
+                <a:ea typeface="Calibri"/>
+                <a:cs typeface="Calibri"/>
+                <a:sym typeface="Calibri"/>
+              </a:rPr>
+              <a:t>Intuitive explanation of Bayesian rule (on the left). </a:t>
+            </a:r>
+          </a:p>
+          <a:p>
+            <a:pPr marL="0" marR="0" lvl="0" indent="0" algn="l" rtl="0">
+              <a:spcBef>
+                <a:spcPts val="0"/>
+              </a:spcBef>
+              <a:spcAft>
+                <a:spcPts val="0"/>
+              </a:spcAft>
+              <a:buNone/>
+            </a:pPr>
+            <a:r>
+              <a:rPr lang="en-US" sz="1800" dirty="0">
+                <a:solidFill>
+                  <a:schemeClr val="dk1"/>
+                </a:solidFill>
+                <a:latin typeface="Calibri"/>
+                <a:cs typeface="Calibri"/>
+                <a:sym typeface="Calibri"/>
+              </a:rPr>
+              <a:t>A = Happy, B = Rich</a:t>
+            </a:r>
+            <a:endParaRPr dirty="0"/>
+          </a:p>
+          <a:p>
+            <a:pPr marL="0" marR="0" lvl="0" indent="0" algn="l" rtl="0">
+              <a:spcBef>
+                <a:spcPts val="0"/>
+              </a:spcBef>
+              <a:spcAft>
+                <a:spcPts val="0"/>
+              </a:spcAft>
+              <a:buNone/>
+            </a:pPr>
+            <a:r>
+              <a:rPr lang="en-US" sz="1800" dirty="0">
+                <a:solidFill>
+                  <a:schemeClr val="dk1"/>
+                </a:solidFill>
+                <a:latin typeface="Calibri"/>
+                <a:ea typeface="Calibri"/>
+                <a:cs typeface="Calibri"/>
+                <a:sym typeface="Calibri"/>
+              </a:rPr>
+              <a:t>P(A) = 40% = probability of being happy (Yellow)</a:t>
+            </a:r>
+          </a:p>
+          <a:p>
+            <a:pPr marL="0" marR="0" lvl="0" indent="0" algn="l" rtl="0">
+              <a:spcBef>
+                <a:spcPts val="0"/>
+              </a:spcBef>
+              <a:spcAft>
+                <a:spcPts val="0"/>
+              </a:spcAft>
+              <a:buNone/>
+            </a:pPr>
+            <a:r>
+              <a:rPr lang="en-US" sz="1800" dirty="0">
+                <a:solidFill>
+                  <a:schemeClr val="dk1"/>
+                </a:solidFill>
+                <a:latin typeface="Calibri"/>
+                <a:ea typeface="Calibri"/>
+                <a:cs typeface="Calibri"/>
+                <a:sym typeface="Calibri"/>
+              </a:rPr>
+              <a:t>P(B) = 5% = probability of being rich (Blue)</a:t>
+            </a:r>
+          </a:p>
+          <a:p>
+            <a:pPr marL="0" marR="0" lvl="0" indent="0" algn="l" rtl="0">
+              <a:spcBef>
+                <a:spcPts val="0"/>
+              </a:spcBef>
+              <a:spcAft>
+                <a:spcPts val="0"/>
+              </a:spcAft>
+              <a:buNone/>
+            </a:pPr>
+            <a:r>
+              <a:rPr lang="en-US" sz="1800" dirty="0">
+                <a:solidFill>
+                  <a:schemeClr val="dk1"/>
+                </a:solidFill>
+                <a:latin typeface="Calibri"/>
+                <a:ea typeface="Calibri"/>
+                <a:cs typeface="Calibri"/>
+                <a:sym typeface="Calibri"/>
+              </a:rPr>
+              <a:t>P(A &amp; B) = 4% = probability of rich &amp; happy (Green)</a:t>
+            </a:r>
+          </a:p>
+          <a:p>
+            <a:pPr marL="0" marR="0" lvl="0" indent="0" algn="l" rtl="0">
+              <a:spcBef>
+                <a:spcPts val="0"/>
+              </a:spcBef>
+              <a:spcAft>
+                <a:spcPts val="0"/>
+              </a:spcAft>
+              <a:buNone/>
+            </a:pPr>
+            <a:r>
+              <a:rPr lang="en-US" sz="1800" dirty="0">
+                <a:solidFill>
+                  <a:schemeClr val="dk1"/>
+                </a:solidFill>
+                <a:latin typeface="Calibri"/>
+                <a:ea typeface="Calibri"/>
+                <a:cs typeface="Calibri"/>
+                <a:sym typeface="Calibri"/>
+              </a:rPr>
+              <a:t>P(B|A) = 10% = probability of being rich given that Happy</a:t>
+            </a:r>
+          </a:p>
+          <a:p>
+            <a:pPr marL="0" marR="0" lvl="0" indent="0" algn="l" rtl="0">
+              <a:spcBef>
+                <a:spcPts val="0"/>
+              </a:spcBef>
+              <a:spcAft>
+                <a:spcPts val="0"/>
+              </a:spcAft>
+              <a:buNone/>
+            </a:pPr>
+            <a:r>
+              <a:rPr lang="en-US" sz="1800" dirty="0">
+                <a:solidFill>
+                  <a:schemeClr val="dk1"/>
+                </a:solidFill>
+                <a:latin typeface="Calibri"/>
+                <a:ea typeface="Calibri"/>
+                <a:cs typeface="Calibri"/>
+                <a:sym typeface="Calibri"/>
+              </a:rPr>
+              <a:t>P(A|B) = 80% = probability of being happy given that rich</a:t>
+            </a:r>
+          </a:p>
+          <a:p>
+            <a:pPr marL="0" marR="0" lvl="0" indent="0" algn="l" rtl="0">
+              <a:spcBef>
+                <a:spcPts val="0"/>
+              </a:spcBef>
+              <a:spcAft>
+                <a:spcPts val="0"/>
+              </a:spcAft>
+              <a:buNone/>
+            </a:pPr>
+            <a:endParaRPr lang="en-US" sz="1800" dirty="0">
+              <a:solidFill>
+                <a:schemeClr val="dk1"/>
+              </a:solidFill>
+              <a:latin typeface="Calibri"/>
+              <a:ea typeface="Calibri"/>
+              <a:cs typeface="Calibri"/>
+              <a:sym typeface="Calibri"/>
+            </a:endParaRPr>
+          </a:p>
+          <a:p>
+            <a:pPr marL="0" marR="0" lvl="0" indent="0" algn="l" rtl="0">
+              <a:spcBef>
+                <a:spcPts val="0"/>
+              </a:spcBef>
+              <a:spcAft>
+                <a:spcPts val="0"/>
+              </a:spcAft>
+              <a:buNone/>
+            </a:pPr>
+            <a:r>
+              <a:rPr lang="en-US" sz="1800" dirty="0">
+                <a:solidFill>
+                  <a:schemeClr val="dk1"/>
+                </a:solidFill>
+                <a:latin typeface="Calibri"/>
+                <a:ea typeface="Calibri"/>
+                <a:cs typeface="Calibri"/>
+                <a:sym typeface="Calibri"/>
+              </a:rPr>
+              <a:t>You can calculate green intersection using two methods:</a:t>
+            </a:r>
+          </a:p>
+          <a:p>
+            <a:pPr marL="0" marR="0" lvl="0" indent="0" algn="l" rtl="0">
+              <a:spcBef>
+                <a:spcPts val="0"/>
+              </a:spcBef>
+              <a:spcAft>
+                <a:spcPts val="0"/>
+              </a:spcAft>
+              <a:buNone/>
+            </a:pPr>
+            <a:r>
+              <a:rPr lang="en-US" sz="1800" dirty="0">
+                <a:solidFill>
+                  <a:schemeClr val="dk1"/>
+                </a:solidFill>
+                <a:latin typeface="Calibri"/>
+                <a:ea typeface="Calibri"/>
+                <a:cs typeface="Calibri"/>
+                <a:sym typeface="Calibri"/>
+              </a:rPr>
+              <a:t>P(A|B)*P(B) = 80%*5% = 4%</a:t>
+            </a:r>
+            <a:endParaRPr sz="1800" dirty="0">
+              <a:solidFill>
+                <a:schemeClr val="dk1"/>
+              </a:solidFill>
+              <a:latin typeface="Calibri"/>
+              <a:ea typeface="Calibri"/>
+              <a:cs typeface="Calibri"/>
+              <a:sym typeface="Calibri"/>
+            </a:endParaRPr>
+          </a:p>
+          <a:p>
+            <a:pPr marL="0" marR="0" lvl="0" indent="0" algn="l" rtl="0">
+              <a:spcBef>
+                <a:spcPts val="0"/>
+              </a:spcBef>
+              <a:spcAft>
+                <a:spcPts val="0"/>
+              </a:spcAft>
+              <a:buNone/>
+            </a:pPr>
+            <a:r>
+              <a:rPr lang="en-US" sz="1800" dirty="0">
+                <a:solidFill>
+                  <a:schemeClr val="dk1"/>
+                </a:solidFill>
+                <a:latin typeface="Calibri"/>
+                <a:ea typeface="Calibri"/>
+                <a:cs typeface="Calibri"/>
+                <a:sym typeface="Calibri"/>
+              </a:rPr>
+              <a:t>P(B|A)*P(A) = 10%*40% = 4%</a:t>
+            </a:r>
+          </a:p>
+        </p:txBody>
+      </p:sp>
+      <p:sp>
+        <p:nvSpPr>
+          <p:cNvPr id="90" name="Google Shape;90;p13"/>
+          <p:cNvSpPr txBox="1"/>
+          <p:nvPr/>
+        </p:nvSpPr>
+        <p:spPr>
+          <a:xfrm>
+            <a:off x="93257" y="-77443"/>
+            <a:ext cx="7972927" cy="954107"/>
+          </a:xfrm>
+          <a:prstGeom prst="rect">
+            <a:avLst/>
+          </a:prstGeom>
+          <a:noFill/>
+          <a:ln>
+            <a:noFill/>
+          </a:ln>
+        </p:spPr>
+        <p:txBody>
+          <a:bodyPr spcFirstLastPara="1" wrap="square" lIns="91425" tIns="45700" rIns="91425" bIns="45700" anchor="t" anchorCtr="0">
+            <a:noAutofit/>
+          </a:bodyPr>
+          <a:lstStyle/>
+          <a:p>
+            <a:pPr marL="0" marR="0" lvl="0" indent="0" algn="l" rtl="0">
+              <a:spcBef>
+                <a:spcPts val="0"/>
+              </a:spcBef>
+              <a:spcAft>
+                <a:spcPts val="0"/>
+              </a:spcAft>
+              <a:buNone/>
+            </a:pPr>
+            <a:r>
+              <a:rPr lang="en-US" sz="2800" b="1" dirty="0">
+                <a:solidFill>
+                  <a:srgbClr val="0070C0"/>
+                </a:solidFill>
+                <a:latin typeface="Calibri"/>
+                <a:ea typeface="Calibri"/>
+                <a:cs typeface="Calibri"/>
+                <a:sym typeface="Calibri"/>
+              </a:rPr>
+              <a:t>Bayesian inference - </a:t>
+            </a:r>
+            <a:r>
+              <a:rPr lang="en-US" sz="2800" dirty="0">
+                <a:solidFill>
+                  <a:srgbClr val="0070C0"/>
+                </a:solidFill>
+                <a:latin typeface="Calibri"/>
+                <a:ea typeface="Calibri"/>
+                <a:cs typeface="Calibri"/>
+                <a:sym typeface="Calibri"/>
+              </a:rPr>
+              <a:t>calculate probability</a:t>
+            </a:r>
+            <a:endParaRPr dirty="0"/>
+          </a:p>
+          <a:p>
+            <a:pPr marL="0" marR="0" lvl="0" indent="0" algn="l" rtl="0">
+              <a:spcBef>
+                <a:spcPts val="0"/>
+              </a:spcBef>
+              <a:spcAft>
+                <a:spcPts val="0"/>
+              </a:spcAft>
+              <a:buNone/>
+            </a:pPr>
+            <a:r>
+              <a:rPr lang="en-US" sz="2800" dirty="0">
+                <a:solidFill>
+                  <a:srgbClr val="0070C0"/>
+                </a:solidFill>
+                <a:latin typeface="Calibri"/>
+                <a:ea typeface="Calibri"/>
+                <a:cs typeface="Calibri"/>
+                <a:sym typeface="Calibri"/>
+              </a:rPr>
+              <a:t>following chains of dependencies or correlations</a:t>
+            </a:r>
+            <a:endParaRPr dirty="0"/>
+          </a:p>
+        </p:txBody>
+      </p:sp>
+      <p:sp>
+        <p:nvSpPr>
+          <p:cNvPr id="91" name="Google Shape;91;p13"/>
+          <p:cNvSpPr txBox="1"/>
+          <p:nvPr/>
+        </p:nvSpPr>
+        <p:spPr>
+          <a:xfrm>
+            <a:off x="10587787" y="2213811"/>
+            <a:ext cx="1588170" cy="646331"/>
+          </a:xfrm>
+          <a:prstGeom prst="rect">
+            <a:avLst/>
+          </a:prstGeom>
+          <a:noFill/>
+          <a:ln>
+            <a:noFill/>
+          </a:ln>
+        </p:spPr>
+        <p:txBody>
+          <a:bodyPr spcFirstLastPara="1" wrap="square" lIns="91425" tIns="45700" rIns="91425" bIns="45700" anchor="t" anchorCtr="0">
+            <a:noAutofit/>
+          </a:bodyPr>
+          <a:lstStyle/>
+          <a:p>
+            <a:pPr marL="0" marR="0" lvl="0" indent="0" algn="l" rtl="0">
+              <a:spcBef>
+                <a:spcPts val="0"/>
+              </a:spcBef>
+              <a:spcAft>
+                <a:spcPts val="0"/>
+              </a:spcAft>
+              <a:buNone/>
+            </a:pPr>
+            <a:r>
+              <a:rPr lang="en-US" sz="1800">
+                <a:solidFill>
+                  <a:schemeClr val="dk1"/>
+                </a:solidFill>
+                <a:latin typeface="Calibri"/>
+                <a:ea typeface="Calibri"/>
+                <a:cs typeface="Calibri"/>
+                <a:sym typeface="Calibri"/>
+              </a:rPr>
+              <a:t>Thomas Bayes </a:t>
+            </a:r>
+            <a:br>
+              <a:rPr lang="en-US" sz="1800">
+                <a:solidFill>
+                  <a:schemeClr val="dk1"/>
+                </a:solidFill>
+                <a:latin typeface="Calibri"/>
+                <a:ea typeface="Calibri"/>
+                <a:cs typeface="Calibri"/>
+                <a:sym typeface="Calibri"/>
+              </a:rPr>
+            </a:br>
+            <a:r>
+              <a:rPr lang="en-US" sz="1800">
+                <a:solidFill>
+                  <a:schemeClr val="dk1"/>
+                </a:solidFill>
+                <a:latin typeface="Calibri"/>
+                <a:ea typeface="Calibri"/>
+                <a:cs typeface="Calibri"/>
+                <a:sym typeface="Calibri"/>
+              </a:rPr>
+              <a:t>(1701–1761)</a:t>
+            </a:r>
+            <a:endParaRPr sz="1800">
+              <a:solidFill>
+                <a:schemeClr val="dk1"/>
+              </a:solidFill>
+              <a:latin typeface="Calibri"/>
+              <a:ea typeface="Calibri"/>
+              <a:cs typeface="Calibri"/>
+              <a:sym typeface="Calibri"/>
+            </a:endParaRPr>
+          </a:p>
+        </p:txBody>
+      </p:sp>
+      <p:pic>
+        <p:nvPicPr>
+          <p:cNvPr id="92" name="Google Shape;92;p13"/>
+          <p:cNvPicPr preferRelativeResize="0"/>
+          <p:nvPr/>
+        </p:nvPicPr>
+        <p:blipFill rotWithShape="1">
+          <a:blip r:embed="rId4" cstate="email">
+            <a:alphaModFix/>
+            <a:extLst>
+              <a:ext uri="{28A0092B-C50C-407E-A947-70E740481C1C}">
+                <a14:useLocalDpi xmlns:a14="http://schemas.microsoft.com/office/drawing/2010/main"/>
+              </a:ext>
+            </a:extLst>
+          </a:blip>
+          <a:srcRect/>
+          <a:stretch/>
+        </p:blipFill>
+        <p:spPr>
+          <a:xfrm>
+            <a:off x="10351783" y="0"/>
+            <a:ext cx="1818487" cy="2213811"/>
+          </a:xfrm>
+          <a:prstGeom prst="rect">
+            <a:avLst/>
+          </a:prstGeom>
+          <a:noFill/>
+          <a:ln>
+            <a:noFill/>
+          </a:ln>
+        </p:spPr>
+      </p:pic>
+      <p:sp>
+        <p:nvSpPr>
+          <p:cNvPr id="96" name="Google Shape;96;p13"/>
+          <p:cNvSpPr/>
+          <p:nvPr/>
+        </p:nvSpPr>
+        <p:spPr>
+          <a:xfrm>
+            <a:off x="523454" y="4272171"/>
+            <a:ext cx="4588042" cy="2229852"/>
+          </a:xfrm>
+          <a:prstGeom prst="rect">
+            <a:avLst/>
+          </a:prstGeom>
+          <a:solidFill>
+            <a:srgbClr val="FBE4D4"/>
+          </a:solidFill>
+          <a:ln w="12700" cap="flat" cmpd="sng">
+            <a:solidFill>
+              <a:srgbClr val="31538F"/>
+            </a:solidFill>
+            <a:prstDash val="solid"/>
+            <a:miter lim="800000"/>
+            <a:headEnd type="none" w="sm" len="sm"/>
+            <a:tailEnd type="none" w="sm" len="sm"/>
+          </a:ln>
+        </p:spPr>
+        <p:txBody>
+          <a:bodyPr spcFirstLastPara="1" wrap="square" lIns="91425" tIns="45700" rIns="91425" bIns="45700" anchor="ctr" anchorCtr="0">
+            <a:noAutofit/>
+          </a:bodyPr>
+          <a:lstStyle/>
+          <a:p>
+            <a:pPr marL="0" marR="0" lvl="0" indent="0" algn="ctr" rtl="0">
+              <a:spcBef>
+                <a:spcPts val="0"/>
+              </a:spcBef>
+              <a:spcAft>
+                <a:spcPts val="0"/>
+              </a:spcAft>
+              <a:buNone/>
+            </a:pPr>
+            <a:endParaRPr sz="1800">
+              <a:solidFill>
+                <a:schemeClr val="lt1"/>
+              </a:solidFill>
+              <a:latin typeface="Calibri"/>
+              <a:ea typeface="Calibri"/>
+              <a:cs typeface="Calibri"/>
+              <a:sym typeface="Calibri"/>
+            </a:endParaRPr>
+          </a:p>
+        </p:txBody>
+      </p:sp>
+      <p:sp>
+        <p:nvSpPr>
+          <p:cNvPr id="97" name="Google Shape;97;p13"/>
+          <p:cNvSpPr/>
+          <p:nvPr/>
+        </p:nvSpPr>
+        <p:spPr>
+          <a:xfrm>
+            <a:off x="1166937" y="4576971"/>
+            <a:ext cx="3224463" cy="1764631"/>
+          </a:xfrm>
+          <a:prstGeom prst="ellipse">
+            <a:avLst/>
+          </a:prstGeom>
+          <a:solidFill>
+            <a:srgbClr val="FFC000"/>
+          </a:solidFill>
+          <a:ln w="12700" cap="flat" cmpd="sng">
+            <a:solidFill>
+              <a:srgbClr val="31538F"/>
+            </a:solidFill>
+            <a:prstDash val="solid"/>
+            <a:miter lim="800000"/>
+            <a:headEnd type="none" w="sm" len="sm"/>
+            <a:tailEnd type="none" w="sm" len="sm"/>
+          </a:ln>
+        </p:spPr>
+        <p:txBody>
+          <a:bodyPr spcFirstLastPara="1" wrap="square" lIns="91425" tIns="45700" rIns="91425" bIns="45700" anchor="ctr" anchorCtr="0">
+            <a:noAutofit/>
+          </a:bodyPr>
+          <a:lstStyle/>
+          <a:p>
+            <a:pPr marL="0" marR="0" lvl="0" indent="0" algn="ctr" rtl="0">
+              <a:spcBef>
+                <a:spcPts val="0"/>
+              </a:spcBef>
+              <a:spcAft>
+                <a:spcPts val="0"/>
+              </a:spcAft>
+              <a:buNone/>
+            </a:pPr>
+            <a:endParaRPr sz="1800">
+              <a:solidFill>
+                <a:schemeClr val="lt1"/>
+              </a:solidFill>
+              <a:latin typeface="Calibri"/>
+              <a:ea typeface="Calibri"/>
+              <a:cs typeface="Calibri"/>
+              <a:sym typeface="Calibri"/>
+            </a:endParaRPr>
+          </a:p>
+        </p:txBody>
+      </p:sp>
+      <p:sp>
+        <p:nvSpPr>
+          <p:cNvPr id="98" name="Google Shape;98;p13"/>
+          <p:cNvSpPr/>
+          <p:nvPr/>
+        </p:nvSpPr>
+        <p:spPr>
+          <a:xfrm>
+            <a:off x="3342855" y="5008818"/>
+            <a:ext cx="1397874" cy="900935"/>
+          </a:xfrm>
+          <a:prstGeom prst="ellipse">
+            <a:avLst/>
+          </a:prstGeom>
+          <a:solidFill>
+            <a:srgbClr val="00B0F0">
+              <a:alpha val="40784"/>
+            </a:srgbClr>
+          </a:solidFill>
+          <a:ln w="12700" cap="flat" cmpd="sng">
+            <a:solidFill>
+              <a:srgbClr val="31538F"/>
+            </a:solidFill>
+            <a:prstDash val="solid"/>
+            <a:miter lim="800000"/>
+            <a:headEnd type="none" w="sm" len="sm"/>
+            <a:tailEnd type="none" w="sm" len="sm"/>
+          </a:ln>
+        </p:spPr>
+        <p:txBody>
+          <a:bodyPr spcFirstLastPara="1" wrap="square" lIns="91425" tIns="45700" rIns="91425" bIns="45700" anchor="ctr" anchorCtr="0">
+            <a:noAutofit/>
+          </a:bodyPr>
+          <a:lstStyle/>
+          <a:p>
+            <a:pPr marL="0" marR="0" lvl="0" indent="0" algn="ctr" rtl="0">
+              <a:spcBef>
+                <a:spcPts val="0"/>
+              </a:spcBef>
+              <a:spcAft>
+                <a:spcPts val="0"/>
+              </a:spcAft>
+              <a:buNone/>
+            </a:pPr>
+            <a:endParaRPr sz="1800">
+              <a:solidFill>
+                <a:schemeClr val="lt1"/>
+              </a:solidFill>
+              <a:latin typeface="Calibri"/>
+              <a:ea typeface="Calibri"/>
+              <a:cs typeface="Calibri"/>
+              <a:sym typeface="Calibri"/>
+            </a:endParaRPr>
+          </a:p>
+        </p:txBody>
+      </p:sp>
+      <p:sp>
+        <p:nvSpPr>
+          <p:cNvPr id="99" name="Google Shape;99;p13"/>
+          <p:cNvSpPr txBox="1"/>
+          <p:nvPr/>
+        </p:nvSpPr>
+        <p:spPr>
+          <a:xfrm>
+            <a:off x="2068401" y="5008818"/>
+            <a:ext cx="1274454" cy="900935"/>
+          </a:xfrm>
+          <a:prstGeom prst="rect">
+            <a:avLst/>
+          </a:prstGeom>
+          <a:noFill/>
+          <a:ln>
+            <a:noFill/>
+          </a:ln>
+        </p:spPr>
+        <p:txBody>
+          <a:bodyPr spcFirstLastPara="1" wrap="square" lIns="91425" tIns="45700" rIns="91425" bIns="45700" anchor="t" anchorCtr="0">
+            <a:noAutofit/>
+          </a:bodyPr>
+          <a:lstStyle/>
+          <a:p>
+            <a:pPr marL="0" marR="0" lvl="0" indent="0" algn="l" rtl="0">
+              <a:spcBef>
+                <a:spcPts val="0"/>
+              </a:spcBef>
+              <a:spcAft>
+                <a:spcPts val="0"/>
+              </a:spcAft>
+              <a:buNone/>
+            </a:pPr>
+            <a:r>
+              <a:rPr lang="en-US" sz="2400" b="1" dirty="0">
+                <a:solidFill>
+                  <a:srgbClr val="FF0000"/>
+                </a:solidFill>
+                <a:latin typeface="Calibri"/>
+                <a:ea typeface="Calibri"/>
+                <a:cs typeface="Calibri"/>
+                <a:sym typeface="Calibri"/>
+              </a:rPr>
+              <a:t>A</a:t>
+            </a:r>
+          </a:p>
+          <a:p>
+            <a:pPr marL="0" marR="0" lvl="0" indent="0" algn="l" rtl="0">
+              <a:spcBef>
+                <a:spcPts val="0"/>
+              </a:spcBef>
+              <a:spcAft>
+                <a:spcPts val="0"/>
+              </a:spcAft>
+              <a:buNone/>
+            </a:pPr>
+            <a:r>
+              <a:rPr lang="en-US" sz="2400" b="1" dirty="0">
+                <a:solidFill>
+                  <a:srgbClr val="FF0000"/>
+                </a:solidFill>
+                <a:latin typeface="Calibri"/>
+                <a:ea typeface="Calibri"/>
+                <a:cs typeface="Calibri"/>
+                <a:sym typeface="Calibri"/>
+              </a:rPr>
+              <a:t>Happy</a:t>
+            </a:r>
+            <a:endParaRPr sz="2400" b="1" dirty="0">
+              <a:solidFill>
+                <a:srgbClr val="FF0000"/>
+              </a:solidFill>
+              <a:latin typeface="Calibri"/>
+              <a:ea typeface="Calibri"/>
+              <a:cs typeface="Calibri"/>
+              <a:sym typeface="Calibri"/>
+            </a:endParaRPr>
+          </a:p>
+        </p:txBody>
+      </p:sp>
+      <p:sp>
+        <p:nvSpPr>
+          <p:cNvPr id="100" name="Google Shape;100;p13"/>
+          <p:cNvSpPr txBox="1"/>
+          <p:nvPr/>
+        </p:nvSpPr>
+        <p:spPr>
+          <a:xfrm>
+            <a:off x="3903802" y="5014208"/>
+            <a:ext cx="1083013" cy="745778"/>
+          </a:xfrm>
+          <a:prstGeom prst="rect">
+            <a:avLst/>
+          </a:prstGeom>
+          <a:noFill/>
+          <a:ln>
+            <a:noFill/>
+          </a:ln>
+        </p:spPr>
+        <p:txBody>
+          <a:bodyPr spcFirstLastPara="1" wrap="square" lIns="91425" tIns="45700" rIns="91425" bIns="45700" anchor="t" anchorCtr="0">
+            <a:noAutofit/>
+          </a:bodyPr>
+          <a:lstStyle/>
+          <a:p>
+            <a:pPr marL="0" marR="0" lvl="0" indent="0" algn="l" rtl="0">
+              <a:spcBef>
+                <a:spcPts val="0"/>
+              </a:spcBef>
+              <a:spcAft>
+                <a:spcPts val="0"/>
+              </a:spcAft>
+              <a:buNone/>
+            </a:pPr>
+            <a:r>
+              <a:rPr lang="en-US" sz="2400" b="1" dirty="0">
+                <a:solidFill>
+                  <a:srgbClr val="FF0000"/>
+                </a:solidFill>
+                <a:latin typeface="Calibri"/>
+                <a:ea typeface="Calibri"/>
+                <a:cs typeface="Calibri"/>
+                <a:sym typeface="Calibri"/>
+              </a:rPr>
+              <a:t>B</a:t>
+            </a:r>
+          </a:p>
+          <a:p>
+            <a:pPr marL="0" marR="0" lvl="0" indent="0" algn="l" rtl="0">
+              <a:spcBef>
+                <a:spcPts val="0"/>
+              </a:spcBef>
+              <a:spcAft>
+                <a:spcPts val="0"/>
+              </a:spcAft>
+              <a:buNone/>
+            </a:pPr>
+            <a:r>
+              <a:rPr lang="en-US" sz="2400" b="1" dirty="0">
+                <a:solidFill>
+                  <a:srgbClr val="FF0000"/>
+                </a:solidFill>
+                <a:latin typeface="Calibri"/>
+                <a:ea typeface="Calibri"/>
+                <a:cs typeface="Calibri"/>
+                <a:sym typeface="Calibri"/>
+              </a:rPr>
+              <a:t>Rich</a:t>
+            </a:r>
+            <a:endParaRPr sz="2400" b="1" dirty="0">
+              <a:solidFill>
+                <a:srgbClr val="FF0000"/>
+              </a:solidFill>
+              <a:latin typeface="Calibri"/>
+              <a:ea typeface="Calibri"/>
+              <a:cs typeface="Calibri"/>
+              <a:sym typeface="Calibri"/>
+            </a:endParaRPr>
+          </a:p>
+        </p:txBody>
+      </p:sp>
+      <p:sp>
+        <p:nvSpPr>
+          <p:cNvPr id="101" name="Google Shape;101;p13"/>
+          <p:cNvSpPr txBox="1"/>
+          <p:nvPr/>
+        </p:nvSpPr>
+        <p:spPr>
+          <a:xfrm>
+            <a:off x="3693291" y="4254614"/>
+            <a:ext cx="1530878" cy="461665"/>
+          </a:xfrm>
+          <a:prstGeom prst="rect">
+            <a:avLst/>
+          </a:prstGeom>
+          <a:noFill/>
+          <a:ln>
+            <a:noFill/>
+          </a:ln>
+        </p:spPr>
+        <p:txBody>
+          <a:bodyPr spcFirstLastPara="1" wrap="square" lIns="91425" tIns="45700" rIns="91425" bIns="45700" anchor="t" anchorCtr="0">
+            <a:noAutofit/>
+          </a:bodyPr>
+          <a:lstStyle/>
+          <a:p>
+            <a:pPr marL="0" marR="0" lvl="0" indent="0" algn="l" rtl="0">
+              <a:spcBef>
+                <a:spcPts val="0"/>
+              </a:spcBef>
+              <a:spcAft>
+                <a:spcPts val="0"/>
+              </a:spcAft>
+              <a:buNone/>
+            </a:pPr>
+            <a:r>
+              <a:rPr lang="en-US" sz="2400" b="1" dirty="0">
+                <a:solidFill>
+                  <a:srgbClr val="FF0000"/>
+                </a:solidFill>
+                <a:latin typeface="Calibri"/>
+                <a:ea typeface="Calibri"/>
+                <a:cs typeface="Calibri"/>
+                <a:sym typeface="Calibri"/>
+              </a:rPr>
+              <a:t>All People</a:t>
+            </a:r>
+            <a:endParaRPr sz="2400" b="1" dirty="0">
+              <a:solidFill>
+                <a:srgbClr val="FF0000"/>
+              </a:solidFill>
+              <a:latin typeface="Calibri"/>
+              <a:ea typeface="Calibri"/>
+              <a:cs typeface="Calibri"/>
+              <a:sym typeface="Calibri"/>
+            </a:endParaRPr>
+          </a:p>
+        </p:txBody>
+      </p:sp>
+      <p:pic>
+        <p:nvPicPr>
+          <p:cNvPr id="17" name="Google Shape;102;p13">
+            <a:extLst>
+              <a:ext uri="{FF2B5EF4-FFF2-40B4-BE49-F238E27FC236}">
+                <a16:creationId xmlns:a16="http://schemas.microsoft.com/office/drawing/2014/main" id="{5D5E0C1C-95DE-384B-AD65-D49C976EA70D}"/>
+              </a:ext>
+            </a:extLst>
+          </p:cNvPr>
+          <p:cNvPicPr preferRelativeResize="0"/>
+          <p:nvPr/>
+        </p:nvPicPr>
+        <p:blipFill rotWithShape="1">
+          <a:blip r:embed="rId5">
+            <a:alphaModFix/>
+          </a:blip>
+          <a:srcRect/>
+          <a:stretch/>
+        </p:blipFill>
+        <p:spPr>
+          <a:xfrm>
+            <a:off x="6903091" y="1553411"/>
+            <a:ext cx="2946400" cy="660400"/>
+          </a:xfrm>
+          <a:prstGeom prst="rect">
+            <a:avLst/>
+          </a:prstGeom>
+          <a:noFill/>
+          <a:ln w="50800" cap="flat" cmpd="sng">
+            <a:solidFill>
+              <a:srgbClr val="00B050"/>
+            </a:solidFill>
+            <a:prstDash val="solid"/>
+            <a:round/>
+            <a:headEnd type="none" w="sm" len="sm"/>
+            <a:tailEnd type="none" w="sm" len="sm"/>
+          </a:ln>
+        </p:spPr>
+      </p:pic>
+    </p:spTree>
+    <p:extLst>
+      <p:ext uri="{BB962C8B-B14F-4D97-AF65-F5344CB8AC3E}">
+        <p14:creationId xmlns:p14="http://schemas.microsoft.com/office/powerpoint/2010/main" val="4149736850"/>
+      </p:ext>
+    </p:extLst>
+  </p:cSld>
+  <p:clrMapOvr>
+    <a:masterClrMapping/>
+  </p:clrMapOvr>
+</p:sld>
+</file>
+
+<file path=ppt/slides/slide6.xml><?xml version="1.0" encoding="utf-8"?>
 <p:sld xmlns:a="http://schemas.openxmlformats.org/drawingml/2006/main" xmlns:r="http://schemas.openxmlformats.org/officeDocument/2006/relationships" xmlns:p="http://schemas.openxmlformats.org/presentationml/2006/main">
   <p:cSld>
     <p:spTree>
@@ -24126,8 +27344,8 @@
         </p:nvSpPr>
         <p:spPr>
           <a:xfrm>
-            <a:off x="189186" y="178676"/>
-            <a:ext cx="5906814" cy="6340197"/>
+            <a:off x="84912" y="85118"/>
+            <a:ext cx="5906814" cy="6771084"/>
           </a:xfrm>
           <a:prstGeom prst="rect">
             <a:avLst/>
@@ -24141,20 +27359,43 @@
           <a:lstStyle/>
           <a:p>
             <a:r>
-              <a:rPr lang="en-US" dirty="0"/>
+              <a:rPr lang="en-US" sz="1800" b="1" dirty="0"/>
               <a:t>Random Variable. Probability Distribution</a:t>
             </a:r>
           </a:p>
           <a:p>
-            <a:r>
-              <a:rPr lang="en-US" dirty="0"/>
-              <a:t>Random variable is a numerical variable taking different values.</a:t>
-            </a:r>
-          </a:p>
-          <a:p>
-            <a:r>
-              <a:rPr lang="en-US" dirty="0"/>
-              <a:t>Values may be discrete or continuous.</a:t>
+            <a:br>
+              <a:rPr lang="en-US" dirty="0"/>
+            </a:br>
+            <a:r>
+              <a:rPr lang="en-US" b="1" dirty="0">
+                <a:solidFill>
+                  <a:srgbClr val="0070C0"/>
+                </a:solidFill>
+              </a:rPr>
+              <a:t>Random variable </a:t>
+            </a:r>
+            <a:r>
+              <a:rPr lang="en-US" dirty="0"/>
+              <a:t>is a numerical variable taking different values.</a:t>
+            </a:r>
+          </a:p>
+          <a:p>
+            <a:r>
+              <a:rPr lang="en-US" dirty="0"/>
+              <a:t>Values may be </a:t>
+            </a:r>
+            <a:r>
+              <a:rPr lang="en-US" b="1" dirty="0">
+                <a:solidFill>
+                  <a:srgbClr val="0070C0"/>
+                </a:solidFill>
+              </a:rPr>
+              <a:t>discrete or continuous</a:t>
+            </a:r>
+            <a:r>
+              <a:rPr lang="en-US" dirty="0"/>
+              <a:t>.</a:t>
             </a:r>
           </a:p>
           <a:p>
@@ -24180,20 +27421,26 @@
           </a:p>
           <a:p>
             <a:r>
-              <a:rPr lang="en-US" dirty="0"/>
+              <a:rPr lang="en-US" sz="2400" b="1" dirty="0">
+                <a:solidFill>
+                  <a:srgbClr val="FF0000"/>
+                </a:solidFill>
+              </a:rPr>
               <a:t>Discrete Case</a:t>
             </a:r>
           </a:p>
           <a:p>
             <a:r>
-              <a:rPr lang="en-US" dirty="0"/>
-              <a:t>Probability function P(x) </a:t>
-            </a:r>
-          </a:p>
-          <a:p>
-            <a:r>
-              <a:rPr lang="en-US" dirty="0"/>
-              <a:t>of a discrete random variable “x” </a:t>
+              <a:rPr lang="en-US" b="1" dirty="0">
+                <a:solidFill>
+                  <a:srgbClr val="0070C0"/>
+                </a:solidFill>
+              </a:rPr>
+              <a:t>Probability function </a:t>
+            </a:r>
+            <a:r>
+              <a:rPr lang="en-US" dirty="0"/>
+              <a:t>P(x) of a discrete random variable “x” </a:t>
             </a:r>
           </a:p>
           <a:p>
@@ -24240,8 +27487,16 @@
           </a:p>
           <a:p>
             <a:r>
-              <a:rPr lang="en-US" dirty="0"/>
-              <a:t>Expected value is an weighted average of all values.</a:t>
+              <a:rPr lang="en-US" b="1" dirty="0">
+                <a:solidFill>
+                  <a:srgbClr val="0070C0"/>
+                </a:solidFill>
+              </a:rPr>
+              <a:t>Expected value </a:t>
+            </a:r>
+            <a:r>
+              <a:rPr lang="en-US" dirty="0"/>
+              <a:t>is an weighted average of all values.</a:t>
             </a:r>
           </a:p>
           <a:p>
@@ -24258,8 +27513,16 @@
           </a:p>
           <a:p>
             <a:r>
-              <a:rPr lang="en-US" dirty="0"/>
-              <a:t>Variance = sigma squared = sum( (Xi-E(x))**2 * P(Xi) )</a:t>
+              <a:rPr lang="en-US" b="1" dirty="0">
+                <a:solidFill>
+                  <a:srgbClr val="0070C0"/>
+                </a:solidFill>
+              </a:rPr>
+              <a:t>Variance = sigma squared </a:t>
+            </a:r>
+            <a:r>
+              <a:rPr lang="en-US" dirty="0"/>
+              <a:t>= sum( (Xi-E(x))**2 * P(Xi) )</a:t>
             </a:r>
           </a:p>
           <a:p>
@@ -24267,8 +27530,16 @@
           </a:p>
           <a:p>
             <a:r>
-              <a:rPr lang="en-US" dirty="0"/>
-              <a:t>Standard Deviation = sqrt(sigma squared)</a:t>
+              <a:rPr lang="en-US" b="1" dirty="0">
+                <a:solidFill>
+                  <a:srgbClr val="0070C0"/>
+                </a:solidFill>
+              </a:rPr>
+              <a:t>Standard Deviation </a:t>
+            </a:r>
+            <a:r>
+              <a:rPr lang="en-US" dirty="0"/>
+              <a:t>= sqrt(sigma squared)</a:t>
             </a:r>
           </a:p>
         </p:txBody>
@@ -24287,8 +27558,8 @@
         </p:nvSpPr>
         <p:spPr>
           <a:xfrm>
-            <a:off x="6096000" y="178676"/>
-            <a:ext cx="6011917" cy="6340197"/>
+            <a:off x="5991726" y="178676"/>
+            <a:ext cx="6200274" cy="6494085"/>
           </a:xfrm>
           <a:prstGeom prst="rect">
             <a:avLst/>
@@ -24317,7 +27588,11 @@
           </a:p>
           <a:p>
             <a:r>
-              <a:rPr lang="en-US" dirty="0"/>
+              <a:rPr lang="en-US" sz="2400" b="1" dirty="0">
+                <a:solidFill>
+                  <a:srgbClr val="FF0000"/>
+                </a:solidFill>
+              </a:rPr>
               <a:t>Continuous Case</a:t>
             </a:r>
           </a:p>
@@ -24331,7 +27606,7 @@
                   <a:srgbClr val="0070C0"/>
                 </a:solidFill>
               </a:rPr>
-              <a:t>Probability Density Function</a:t>
+              <a:t>Probability Density Function (PDF)</a:t>
             </a:r>
             <a:r>
               <a:rPr lang="en-US" dirty="0"/>
@@ -24369,7 +27644,11 @@
           </a:p>
           <a:p>
             <a:r>
-              <a:rPr lang="en-US" dirty="0"/>
+              <a:rPr lang="en-US" b="1" dirty="0">
+                <a:solidFill>
+                  <a:srgbClr val="0070C0"/>
+                </a:solidFill>
+              </a:rPr>
               <a:t>Cumulative Probability Function (CPF)</a:t>
             </a:r>
           </a:p>
@@ -24393,7 +27672,11 @@
           </a:p>
           <a:p>
             <a:r>
-              <a:rPr lang="en-US" dirty="0"/>
+              <a:rPr lang="en-US" b="1" dirty="0">
+                <a:solidFill>
+                  <a:srgbClr val="0070C0"/>
+                </a:solidFill>
+              </a:rPr>
               <a:t>The PDF is a first derivative of CPF.</a:t>
             </a:r>
           </a:p>
@@ -24427,7 +27710,11 @@
           </a:p>
           <a:p>
             <a:r>
-              <a:rPr lang="en-US" dirty="0"/>
+              <a:rPr lang="en-US" b="1" dirty="0">
+                <a:solidFill>
+                  <a:srgbClr val="0070C0"/>
+                </a:solidFill>
+              </a:rPr>
               <a:t>Mean value = Expected value</a:t>
             </a:r>
           </a:p>
@@ -24484,7 +27771,7 @@
 </p:sld>
 </file>
 
-<file path=ppt/slides/slide6.xml><?xml version="1.0" encoding="utf-8"?>
+<file path=ppt/slides/slide7.xml><?xml version="1.0" encoding="utf-8"?>
 <p:sld xmlns:a="http://schemas.openxmlformats.org/drawingml/2006/main" xmlns:r="http://schemas.openxmlformats.org/officeDocument/2006/relationships" xmlns:p="http://schemas.openxmlformats.org/presentationml/2006/main">
   <p:cSld>
     <p:spTree>
@@ -24541,18 +27828,30 @@
           <a:p>
             <a:r>
               <a:rPr lang="en-US" dirty="0"/>
-              <a:t>– https://</a:t>
-            </a:r>
-            <a:r>
-              <a:rPr lang="en-US" dirty="0" err="1"/>
+              <a:t>– </a:t>
+            </a:r>
+            <a:r>
+              <a:rPr lang="en-US" dirty="0">
+                <a:hlinkClick r:id="rId2"/>
+              </a:rPr>
+              <a:t>https://</a:t>
+            </a:r>
+            <a:r>
+              <a:rPr lang="en-US" dirty="0" err="1">
+                <a:hlinkClick r:id="rId2"/>
+              </a:rPr>
               <a:t>en.wikipedia.org</a:t>
             </a:r>
             <a:r>
-              <a:rPr lang="en-US" dirty="0"/>
+              <a:rPr lang="en-US" dirty="0">
+                <a:hlinkClick r:id="rId2"/>
+              </a:rPr>
               <a:t>/wiki/</a:t>
             </a:r>
             <a:r>
-              <a:rPr lang="en-US" dirty="0" err="1"/>
+              <a:rPr lang="en-US" dirty="0" err="1">
+                <a:hlinkClick r:id="rId2"/>
+              </a:rPr>
               <a:t>Binomial_distribution</a:t>
             </a:r>
             <a:endParaRPr lang="en-US" dirty="0"/>
@@ -24711,7 +28010,11 @@
           </a:p>
           <a:p>
             <a:r>
-              <a:rPr lang="en-US" dirty="0"/>
+              <a:rPr lang="en-US" b="1" dirty="0">
+                <a:solidFill>
+                  <a:srgbClr val="0070C0"/>
+                </a:solidFill>
+              </a:rPr>
               <a:t>Factorial</a:t>
             </a:r>
           </a:p>
@@ -24918,328 +28221,6 @@
     <p:extLst>
       <p:ext uri="{BB962C8B-B14F-4D97-AF65-F5344CB8AC3E}">
         <p14:creationId xmlns:p14="http://schemas.microsoft.com/office/powerpoint/2010/main" val="2688709458"/>
-      </p:ext>
-    </p:extLst>
-  </p:cSld>
-  <p:clrMapOvr>
-    <a:masterClrMapping/>
-  </p:clrMapOvr>
-</p:sld>
-</file>
-
-<file path=ppt/slides/slide7.xml><?xml version="1.0" encoding="utf-8"?>
-<p:sld xmlns:a="http://schemas.openxmlformats.org/drawingml/2006/main" xmlns:r="http://schemas.openxmlformats.org/officeDocument/2006/relationships" xmlns:p="http://schemas.openxmlformats.org/presentationml/2006/main">
-  <p:cSld>
-    <p:spTree>
-      <p:nvGrpSpPr>
-        <p:cNvPr id="1" name=""/>
-        <p:cNvGrpSpPr/>
-        <p:nvPr/>
-      </p:nvGrpSpPr>
-      <p:grpSpPr>
-        <a:xfrm>
-          <a:off x="0" y="0"/>
-          <a:ext cx="0" cy="0"/>
-          <a:chOff x="0" y="0"/>
-          <a:chExt cx="0" cy="0"/>
-        </a:xfrm>
-      </p:grpSpPr>
-      <p:sp>
-        <p:nvSpPr>
-          <p:cNvPr id="4" name="TextBox 3">
-            <a:extLst>
-              <a:ext uri="{FF2B5EF4-FFF2-40B4-BE49-F238E27FC236}">
-                <a16:creationId xmlns:a16="http://schemas.microsoft.com/office/drawing/2014/main" id="{1EB5F268-965F-C142-A102-83C02389B555}"/>
-              </a:ext>
-            </a:extLst>
-          </p:cNvPr>
-          <p:cNvSpPr txBox="1"/>
-          <p:nvPr/>
-        </p:nvSpPr>
-        <p:spPr>
-          <a:xfrm>
-            <a:off x="189186" y="178676"/>
-            <a:ext cx="5906814" cy="5047536"/>
-          </a:xfrm>
-          <a:prstGeom prst="rect">
-            <a:avLst/>
-          </a:prstGeom>
-          <a:noFill/>
-        </p:spPr>
-        <p:txBody>
-          <a:bodyPr wrap="square" rtlCol="0">
-            <a:spAutoFit/>
-          </a:bodyPr>
-          <a:lstStyle/>
-          <a:p>
-            <a:r>
-              <a:rPr lang="en-US" dirty="0"/>
-              <a:t>Poisson and Exponential Distributions</a:t>
-            </a:r>
-          </a:p>
-          <a:p>
-            <a:r>
-              <a:rPr lang="en-US" dirty="0"/>
-              <a:t>– https://</a:t>
-            </a:r>
-            <a:r>
-              <a:rPr lang="en-US" dirty="0" err="1"/>
-              <a:t>en.wikipedia.org</a:t>
-            </a:r>
-            <a:r>
-              <a:rPr lang="en-US" dirty="0"/>
-              <a:t>/wiki/</a:t>
-            </a:r>
-            <a:r>
-              <a:rPr lang="en-US" dirty="0" err="1"/>
-              <a:t>Poisson_distribution</a:t>
-            </a:r>
-            <a:endParaRPr lang="en-US" dirty="0"/>
-          </a:p>
-          <a:p>
-            <a:r>
-              <a:rPr lang="en-US" dirty="0"/>
-              <a:t>– https://</a:t>
-            </a:r>
-            <a:r>
-              <a:rPr lang="en-US" dirty="0" err="1"/>
-              <a:t>en.wikipedia.org</a:t>
-            </a:r>
-            <a:r>
-              <a:rPr lang="en-US" dirty="0"/>
-              <a:t>/wiki/</a:t>
-            </a:r>
-            <a:r>
-              <a:rPr lang="en-US" dirty="0" err="1"/>
-              <a:t>Exponential_distribution</a:t>
-            </a:r>
-            <a:endParaRPr lang="en-US" dirty="0"/>
-          </a:p>
-          <a:p>
-            <a:endParaRPr lang="en-US" dirty="0"/>
-          </a:p>
-          <a:p>
-            <a:r>
-              <a:rPr lang="en-US" dirty="0"/>
-              <a:t>Suppose you are sitting near the road. </a:t>
-            </a:r>
-          </a:p>
-          <a:p>
-            <a:r>
-              <a:rPr lang="en-US" dirty="0"/>
-              <a:t>You notice that on average you see 10 cars passing by every minute </a:t>
-            </a:r>
-          </a:p>
-          <a:p>
-            <a:r>
-              <a:rPr lang="en-US" dirty="0"/>
-              <a:t>(we say – the rate lambda = 10/min). </a:t>
-            </a:r>
-          </a:p>
-          <a:p>
-            <a:r>
-              <a:rPr lang="en-US" dirty="0"/>
-              <a:t>Knowing the average rate, what would be the probability </a:t>
-            </a:r>
-          </a:p>
-          <a:p>
-            <a:r>
-              <a:rPr lang="en-US" dirty="0"/>
-              <a:t>of having only 5 cars in one minute? </a:t>
-            </a:r>
-          </a:p>
-          <a:p>
-            <a:r>
-              <a:rPr lang="en-US" dirty="0"/>
-              <a:t>Or 15 cars? Or any given number? </a:t>
-            </a:r>
-          </a:p>
-          <a:p>
-            <a:r>
-              <a:rPr lang="en-US" dirty="0"/>
-              <a:t>Poisson Probability P(k) is the probability of a given </a:t>
-            </a:r>
-          </a:p>
-          <a:p>
-            <a:r>
-              <a:rPr lang="en-US" dirty="0"/>
-              <a:t>number of events occurring in a fixed interval (of time) </a:t>
-            </a:r>
-          </a:p>
-          <a:p>
-            <a:r>
-              <a:rPr lang="en-US" dirty="0"/>
-              <a:t>if these events occur with a known average rate </a:t>
-            </a:r>
-          </a:p>
-          <a:p>
-            <a:r>
-              <a:rPr lang="en-US" dirty="0"/>
-              <a:t>and independently of each other </a:t>
-            </a:r>
-          </a:p>
-          <a:p>
-            <a:r>
-              <a:rPr lang="en-US" dirty="0"/>
-              <a:t>and of the time since the previous events.</a:t>
-            </a:r>
-          </a:p>
-          <a:p>
-            <a:endParaRPr lang="en-US" dirty="0"/>
-          </a:p>
-          <a:p>
-            <a:r>
-              <a:rPr lang="en-US" dirty="0"/>
-              <a:t>Poisson Formula</a:t>
-            </a:r>
-          </a:p>
-          <a:p>
-            <a:endParaRPr lang="en-US" dirty="0"/>
-          </a:p>
-          <a:p>
-            <a:r>
-              <a:rPr lang="en-US" dirty="0"/>
-              <a:t>P(x) = (lambda**x)*exp(-lambda)/x!</a:t>
-            </a:r>
-          </a:p>
-          <a:p>
-            <a:endParaRPr lang="en-US" dirty="0"/>
-          </a:p>
-          <a:p>
-            <a:r>
-              <a:rPr lang="en-US" dirty="0"/>
-              <a:t>For example, for x=0 (probability of zero events in given interval):</a:t>
-            </a:r>
-          </a:p>
-          <a:p>
-            <a:endParaRPr lang="en-US" dirty="0"/>
-          </a:p>
-          <a:p>
-            <a:r>
-              <a:rPr lang="en-US" dirty="0"/>
-              <a:t>P(0) = (lambda**0)*exp(-lambda)/0! = 1*exp(-lambda)/1 = exp(-lambda)</a:t>
-            </a:r>
-          </a:p>
-        </p:txBody>
-      </p:sp>
-      <p:sp>
-        <p:nvSpPr>
-          <p:cNvPr id="5" name="TextBox 4">
-            <a:extLst>
-              <a:ext uri="{FF2B5EF4-FFF2-40B4-BE49-F238E27FC236}">
-                <a16:creationId xmlns:a16="http://schemas.microsoft.com/office/drawing/2014/main" id="{E72EEA3B-9D50-A145-B8FE-B6686486D979}"/>
-              </a:ext>
-            </a:extLst>
-          </p:cNvPr>
-          <p:cNvSpPr txBox="1"/>
-          <p:nvPr/>
-        </p:nvSpPr>
-        <p:spPr>
-          <a:xfrm>
-            <a:off x="6096000" y="178676"/>
-            <a:ext cx="6011917" cy="3816429"/>
-          </a:xfrm>
-          <a:prstGeom prst="rect">
-            <a:avLst/>
-          </a:prstGeom>
-          <a:noFill/>
-        </p:spPr>
-        <p:txBody>
-          <a:bodyPr wrap="square" rtlCol="0">
-            <a:spAutoFit/>
-          </a:bodyPr>
-          <a:lstStyle/>
-          <a:p>
-            <a:r>
-              <a:rPr lang="en-US" sz="1800" b="1" dirty="0">
-                <a:solidFill>
-                  <a:srgbClr val="0070C0"/>
-                </a:solidFill>
-              </a:rPr>
-              <a:t>Poisson Distribution</a:t>
-            </a:r>
-          </a:p>
-          <a:p>
-            <a:endParaRPr lang="en-US" dirty="0"/>
-          </a:p>
-          <a:p>
-            <a:r>
-              <a:rPr lang="en-US" dirty="0"/>
-              <a:t>Intervals between Poisson events distributed exponentially.</a:t>
-            </a:r>
-          </a:p>
-          <a:p>
-            <a:endParaRPr lang="en-US" dirty="0"/>
-          </a:p>
-          <a:p>
-            <a:r>
-              <a:rPr lang="en-US" dirty="0"/>
-              <a:t>If we have events happening which follow Poisson Distribution, </a:t>
-            </a:r>
-          </a:p>
-          <a:p>
-            <a:r>
-              <a:rPr lang="en-US" dirty="0"/>
-              <a:t>we can measure the time intervals between these events.</a:t>
-            </a:r>
-          </a:p>
-          <a:p>
-            <a:endParaRPr lang="en-US" dirty="0"/>
-          </a:p>
-          <a:p>
-            <a:r>
-              <a:rPr lang="en-US" dirty="0"/>
-              <a:t>Question: How these times will be distributed?</a:t>
-            </a:r>
-          </a:p>
-          <a:p>
-            <a:endParaRPr lang="en-US" dirty="0"/>
-          </a:p>
-          <a:p>
-            <a:r>
-              <a:rPr lang="en-US" dirty="0"/>
-              <a:t>Answer: These times will have exponential distribution </a:t>
-            </a:r>
-          </a:p>
-          <a:p>
-            <a:r>
-              <a:rPr lang="en-US" dirty="0"/>
-              <a:t>with Probability Density Function (PDF) as:</a:t>
-            </a:r>
-          </a:p>
-          <a:p>
-            <a:endParaRPr lang="en-US" dirty="0"/>
-          </a:p>
-          <a:p>
-            <a:r>
-              <a:rPr lang="en-US" dirty="0"/>
-              <a:t>f(t) = lambda*exp(-lambda*t)</a:t>
-            </a:r>
-          </a:p>
-          <a:p>
-            <a:endParaRPr lang="en-US" dirty="0"/>
-          </a:p>
-          <a:p>
-            <a:r>
-              <a:rPr lang="en-US" dirty="0"/>
-              <a:t>The average time interval will be (1/lambda).</a:t>
-            </a:r>
-          </a:p>
-          <a:p>
-            <a:r>
-              <a:rPr lang="en-US" dirty="0"/>
-              <a:t>Standard deviation happens to be the same (1/lambda).</a:t>
-            </a:r>
-          </a:p>
-          <a:p>
-            <a:endParaRPr lang="en-US" dirty="0"/>
-          </a:p>
-        </p:txBody>
-      </p:sp>
-    </p:spTree>
-    <p:extLst>
-      <p:ext uri="{BB962C8B-B14F-4D97-AF65-F5344CB8AC3E}">
-        <p14:creationId xmlns:p14="http://schemas.microsoft.com/office/powerpoint/2010/main" val="2701588738"/>
       </p:ext>
     </p:extLst>
   </p:cSld>
@@ -25281,7 +28262,7 @@
         <p:spPr>
           <a:xfrm>
             <a:off x="189186" y="178676"/>
-            <a:ext cx="5906814" cy="2893100"/>
+            <a:ext cx="5906814" cy="5262979"/>
           </a:xfrm>
           <a:prstGeom prst="rect">
             <a:avLst/>
@@ -25296,76 +28277,186 @@
           <a:p>
             <a:r>
               <a:rPr lang="en-US" dirty="0"/>
-              <a:t>Uniform and Normal Distributions. Central Limit Theorem.</a:t>
-            </a:r>
-          </a:p>
-          <a:p>
-            <a:r>
-              <a:rPr lang="en-US" dirty="0"/>
-              <a:t>Uniform Distribution</a:t>
-            </a:r>
-          </a:p>
-          <a:p>
+              <a:t>Poisson and Exponential Distributions</a:t>
+            </a:r>
+          </a:p>
+          <a:p>
+            <a:r>
+              <a:rPr lang="en-US" dirty="0"/>
+              <a:t>– </a:t>
+            </a:r>
+            <a:r>
+              <a:rPr lang="en-US" dirty="0">
+                <a:hlinkClick r:id="rId2"/>
+              </a:rPr>
+              <a:t>https://</a:t>
+            </a:r>
+            <a:r>
+              <a:rPr lang="en-US" dirty="0" err="1">
+                <a:hlinkClick r:id="rId2"/>
+              </a:rPr>
+              <a:t>en.wikipedia.org</a:t>
+            </a:r>
+            <a:r>
+              <a:rPr lang="en-US" dirty="0">
+                <a:hlinkClick r:id="rId2"/>
+              </a:rPr>
+              <a:t>/wiki/</a:t>
+            </a:r>
+            <a:r>
+              <a:rPr lang="en-US" dirty="0" err="1">
+                <a:hlinkClick r:id="rId2"/>
+              </a:rPr>
+              <a:t>Poisson_distribution</a:t>
+            </a:r>
             <a:endParaRPr lang="en-US" dirty="0"/>
           </a:p>
           <a:p>
             <a:r>
               <a:rPr lang="en-US" dirty="0"/>
-              <a:t>If some value can change between some minimum and maximum </a:t>
-            </a:r>
-          </a:p>
-          <a:p>
-            <a:r>
-              <a:rPr lang="en-US" dirty="0"/>
-              <a:t>values a &amp; b, and the probability of any value in interval [</a:t>
-            </a:r>
-            <a:r>
-              <a:rPr lang="en-US" dirty="0" err="1"/>
-              <a:t>a,b</a:t>
-            </a:r>
-            <a:r>
-              <a:rPr lang="en-US" dirty="0"/>
-              <a:t>] </a:t>
-            </a:r>
-          </a:p>
-          <a:p>
-            <a:r>
-              <a:rPr lang="en-US" dirty="0"/>
-              <a:t>is the same, then we say that we have uniform distribution.</a:t>
-            </a:r>
-          </a:p>
-          <a:p>
+              <a:t>– </a:t>
+            </a:r>
+            <a:r>
+              <a:rPr lang="en-US" dirty="0">
+                <a:hlinkClick r:id="rId3"/>
+              </a:rPr>
+              <a:t>https://</a:t>
+            </a:r>
+            <a:r>
+              <a:rPr lang="en-US" dirty="0" err="1">
+                <a:hlinkClick r:id="rId3"/>
+              </a:rPr>
+              <a:t>en.wikipedia.org</a:t>
+            </a:r>
+            <a:r>
+              <a:rPr lang="en-US" dirty="0">
+                <a:hlinkClick r:id="rId3"/>
+              </a:rPr>
+              <a:t>/wiki/</a:t>
+            </a:r>
+            <a:r>
+              <a:rPr lang="en-US" dirty="0" err="1">
+                <a:hlinkClick r:id="rId3"/>
+              </a:rPr>
+              <a:t>Exponential_distribution</a:t>
+            </a:r>
             <a:endParaRPr lang="en-US" dirty="0"/>
           </a:p>
           <a:p>
-            <a:r>
-              <a:rPr lang="en-US" dirty="0"/>
-              <a:t>The PDF (Probability Density Function) for Uniform Distribution </a:t>
-            </a:r>
-          </a:p>
-          <a:p>
-            <a:r>
-              <a:rPr lang="en-US" dirty="0"/>
-              <a:t>looks like a rectangle with the height (1/(b-a)), </a:t>
-            </a:r>
-          </a:p>
-          <a:p>
-            <a:r>
-              <a:rPr lang="en-US" dirty="0"/>
-              <a:t>so that the total area under the curve is exactly 1.</a:t>
-            </a:r>
-          </a:p>
-          <a:p>
             <a:endParaRPr lang="en-US" dirty="0"/>
           </a:p>
           <a:p>
             <a:r>
               <a:rPr lang="en-US" dirty="0"/>
-              <a:t>More: Uniform distribution (continuous), Normal Distribution</a:t>
+              <a:t>Suppose you are sitting near the road. </a:t>
+            </a:r>
+          </a:p>
+          <a:p>
+            <a:r>
+              <a:rPr lang="en-US" dirty="0"/>
+              <a:t>You notice that on average you see 10 cars passing by every minute </a:t>
+            </a:r>
+          </a:p>
+          <a:p>
+            <a:r>
+              <a:rPr lang="en-US" dirty="0"/>
+              <a:t>(we say: the rate lambda = 10/min). </a:t>
+            </a:r>
+          </a:p>
+          <a:p>
+            <a:r>
+              <a:rPr lang="en-US" dirty="0"/>
+              <a:t>Knowing the average rate, what would be the probability </a:t>
+            </a:r>
+          </a:p>
+          <a:p>
+            <a:r>
+              <a:rPr lang="en-US" dirty="0"/>
+              <a:t>of having only 5 cars in one minute? </a:t>
+            </a:r>
+          </a:p>
+          <a:p>
+            <a:r>
+              <a:rPr lang="en-US" dirty="0"/>
+              <a:t>Or 15 cars? Or any given number? </a:t>
             </a:r>
           </a:p>
           <a:p>
             <a:endParaRPr lang="en-US" dirty="0"/>
+          </a:p>
+          <a:p>
+            <a:r>
+              <a:rPr lang="en-US" b="1" dirty="0">
+                <a:solidFill>
+                  <a:srgbClr val="0070C0"/>
+                </a:solidFill>
+              </a:rPr>
+              <a:t>Poisson Probability </a:t>
+            </a:r>
+            <a:r>
+              <a:rPr lang="en-US" dirty="0"/>
+              <a:t>P(k) is the probability of a given </a:t>
+            </a:r>
+          </a:p>
+          <a:p>
+            <a:r>
+              <a:rPr lang="en-US" dirty="0"/>
+              <a:t>number of events occurring in a fixed interval (of time) </a:t>
+            </a:r>
+          </a:p>
+          <a:p>
+            <a:r>
+              <a:rPr lang="en-US" dirty="0"/>
+              <a:t>if these events occur with a known average rate </a:t>
+            </a:r>
+          </a:p>
+          <a:p>
+            <a:r>
+              <a:rPr lang="en-US" dirty="0"/>
+              <a:t>and independently of each other </a:t>
+            </a:r>
+          </a:p>
+          <a:p>
+            <a:r>
+              <a:rPr lang="en-US" dirty="0"/>
+              <a:t>and of the time since the previous events.</a:t>
+            </a:r>
+          </a:p>
+          <a:p>
+            <a:endParaRPr lang="en-US" dirty="0"/>
+          </a:p>
+          <a:p>
+            <a:r>
+              <a:rPr lang="en-US" dirty="0"/>
+              <a:t>Poisson Formula</a:t>
+            </a:r>
+          </a:p>
+          <a:p>
+            <a:endParaRPr lang="en-US" dirty="0"/>
+          </a:p>
+          <a:p>
+            <a:r>
+              <a:rPr lang="en-US" dirty="0"/>
+              <a:t>P(x) = (lambda**x)*exp(-lambda)/x!</a:t>
+            </a:r>
+          </a:p>
+          <a:p>
+            <a:endParaRPr lang="en-US" dirty="0"/>
+          </a:p>
+          <a:p>
+            <a:r>
+              <a:rPr lang="en-US" dirty="0"/>
+              <a:t>For example, for x=0 (probability of zero events in given interval):</a:t>
+            </a:r>
+          </a:p>
+          <a:p>
+            <a:endParaRPr lang="en-US" dirty="0"/>
+          </a:p>
+          <a:p>
+            <a:r>
+              <a:rPr lang="en-US" dirty="0"/>
+              <a:t>P(0) = (lambda**0)*exp(-lambda)/0! = 1*exp(-lambda)/1 = exp(-lambda)</a:t>
+            </a:r>
           </a:p>
         </p:txBody>
       </p:sp>
@@ -25383,8 +28474,8 @@
         </p:nvSpPr>
         <p:spPr>
           <a:xfrm>
-            <a:off x="6096000" y="178676"/>
-            <a:ext cx="6011917" cy="5909310"/>
+            <a:off x="6096000" y="76451"/>
+            <a:ext cx="6011917" cy="3816429"/>
           </a:xfrm>
           <a:prstGeom prst="rect">
             <a:avLst/>
@@ -25398,8 +28489,12 @@
           <a:lstStyle/>
           <a:p>
             <a:r>
-              <a:rPr lang="en-US" dirty="0"/>
-              <a:t>Normal (Gaussian Bell-shaped) Distribution</a:t>
+              <a:rPr lang="en-US" sz="1800" b="1" dirty="0">
+                <a:solidFill>
+                  <a:srgbClr val="0070C0"/>
+                </a:solidFill>
+              </a:rPr>
+              <a:t>Poisson Distribution</a:t>
             </a:r>
           </a:p>
           <a:p>
@@ -25408,31 +28503,7 @@
           <a:p>
             <a:r>
               <a:rPr lang="en-US" dirty="0"/>
-              <a:t>The basic shape of the PDF is exp(-x*x/2) </a:t>
-            </a:r>
-          </a:p>
-          <a:p>
-            <a:r>
-              <a:rPr lang="en-US" dirty="0"/>
-              <a:t>You need to add a coefficient to normalize it to 1 </a:t>
-            </a:r>
-          </a:p>
-          <a:p>
-            <a:r>
-              <a:rPr lang="en-US" dirty="0"/>
-              <a:t>(means – make area under the curve equal to exactly 1). </a:t>
-            </a:r>
-          </a:p>
-          <a:p>
-            <a:r>
-              <a:rPr lang="en-US" dirty="0"/>
-              <a:t>You can also have the curves have different position </a:t>
-            </a:r>
-          </a:p>
-          <a:p>
-            <a:r>
-              <a:rPr lang="en-US" dirty="0"/>
-              <a:t>(average value) and different width (sigma).</a:t>
+              <a:t>Intervals between Poisson events distributed exponentially.</a:t>
             </a:r>
           </a:p>
           <a:p>
@@ -25441,7 +28512,13 @@
           <a:p>
             <a:r>
               <a:rPr lang="en-US" dirty="0"/>
-              <a:t>Normal Distribution</a:t>
+              <a:t>If we have events happening which follow Poisson Distribution, </a:t>
+            </a:r>
+          </a:p>
+          <a:p>
+            <a:r>
+              <a:rPr lang="en-US" dirty="0"/>
+              <a:t>we can measure the time intervals between these events.</a:t>
             </a:r>
           </a:p>
           <a:p>
@@ -25450,7 +28527,7 @@
           <a:p>
             <a:r>
               <a:rPr lang="en-US" dirty="0"/>
-              <a:t>Please see Generic formula and shape.</a:t>
+              <a:t>Question: How these times will be distributed?</a:t>
             </a:r>
           </a:p>
           <a:p>
@@ -25459,31 +28536,13 @@
           <a:p>
             <a:r>
               <a:rPr lang="en-US" dirty="0"/>
-              <a:t>The normal distribution is very common in nature. </a:t>
-            </a:r>
-          </a:p>
-          <a:p>
-            <a:r>
-              <a:rPr lang="en-US" dirty="0"/>
-              <a:t>Because when we have big number of sets of variables, </a:t>
-            </a:r>
-          </a:p>
-          <a:p>
-            <a:r>
-              <a:rPr lang="en-US" dirty="0"/>
-              <a:t>the distribution of parameters of these sets (for example, averages) </a:t>
-            </a:r>
-          </a:p>
-          <a:p>
-            <a:r>
-              <a:rPr lang="en-US" dirty="0"/>
-              <a:t>tend to converge to this bell form. </a:t>
-            </a:r>
-          </a:p>
-          <a:p>
-            <a:r>
-              <a:rPr lang="en-US" dirty="0"/>
-              <a:t>This fact is called Central Limit Theorem.</a:t>
+              <a:t>Answer: These times will have exponential distribution </a:t>
+            </a:r>
+          </a:p>
+          <a:p>
+            <a:r>
+              <a:rPr lang="en-US" dirty="0"/>
+              <a:t>with Probability Density Function (PDF) as:</a:t>
             </a:r>
           </a:p>
           <a:p>
@@ -25492,25 +28551,7 @@
           <a:p>
             <a:r>
               <a:rPr lang="en-US" dirty="0"/>
-              <a:t>In other words, suppose we have a variable with exponential </a:t>
-            </a:r>
-          </a:p>
-          <a:p>
-            <a:r>
-              <a:rPr lang="en-US" dirty="0"/>
-              <a:t>distribution (or any other distribution). </a:t>
-            </a:r>
-          </a:p>
-          <a:p>
-            <a:r>
-              <a:rPr lang="en-US" dirty="0"/>
-              <a:t>Suppose we get a sample set of N1 values, and we have N2 such sets. </a:t>
-            </a:r>
-          </a:p>
-          <a:p>
-            <a:r>
-              <a:rPr lang="en-US" dirty="0"/>
-              <a:t>We calculate an average in each set – so we have N2 average values.</a:t>
+              <a:t>f(t) = lambda*exp(-lambda*t)</a:t>
             </a:r>
           </a:p>
           <a:p>
@@ -25519,30 +28560,90 @@
           <a:p>
             <a:r>
               <a:rPr lang="en-US" dirty="0"/>
-              <a:t>Question: How will these average values be distributed?</a:t>
+              <a:t>The average time interval will be (1/lambda).</a:t>
+            </a:r>
+          </a:p>
+          <a:p>
+            <a:r>
+              <a:rPr lang="en-US" dirty="0"/>
+              <a:t>Standard deviation happens to be the same (1/lambda).</a:t>
             </a:r>
           </a:p>
           <a:p>
             <a:endParaRPr lang="en-US" dirty="0"/>
-          </a:p>
-          <a:p>
-            <a:r>
-              <a:rPr lang="en-US" dirty="0"/>
-              <a:t>Answer: As N1 &amp; N2 become big enough, the distribution </a:t>
-            </a:r>
-          </a:p>
-          <a:p>
-            <a:r>
-              <a:rPr lang="en-US" dirty="0"/>
-              <a:t>will get close to the Normal Gaussian bell curve.</a:t>
-            </a:r>
           </a:p>
         </p:txBody>
       </p:sp>
+      <p:pic>
+        <p:nvPicPr>
+          <p:cNvPr id="3" name="Picture 2">
+            <a:extLst>
+              <a:ext uri="{FF2B5EF4-FFF2-40B4-BE49-F238E27FC236}">
+                <a16:creationId xmlns:a16="http://schemas.microsoft.com/office/drawing/2014/main" id="{BFF6AF49-4219-9540-B46A-090D8831AC8E}"/>
+              </a:ext>
+            </a:extLst>
+          </p:cNvPr>
+          <p:cNvPicPr>
+            <a:picLocks noChangeAspect="1"/>
+          </p:cNvPicPr>
+          <p:nvPr/>
+        </p:nvPicPr>
+        <p:blipFill>
+          <a:blip r:embed="rId4" cstate="email">
+            <a:extLst>
+              <a:ext uri="{28A0092B-C50C-407E-A947-70E740481C1C}">
+                <a14:useLocalDpi xmlns:a14="http://schemas.microsoft.com/office/drawing/2010/main"/>
+              </a:ext>
+            </a:extLst>
+          </a:blip>
+          <a:stretch>
+            <a:fillRect/>
+          </a:stretch>
+        </p:blipFill>
+        <p:spPr>
+          <a:xfrm>
+            <a:off x="6232427" y="4146255"/>
+            <a:ext cx="1714500" cy="1295400"/>
+          </a:xfrm>
+          <a:prstGeom prst="rect">
+            <a:avLst/>
+          </a:prstGeom>
+        </p:spPr>
+      </p:pic>
+      <p:pic>
+        <p:nvPicPr>
+          <p:cNvPr id="6" name="Picture 5">
+            <a:extLst>
+              <a:ext uri="{FF2B5EF4-FFF2-40B4-BE49-F238E27FC236}">
+                <a16:creationId xmlns:a16="http://schemas.microsoft.com/office/drawing/2014/main" id="{601F9319-35DE-E942-8DC1-E7E7E7414475}"/>
+              </a:ext>
+            </a:extLst>
+          </p:cNvPr>
+          <p:cNvPicPr>
+            <a:picLocks noChangeAspect="1"/>
+          </p:cNvPicPr>
+          <p:nvPr/>
+        </p:nvPicPr>
+        <p:blipFill>
+          <a:blip r:embed="rId5"/>
+          <a:stretch>
+            <a:fillRect/>
+          </a:stretch>
+        </p:blipFill>
+        <p:spPr>
+          <a:xfrm>
+            <a:off x="8786724" y="3892880"/>
+            <a:ext cx="3395131" cy="2724488"/>
+          </a:xfrm>
+          <a:prstGeom prst="rect">
+            <a:avLst/>
+          </a:prstGeom>
+        </p:spPr>
+      </p:pic>
     </p:spTree>
     <p:extLst>
       <p:ext uri="{BB962C8B-B14F-4D97-AF65-F5344CB8AC3E}">
-        <p14:creationId xmlns:p14="http://schemas.microsoft.com/office/powerpoint/2010/main" val="3913745046"/>
+        <p14:creationId xmlns:p14="http://schemas.microsoft.com/office/powerpoint/2010/main" val="2701588738"/>
       </p:ext>
     </p:extLst>
   </p:cSld>
@@ -25584,7 +28685,7 @@
         <p:spPr>
           <a:xfrm>
             <a:off x="189186" y="178676"/>
-            <a:ext cx="5906814" cy="5478423"/>
+            <a:ext cx="5906814" cy="2400657"/>
           </a:xfrm>
           <a:prstGeom prst="rect">
             <a:avLst/>
@@ -25598,28 +28699,57 @@
           <a:lstStyle/>
           <a:p>
             <a:r>
-              <a:rPr lang="en-US" dirty="0"/>
-              <a:t>Interesting that if the original variable has some other </a:t>
-            </a:r>
-          </a:p>
-          <a:p>
-            <a:r>
-              <a:rPr lang="en-US" dirty="0"/>
-              <a:t>distribution (not exponential, but something else – uniform, </a:t>
-            </a:r>
-          </a:p>
-          <a:p>
-            <a:r>
-              <a:rPr lang="en-US" dirty="0"/>
-              <a:t>Poisson, </a:t>
+              <a:rPr lang="en-US" sz="2400" b="1" dirty="0">
+                <a:solidFill>
+                  <a:srgbClr val="0070C0"/>
+                </a:solidFill>
+              </a:rPr>
+              <a:t>Uniform and Normal Distributions. </a:t>
+            </a:r>
+            <a:br>
+              <a:rPr lang="en-US" sz="2400" b="1" dirty="0">
+                <a:solidFill>
+                  <a:srgbClr val="0070C0"/>
+                </a:solidFill>
+              </a:rPr>
+            </a:br>
+            <a:endParaRPr lang="en-US" dirty="0"/>
+          </a:p>
+          <a:p>
+            <a:r>
+              <a:rPr lang="en-US" b="1" dirty="0">
+                <a:solidFill>
+                  <a:srgbClr val="0070C0"/>
+                </a:solidFill>
+              </a:rPr>
+              <a:t>Uniform Distribution</a:t>
+            </a:r>
+            <a:endParaRPr lang="en-US" dirty="0"/>
+          </a:p>
+          <a:p>
+            <a:r>
+              <a:rPr lang="en-US" dirty="0"/>
+              <a:t>If some value can change between some minimum and maximum </a:t>
+            </a:r>
+          </a:p>
+          <a:p>
+            <a:r>
+              <a:rPr lang="en-US" dirty="0"/>
+              <a:t>values a &amp; b, and the probability of any value in interval [</a:t>
             </a:r>
             <a:r>
               <a:rPr lang="en-US" dirty="0" err="1"/>
-              <a:t>etc</a:t>
-            </a:r>
-            <a:r>
-              <a:rPr lang="en-US" dirty="0"/>
-              <a:t>), we will still get the Normal distribution!</a:t>
+              <a:t>a,b</a:t>
+            </a:r>
+            <a:r>
+              <a:rPr lang="en-US" dirty="0"/>
+              <a:t>] </a:t>
+            </a:r>
+          </a:p>
+          <a:p>
+            <a:r>
+              <a:rPr lang="en-US" dirty="0"/>
+              <a:t>is the same, then we say that we have uniform distribution.</a:t>
             </a:r>
           </a:p>
           <a:p>
@@ -25628,144 +28758,20 @@
           <a:p>
             <a:r>
               <a:rPr lang="en-US" dirty="0"/>
-              <a:t>See Illustration of the central limit theorem. </a:t>
-            </a:r>
-          </a:p>
-          <a:p>
-            <a:r>
-              <a:rPr lang="en-US" dirty="0"/>
-              <a:t>On that page you can select the shape of the underlying </a:t>
-            </a:r>
-          </a:p>
-          <a:p>
-            <a:r>
-              <a:rPr lang="en-US" dirty="0"/>
-              <a:t>distribution and see how regardless of that distribution, </a:t>
-            </a:r>
-          </a:p>
-          <a:p>
-            <a:r>
-              <a:rPr lang="en-US" dirty="0"/>
-              <a:t>the result is always the Normal distribution.</a:t>
-            </a:r>
-          </a:p>
-          <a:p>
-            <a:endParaRPr lang="en-US" dirty="0"/>
-          </a:p>
-          <a:p>
-            <a:r>
-              <a:rPr lang="en-US" dirty="0"/>
-              <a:t>See also:</a:t>
-            </a:r>
-          </a:p>
-          <a:p>
-            <a:endParaRPr lang="en-US" dirty="0"/>
-          </a:p>
-          <a:p>
-            <a:r>
-              <a:rPr lang="en-US" dirty="0"/>
-              <a:t>Central Limit Theorem – Uniform Distribution</a:t>
-            </a:r>
-          </a:p>
-          <a:p>
-            <a:r>
-              <a:rPr lang="en-US" dirty="0"/>
-              <a:t>Central Limit Theorem – Parabolic Distribution</a:t>
-            </a:r>
-          </a:p>
-          <a:p>
-            <a:r>
-              <a:rPr lang="en-US" dirty="0"/>
-              <a:t>Central Limit Theorem – Triangular Distribution</a:t>
-            </a:r>
-          </a:p>
-          <a:p>
-            <a:r>
-              <a:rPr lang="en-US" dirty="0"/>
-              <a:t>There are also some nice animated demonstrations – just google for them.</a:t>
-            </a:r>
-          </a:p>
-          <a:p>
-            <a:endParaRPr lang="en-US" dirty="0"/>
-          </a:p>
-          <a:p>
-            <a:r>
-              <a:rPr lang="en-US" dirty="0"/>
-              <a:t>De </a:t>
-            </a:r>
-            <a:r>
-              <a:rPr lang="en-US" dirty="0" err="1"/>
-              <a:t>Moivre</a:t>
-            </a:r>
-            <a:r>
-              <a:rPr lang="en-US" dirty="0"/>
-              <a:t>–Laplace theorem</a:t>
-            </a:r>
-          </a:p>
-          <a:p>
-            <a:endParaRPr lang="en-US" dirty="0"/>
-          </a:p>
-          <a:p>
-            <a:r>
-              <a:rPr lang="en-US" dirty="0"/>
-              <a:t>De </a:t>
-            </a:r>
-            <a:r>
-              <a:rPr lang="en-US" dirty="0" err="1"/>
-              <a:t>Moire</a:t>
-            </a:r>
-            <a:r>
-              <a:rPr lang="en-US" dirty="0"/>
-              <a:t>-Laplace theorem is a simple demonstration </a:t>
-            </a:r>
-          </a:p>
-          <a:p>
-            <a:r>
-              <a:rPr lang="en-US" dirty="0"/>
-              <a:t>how a symmetrical binomial distribution can be approximated </a:t>
-            </a:r>
-          </a:p>
-          <a:p>
-            <a:r>
-              <a:rPr lang="en-US" dirty="0"/>
-              <a:t>by Gaussian bell curve (under certain conditions). </a:t>
-            </a:r>
-          </a:p>
-          <a:p>
-            <a:r>
-              <a:rPr lang="en-US" dirty="0"/>
-              <a:t>See video demonstration below.</a:t>
-            </a:r>
-          </a:p>
-          <a:p>
-            <a:endParaRPr lang="en-US" dirty="0"/>
-          </a:p>
-          <a:p>
-            <a:r>
-              <a:rPr lang="en-US" dirty="0"/>
-              <a:t>https://</a:t>
-            </a:r>
-            <a:r>
-              <a:rPr lang="en-US" dirty="0" err="1"/>
-              <a:t>en.wikipedia.org</a:t>
-            </a:r>
-            <a:r>
-              <a:rPr lang="en-US" dirty="0"/>
-              <a:t>/wiki/</a:t>
-            </a:r>
-            <a:r>
-              <a:rPr lang="en-US" dirty="0" err="1"/>
-              <a:t>De_Moivre</a:t>
-            </a:r>
-            <a:r>
-              <a:rPr lang="en-US" dirty="0"/>
-              <a:t>–</a:t>
-            </a:r>
-            <a:r>
-              <a:rPr lang="en-US" dirty="0" err="1"/>
-              <a:t>Laplace_theorem</a:t>
-            </a:r>
-            <a:endParaRPr lang="en-US" dirty="0"/>
+              <a:t>The PDF (Probability Density Function) for Uniform Distribution </a:t>
+            </a:r>
+          </a:p>
+          <a:p>
+            <a:r>
+              <a:rPr lang="en-US" dirty="0"/>
+              <a:t>looks like a rectangle with the height (1/(b-a)), </a:t>
+            </a:r>
+          </a:p>
+          <a:p>
+            <a:r>
+              <a:rPr lang="en-US" dirty="0"/>
+              <a:t>so that the total area under the curve is exactly 1.</a:t>
+            </a:r>
           </a:p>
         </p:txBody>
       </p:sp>
@@ -25783,8 +28789,8 @@
         </p:nvSpPr>
         <p:spPr>
           <a:xfrm>
-            <a:off x="6096000" y="178676"/>
-            <a:ext cx="6011917" cy="6340197"/>
+            <a:off x="6096000" y="252354"/>
+            <a:ext cx="6011917" cy="5447645"/>
           </a:xfrm>
           <a:prstGeom prst="rect">
             <a:avLst/>
@@ -25798,150 +28804,338 @@
           <a:lstStyle/>
           <a:p>
             <a:r>
-              <a:rPr lang="en-US" dirty="0"/>
-              <a:t>Introduction into Statistics</a:t>
-            </a:r>
-          </a:p>
-          <a:p>
-            <a:endParaRPr lang="en-US" dirty="0"/>
-          </a:p>
-          <a:p>
-            <a:r>
-              <a:rPr lang="en-US" dirty="0"/>
-              <a:t>“Statistics is the study of the collection, analysis, </a:t>
-            </a:r>
-          </a:p>
-          <a:p>
-            <a:r>
-              <a:rPr lang="en-US" dirty="0"/>
-              <a:t>interpretation, presentation, and organization of data.” </a:t>
-            </a:r>
-          </a:p>
-          <a:p>
-            <a:r>
-              <a:rPr lang="en-US" dirty="0"/>
-              <a:t>( Source: Wikipedia article about Statistics.)</a:t>
-            </a:r>
-          </a:p>
-          <a:p>
-            <a:endParaRPr lang="en-US" dirty="0"/>
-          </a:p>
-          <a:p>
-            <a:r>
-              <a:rPr lang="en-US" dirty="0"/>
-              <a:t>Being a Statistician is the major part of being a Data Scientist. </a:t>
-            </a:r>
-          </a:p>
-          <a:p>
-            <a:r>
-              <a:rPr lang="en-US" dirty="0"/>
-              <a:t>And it is tricky, because there is easy to misuse statistics:</a:t>
-            </a:r>
-          </a:p>
-          <a:p>
-            <a:r>
-              <a:rPr lang="en-US" dirty="0"/>
-              <a:t>“There are three kinds of lies: lies, damned lies, and statistics.” </a:t>
-            </a:r>
-          </a:p>
-          <a:p>
-            <a:r>
-              <a:rPr lang="en-US" dirty="0"/>
-              <a:t>(Source: Lies, damned lies, and statistics)</a:t>
-            </a:r>
-          </a:p>
-          <a:p>
-            <a:endParaRPr lang="en-US" dirty="0"/>
-          </a:p>
-          <a:p>
-            <a:r>
-              <a:rPr lang="en-US" dirty="0"/>
-              <a:t>Statistics involves</a:t>
-            </a:r>
-          </a:p>
-          <a:p>
-            <a:endParaRPr lang="en-US" dirty="0"/>
-          </a:p>
-          <a:p>
-            <a:r>
-              <a:rPr lang="en-US" dirty="0"/>
-              <a:t>Collecting (sampling) the data from different kind of observations</a:t>
-            </a:r>
-          </a:p>
-          <a:p>
-            <a:r>
-              <a:rPr lang="en-US" dirty="0"/>
-              <a:t>Visualizing the data, estimating the parameters (average/mean values, errors, etc.)</a:t>
-            </a:r>
-          </a:p>
-          <a:p>
-            <a:r>
-              <a:rPr lang="en-US" dirty="0"/>
-              <a:t>Testing validity of a hypothesis (null hypothesis) – or alternative hypothesis</a:t>
-            </a:r>
-          </a:p>
-          <a:p>
-            <a:r>
-              <a:rPr lang="en-US" dirty="0"/>
-              <a:t>Estimating intervals, estimating significance of observed differences, etc.</a:t>
-            </a:r>
-          </a:p>
-          <a:p>
-            <a:endParaRPr lang="en-US" dirty="0"/>
-          </a:p>
-          <a:p>
-            <a:r>
-              <a:rPr lang="en-US" dirty="0"/>
-              <a:t>Here are some basic formulas:</a:t>
-            </a:r>
-          </a:p>
-          <a:p>
-            <a:endParaRPr lang="en-US" dirty="0"/>
-          </a:p>
-          <a:p>
-            <a:r>
-              <a:rPr lang="en-US" dirty="0"/>
-              <a:t>Statistics formulas</a:t>
-            </a:r>
-          </a:p>
-          <a:p>
-            <a:endParaRPr lang="en-US" dirty="0"/>
-          </a:p>
-          <a:p>
-            <a:r>
-              <a:rPr lang="en-US" dirty="0"/>
-              <a:t>Intuitive explanation for dividing by (n-1) </a:t>
-            </a:r>
-          </a:p>
-          <a:p>
-            <a:r>
-              <a:rPr lang="en-US" dirty="0"/>
-              <a:t>when calculating standard deviation:</a:t>
-            </a:r>
-          </a:p>
-          <a:p>
-            <a:r>
-              <a:rPr lang="en-US" dirty="0"/>
-              <a:t>– http://</a:t>
-            </a:r>
-            <a:r>
-              <a:rPr lang="en-US" dirty="0" err="1"/>
-              <a:t>stats.stackexchange.com</a:t>
-            </a:r>
-            <a:r>
-              <a:rPr lang="en-US" dirty="0"/>
-              <a:t>/questions/3931/intuitive-explanation-for-dividing-by-n-1-when-calculating-standard-deviation</a:t>
-            </a:r>
-          </a:p>
-          <a:p>
-            <a:endParaRPr lang="en-US" dirty="0"/>
+              <a:rPr lang="en-US" sz="1200" b="1" dirty="0">
+                <a:solidFill>
+                  <a:srgbClr val="0070C0"/>
+                </a:solidFill>
+              </a:rPr>
+              <a:t>Central Limit Theorem (CLT).</a:t>
+            </a:r>
+          </a:p>
+          <a:p>
+            <a:endParaRPr lang="en-US" sz="1200" dirty="0"/>
+          </a:p>
+          <a:p>
+            <a:r>
+              <a:rPr lang="en-US" sz="1200" dirty="0"/>
+              <a:t>The normal distribution is very common in nature. </a:t>
+            </a:r>
+          </a:p>
+          <a:p>
+            <a:r>
+              <a:rPr lang="en-US" sz="1200" dirty="0"/>
+              <a:t>Because when we have big number of sets of variables, </a:t>
+            </a:r>
+          </a:p>
+          <a:p>
+            <a:r>
+              <a:rPr lang="en-US" sz="1200" dirty="0"/>
+              <a:t>the distribution of parameters of these sets (for example, averages) </a:t>
+            </a:r>
+          </a:p>
+          <a:p>
+            <a:r>
+              <a:rPr lang="en-US" sz="1200" dirty="0"/>
+              <a:t>tend to converge to this bell form. </a:t>
+            </a:r>
+          </a:p>
+          <a:p>
+            <a:r>
+              <a:rPr lang="en-US" sz="1200" dirty="0"/>
+              <a:t>This fact is called </a:t>
+            </a:r>
+            <a:r>
+              <a:rPr lang="en-US" sz="1200" b="1" dirty="0">
+                <a:solidFill>
+                  <a:srgbClr val="0070C0"/>
+                </a:solidFill>
+              </a:rPr>
+              <a:t>Central Limit Theorem (CLT)</a:t>
+            </a:r>
+            <a:r>
+              <a:rPr lang="en-US" sz="1200" dirty="0"/>
+              <a:t>.</a:t>
+            </a:r>
+          </a:p>
+          <a:p>
+            <a:endParaRPr lang="en-US" sz="1200" dirty="0"/>
+          </a:p>
+          <a:p>
+            <a:r>
+              <a:rPr lang="en-US" sz="1200" dirty="0"/>
+              <a:t>Here is a simple example of CLT:</a:t>
+            </a:r>
+          </a:p>
+          <a:p>
+            <a:endParaRPr lang="en-US" sz="1200" dirty="0"/>
+          </a:p>
+          <a:p>
+            <a:r>
+              <a:rPr lang="en-US" sz="1200" dirty="0"/>
+              <a:t>Suppose we have N1 sets, each set has N2 values, all values drawn from the same distribution. The shape of distribution may be anything (uniform, bell-curve, triangular, exponential, etc.). </a:t>
+            </a:r>
+          </a:p>
+          <a:p>
+            <a:endParaRPr lang="en-US" sz="1200" dirty="0"/>
+          </a:p>
+          <a:p>
+            <a:r>
+              <a:rPr lang="en-US" sz="1200" dirty="0"/>
+              <a:t>We calculate an average in each set – so we have N1 average values.</a:t>
+            </a:r>
+          </a:p>
+          <a:p>
+            <a:r>
+              <a:rPr lang="en-US" sz="1200" dirty="0"/>
+              <a:t>Question: How will these average values be distributed?</a:t>
+            </a:r>
+          </a:p>
+          <a:p>
+            <a:endParaRPr lang="en-US" sz="1200" dirty="0"/>
+          </a:p>
+          <a:p>
+            <a:r>
+              <a:rPr lang="en-US" sz="1200" dirty="0"/>
+              <a:t>Answer: As N1 &amp; N2 become big enough (30+), the distribution </a:t>
+            </a:r>
+          </a:p>
+          <a:p>
+            <a:r>
+              <a:rPr lang="en-US" sz="1200" dirty="0"/>
+              <a:t>will get close to the Normal Gaussian bell curve.</a:t>
+            </a:r>
+          </a:p>
+          <a:p>
+            <a:endParaRPr lang="en-US" sz="1200" dirty="0"/>
+          </a:p>
+          <a:p>
+            <a:r>
+              <a:rPr lang="en-US" sz="1200" dirty="0"/>
+              <a:t>There are some nice animated demonstrations of CLT - just google for them.</a:t>
+            </a:r>
+          </a:p>
+          <a:p>
+            <a:endParaRPr lang="en-US" sz="1200" dirty="0"/>
+          </a:p>
+          <a:p>
+            <a:r>
+              <a:rPr lang="en-US" sz="1200" b="1" dirty="0">
+                <a:solidFill>
+                  <a:srgbClr val="0070C0"/>
+                </a:solidFill>
+              </a:rPr>
+              <a:t>De </a:t>
+            </a:r>
+            <a:r>
+              <a:rPr lang="en-US" sz="1200" b="1" dirty="0" err="1">
+                <a:solidFill>
+                  <a:srgbClr val="0070C0"/>
+                </a:solidFill>
+              </a:rPr>
+              <a:t>Moivre</a:t>
+            </a:r>
+            <a:r>
+              <a:rPr lang="en-US" sz="1200" b="1" dirty="0">
+                <a:solidFill>
+                  <a:srgbClr val="0070C0"/>
+                </a:solidFill>
+              </a:rPr>
+              <a:t>–Laplace theorem</a:t>
+            </a:r>
+          </a:p>
+          <a:p>
+            <a:endParaRPr lang="en-US" sz="1200" dirty="0"/>
+          </a:p>
+          <a:p>
+            <a:r>
+              <a:rPr lang="en-US" sz="1200" dirty="0"/>
+              <a:t>De </a:t>
+            </a:r>
+            <a:r>
+              <a:rPr lang="en-US" sz="1200" dirty="0" err="1"/>
+              <a:t>Moire</a:t>
+            </a:r>
+            <a:r>
+              <a:rPr lang="en-US" sz="1200" dirty="0"/>
+              <a:t>-Laplace theorem is a simple demonstration how a symmetrical binomial distribution can be approximated by Gaussian bell curve (under certain conditions). </a:t>
+            </a:r>
+          </a:p>
+          <a:p>
+            <a:r>
+              <a:rPr lang="en-US" sz="1200" dirty="0"/>
+              <a:t>See video demonstration below.</a:t>
+            </a:r>
+          </a:p>
+          <a:p>
+            <a:endParaRPr lang="en-US" sz="1200" dirty="0"/>
+          </a:p>
+          <a:p>
+            <a:r>
+              <a:rPr lang="en-US" sz="1200" dirty="0">
+                <a:hlinkClick r:id="rId2"/>
+              </a:rPr>
+              <a:t>https://en.wikipedia.org/wiki/De_Moivre–Laplace_theorem</a:t>
+            </a:r>
+            <a:endParaRPr lang="en-US" sz="1200" dirty="0"/>
           </a:p>
         </p:txBody>
       </p:sp>
+      <p:pic>
+        <p:nvPicPr>
+          <p:cNvPr id="2" name="Picture 1">
+            <a:extLst>
+              <a:ext uri="{FF2B5EF4-FFF2-40B4-BE49-F238E27FC236}">
+                <a16:creationId xmlns:a16="http://schemas.microsoft.com/office/drawing/2014/main" id="{1DFF2F23-2904-3344-A6A7-B5727528D6B1}"/>
+              </a:ext>
+            </a:extLst>
+          </p:cNvPr>
+          <p:cNvPicPr>
+            <a:picLocks noChangeAspect="1"/>
+          </p:cNvPicPr>
+          <p:nvPr/>
+        </p:nvPicPr>
+        <p:blipFill>
+          <a:blip r:embed="rId3" cstate="email">
+            <a:extLst>
+              <a:ext uri="{28A0092B-C50C-407E-A947-70E740481C1C}">
+                <a14:useLocalDpi xmlns:a14="http://schemas.microsoft.com/office/drawing/2010/main"/>
+              </a:ext>
+            </a:extLst>
+          </a:blip>
+          <a:stretch>
+            <a:fillRect/>
+          </a:stretch>
+        </p:blipFill>
+        <p:spPr>
+          <a:xfrm>
+            <a:off x="189186" y="5386605"/>
+            <a:ext cx="2942790" cy="1471395"/>
+          </a:xfrm>
+          <a:prstGeom prst="rect">
+            <a:avLst/>
+          </a:prstGeom>
+        </p:spPr>
+      </p:pic>
+      <p:sp>
+        <p:nvSpPr>
+          <p:cNvPr id="3" name="TextBox 2">
+            <a:extLst>
+              <a:ext uri="{FF2B5EF4-FFF2-40B4-BE49-F238E27FC236}">
+                <a16:creationId xmlns:a16="http://schemas.microsoft.com/office/drawing/2014/main" id="{B43A3421-ACF1-E445-9366-AD90709A51F7}"/>
+              </a:ext>
+            </a:extLst>
+          </p:cNvPr>
+          <p:cNvSpPr txBox="1"/>
+          <p:nvPr/>
+        </p:nvSpPr>
+        <p:spPr>
+          <a:xfrm>
+            <a:off x="0" y="3786167"/>
+            <a:ext cx="4728410" cy="1600438"/>
+          </a:xfrm>
+          <a:prstGeom prst="rect">
+            <a:avLst/>
+          </a:prstGeom>
+          <a:noFill/>
+        </p:spPr>
+        <p:txBody>
+          <a:bodyPr wrap="square" rtlCol="0">
+            <a:spAutoFit/>
+          </a:bodyPr>
+          <a:lstStyle/>
+          <a:p>
+            <a:r>
+              <a:rPr lang="en-US" b="1" dirty="0">
+                <a:solidFill>
+                  <a:srgbClr val="0070C0"/>
+                </a:solidFill>
+              </a:rPr>
+              <a:t>Normal (Gaussian Bell-shaped) Distribution</a:t>
+            </a:r>
+          </a:p>
+          <a:p>
+            <a:endParaRPr lang="en-US" dirty="0"/>
+          </a:p>
+          <a:p>
+            <a:r>
+              <a:rPr lang="en-US" dirty="0"/>
+              <a:t>The basic shape of the PDF is </a:t>
+            </a:r>
+            <a:r>
+              <a:rPr lang="en-US" dirty="0" err="1"/>
+              <a:t>exp</a:t>
+            </a:r>
+            <a:r>
+              <a:rPr lang="en-US" dirty="0"/>
+              <a:t>(-x*x/2) </a:t>
+            </a:r>
+          </a:p>
+          <a:p>
+            <a:r>
+              <a:rPr lang="en-US" dirty="0"/>
+              <a:t>You need to add a coefficient to normalize it to 1 </a:t>
+            </a:r>
+          </a:p>
+          <a:p>
+            <a:r>
+              <a:rPr lang="en-US" dirty="0"/>
+              <a:t>(means – make area under the curve equal to exactly 1). </a:t>
+            </a:r>
+          </a:p>
+          <a:p>
+            <a:r>
+              <a:rPr lang="en-US" dirty="0"/>
+              <a:t>You can also have the curves have different position </a:t>
+            </a:r>
+          </a:p>
+          <a:p>
+            <a:r>
+              <a:rPr lang="en-US" dirty="0"/>
+              <a:t>(average value) and different width (sigma).</a:t>
+            </a:r>
+          </a:p>
+        </p:txBody>
+      </p:sp>
+      <p:pic>
+        <p:nvPicPr>
+          <p:cNvPr id="7" name="Picture 6">
+            <a:extLst>
+              <a:ext uri="{FF2B5EF4-FFF2-40B4-BE49-F238E27FC236}">
+                <a16:creationId xmlns:a16="http://schemas.microsoft.com/office/drawing/2014/main" id="{0B272277-7CF1-0940-9323-8AB6E25E0842}"/>
+              </a:ext>
+            </a:extLst>
+          </p:cNvPr>
+          <p:cNvPicPr>
+            <a:picLocks noChangeAspect="1"/>
+          </p:cNvPicPr>
+          <p:nvPr/>
+        </p:nvPicPr>
+        <p:blipFill>
+          <a:blip r:embed="rId4" cstate="email">
+            <a:extLst>
+              <a:ext uri="{28A0092B-C50C-407E-A947-70E740481C1C}">
+                <a14:useLocalDpi xmlns:a14="http://schemas.microsoft.com/office/drawing/2010/main"/>
+              </a:ext>
+            </a:extLst>
+          </a:blip>
+          <a:stretch>
+            <a:fillRect/>
+          </a:stretch>
+        </p:blipFill>
+        <p:spPr>
+          <a:xfrm>
+            <a:off x="402723" y="2668400"/>
+            <a:ext cx="1379764" cy="1028700"/>
+          </a:xfrm>
+          <a:prstGeom prst="rect">
+            <a:avLst/>
+          </a:prstGeom>
+        </p:spPr>
+      </p:pic>
     </p:spTree>
     <p:extLst>
       <p:ext uri="{BB962C8B-B14F-4D97-AF65-F5344CB8AC3E}">
-        <p14:creationId xmlns:p14="http://schemas.microsoft.com/office/powerpoint/2010/main" val="4004690225"/>
+        <p14:creationId xmlns:p14="http://schemas.microsoft.com/office/powerpoint/2010/main" val="3913745046"/>
       </p:ext>
     </p:extLst>
   </p:cSld>
